--- a/sample_source_deck.pptx
+++ b/sample_source_deck.pptx
@@ -4844,7 +4844,7 @@
           </a:bodyPr>
           <a:lstStyle/>
           <a:p>
-            <a:fld id="{308E40AE-4C6B-4C57-85E7-366E3BBE311E}" type="slidenum">
+            <a:fld id="{B42C579C-2DB6-4B07-B6E0-4A2C88428FE3}" type="slidenum">
               <a:rPr lang="ja-JP" smtClean="0" sz="1000">
                 <a:solidFill>
                   <a:srgbClr val="888888"/>
@@ -4860,7 +4860,7 @@
               </a:rPr>
               <a:t>/</a:t>
             </a:r>
-            <a:fld id="{F9E01EFF-D4AA-4DAD-8A99-23CCDE3F92DA}" type="slidecount">
+            <a:fld id="{9D490F3B-078A-44E6-9562-ADD0C5ACADB2}" type="slidecount">
               <a:rPr lang="ja-JP" smtClean="0" sz="1000">
                 <a:solidFill>
                   <a:srgbClr val="888888"/>
@@ -5942,7 +5942,7 @@
           </a:bodyPr>
           <a:lstStyle/>
           <a:p>
-            <a:fld id="{CF0A406C-420E-42F0-8F91-76A519798F74}" type="slidenum">
+            <a:fld id="{F1FDB997-4E0A-4BC1-8344-3E8132476FCD}" type="slidenum">
               <a:rPr lang="ja-JP" smtClean="0" sz="1000">
                 <a:solidFill>
                   <a:srgbClr val="888888"/>
@@ -5958,7 +5958,7 @@
               </a:rPr>
               <a:t>/</a:t>
             </a:r>
-            <a:fld id="{2D624AA9-B0F7-4EFC-952B-28B1AC855147}" type="slidecount">
+            <a:fld id="{E72A7138-FC6F-490B-A13F-CA5046CAFEBF}" type="slidecount">
               <a:rPr lang="ja-JP" smtClean="0" sz="1000">
                 <a:solidFill>
                   <a:srgbClr val="888888"/>
@@ -7430,7 +7430,7 @@
           </a:bodyPr>
           <a:lstStyle/>
           <a:p>
-            <a:fld id="{090C780C-B376-499B-813A-3DA04D6C6DA7}" type="slidenum">
+            <a:fld id="{48C8594B-4E0E-498C-835A-0A4050735DFB}" type="slidenum">
               <a:rPr lang="ja-JP" smtClean="0" sz="1000">
                 <a:solidFill>
                   <a:srgbClr val="888888"/>
@@ -7446,7 +7446,7 @@
               </a:rPr>
               <a:t>/</a:t>
             </a:r>
-            <a:fld id="{8F6E9E1E-48FD-4C79-9629-EDF938FD2642}" type="slidecount">
+            <a:fld id="{9728A10C-79C2-4DC9-8A02-73A7A16E3030}" type="slidecount">
               <a:rPr lang="ja-JP" smtClean="0" sz="1000">
                 <a:solidFill>
                   <a:srgbClr val="888888"/>
@@ -8873,7 +8873,7 @@
           </a:bodyPr>
           <a:lstStyle/>
           <a:p>
-            <a:fld id="{259A97EB-62E1-4634-B9BB-41CC8641DE67}" type="slidenum">
+            <a:fld id="{10F7C78E-D47C-4F5C-837B-BEABF63BA0AD}" type="slidenum">
               <a:rPr lang="ja-JP" smtClean="0" sz="1000">
                 <a:solidFill>
                   <a:srgbClr val="888888"/>
@@ -8889,7 +8889,7 @@
               </a:rPr>
               <a:t>/</a:t>
             </a:r>
-            <a:fld id="{A44305B1-0190-4718-BE6E-655BA99957A6}" type="slidecount">
+            <a:fld id="{C9296D4A-A46B-4DB1-BA40-3DD9304C8572}" type="slidecount">
               <a:rPr lang="ja-JP" smtClean="0" sz="1000">
                 <a:solidFill>
                   <a:srgbClr val="888888"/>
@@ -9860,7 +9860,7 @@
           </a:bodyPr>
           <a:lstStyle/>
           <a:p>
-            <a:fld id="{3232773E-72C2-4FAA-AF85-19D04E970FC7}" type="slidenum">
+            <a:fld id="{82219CED-64C4-4F27-A917-E299F0943A35}" type="slidenum">
               <a:rPr lang="ja-JP" smtClean="0" sz="1000">
                 <a:solidFill>
                   <a:srgbClr val="888888"/>
@@ -9876,7 +9876,7 @@
               </a:rPr>
               <a:t>/</a:t>
             </a:r>
-            <a:fld id="{5EB768F3-2FE6-4CA3-A21C-33B76D765858}" type="slidecount">
+            <a:fld id="{655B885D-E548-404B-B672-94C852E73A0C}" type="slidecount">
               <a:rPr lang="ja-JP" smtClean="0" sz="1000">
                 <a:solidFill>
                   <a:srgbClr val="888888"/>
@@ -10967,7 +10967,7 @@
           </a:bodyPr>
           <a:lstStyle/>
           <a:p>
-            <a:fld id="{D6458B6D-791E-45A4-A0AD-9980E2FF8DB1}" type="slidenum">
+            <a:fld id="{FFD3687F-4B5B-4B15-BB91-24C7B043A4FE}" type="slidenum">
               <a:rPr lang="ja-JP" smtClean="0" sz="1000">
                 <a:solidFill>
                   <a:srgbClr val="888888"/>
@@ -10983,7 +10983,7 @@
               </a:rPr>
               <a:t>/</a:t>
             </a:r>
-            <a:fld id="{A36A1B85-6C23-4C21-ABE6-526A51068267}" type="slidecount">
+            <a:fld id="{3EE62949-C97D-4F17-9E00-5EEDAD582DD6}" type="slidecount">
               <a:rPr lang="ja-JP" smtClean="0" sz="1000">
                 <a:solidFill>
                   <a:srgbClr val="888888"/>
@@ -11963,7 +11963,7 @@
           </a:bodyPr>
           <a:lstStyle/>
           <a:p>
-            <a:fld id="{599AD999-4A74-48F7-90A8-E2264A8B3303}" type="slidenum">
+            <a:fld id="{6AAB20C8-9BC5-4D27-87F3-B15F6CC9335B}" type="slidenum">
               <a:rPr lang="ja-JP" smtClean="0" sz="1000">
                 <a:solidFill>
                   <a:srgbClr val="888888"/>
@@ -11979,7 +11979,7 @@
               </a:rPr>
               <a:t>/</a:t>
             </a:r>
-            <a:fld id="{83E5444C-8D76-417B-ADBD-D2F295811C05}" type="slidecount">
+            <a:fld id="{4AE8CF79-B57F-45BF-A3CB-FDC90F6D930F}" type="slidecount">
               <a:rPr lang="ja-JP" smtClean="0" sz="1000">
                 <a:solidFill>
                   <a:srgbClr val="888888"/>
@@ -13121,7 +13121,7 @@
           </a:bodyPr>
           <a:lstStyle/>
           <a:p>
-            <a:fld id="{30E3AC02-E3BA-432F-BFE1-2B6CB6AF535F}" type="slidenum">
+            <a:fld id="{7155BB6A-7694-4A31-8BE4-2388199C512B}" type="slidenum">
               <a:rPr lang="ja-JP" smtClean="0" sz="1000">
                 <a:solidFill>
                   <a:srgbClr val="888888"/>
@@ -13137,7 +13137,7 @@
               </a:rPr>
               <a:t>/</a:t>
             </a:r>
-            <a:fld id="{70E1910F-8B76-4973-AA53-AF7262529E4B}" type="slidecount">
+            <a:fld id="{498C620D-C832-4E0D-9359-B8F0F5FAB669}" type="slidecount">
               <a:rPr lang="ja-JP" smtClean="0" sz="1000">
                 <a:solidFill>
                   <a:srgbClr val="888888"/>

--- a/sample_source_deck.pptx
+++ b/sample_source_deck.pptx
@@ -15,6 +15,7 @@
     <p:sldId id="263" r:id="rId15"/>
     <p:sldId id="264" r:id="rId16"/>
     <p:sldId id="265" r:id="rId17"/>
+    <p:sldId id="266" r:id="rId18"/>
   </p:sldIdLst>
   <p:sldSz cx="9144000" cy="5143500" type="screen4x3"/>
   <p:notesSz cx="6858000" cy="9144000"/>
@@ -511,7 +512,7 @@
           <a:lstStyle/>
           <a:p>
             <a:r>
-              <a:t>今日は、Claude Codeの振る舞いをプロジェクト基準へ安定させるために、CLAUDE.mdをどう設計するかを整理する。単に便利なメモを置く話ではなく、毎回の作業開始時にAIが参照する判断基準を作る話である。最終的には、ルールの書き方、MEMORY.mdとの分担、スコープ分離、運用での育て方までを一つの設計として捉える。</a:t>
+              <a:t>本資料は、CLAUDE.mdを単なるメモではなく、AIの振る舞いを安定させる設計資産として扱うための整理である。MEMORY.mdとの役割分担、適切な長さ、章立て、スコープ設計、運用改善までを一続きの実務手順として確認する。</a:t>
             </a:r>
           </a:p>
         </p:txBody>
@@ -581,7 +582,77 @@
           <a:lstStyle/>
           <a:p>
             <a:r>
-              <a:t>最後に、Takuyaさんの環境へ引き寄せて考える。全プロジェクト共通の好みはグローバル層へ置くのがよい。プロジェクト固有の技術スタックや危険操作はプロジェクト層へ置く。さらに、frontendやPowerShell、Pythonのような領域ごとの細則はディレクトリ層へ置く。この3レイヤーに分けると、必要な文脈だけを必要な場所で読ませられる。持ち帰るべき判断は、巨大な一枚のルールを書くことではなく、ルールを置く場所そのものを設計することである。 --- [nanobanana2 icon prompt] 3つのフラットアイコンを横一列に並べた1枚の画像を生成する。左から順に: アイコン1: 地球儀と共通設定, アイコン2: プロジェクトフォルダと歯車, アイコン3: 階層化されたディレクトリとルール札。各アイコンは正方形の枠内に収まるシンプルなフラットデザイン。白背景、色統一、ミニマルスタイル、文字なし。</a:t>
+              <a:t>ここまでの話を運用に変えると、CLAUDE.mdは一度作って終わりではない。会話で同じ注意を2回したら、その内容はルールへ昇格する候補である。定期的に古い技術や形骸化したルールを削り、変更後は小さなタスクでAIの振る舞いを確認する。この循環が、実際に効くルールブックを作る。 --- [nanobanana2 icon prompt] 3つのアイコンを横一列、正方形枠、統一色、白背景、文字なしで描く。左から、会話吹き出し、更新される文書、テスト済みチェックマークを表す。</a:t>
+            </a:r>
+          </a:p>
+        </p:txBody>
+      </p:sp>
+      <p:sp>
+        <p:nvSpPr>
+          <p:cNvPr id="4" name="Slide Number Placeholder 3"/>
+          <p:cNvSpPr>
+            <a:spLocks noGrp="1"/>
+          </p:cNvSpPr>
+          <p:nvPr>
+            <p:ph type="sldNum" idx="5" sz="quarter"/>
+          </p:nvPr>
+        </p:nvSpPr>
+        <p:spPr/>
+      </p:sp>
+    </p:spTree>
+  </p:cSld>
+  <p:clrMapOvr>
+    <a:masterClrMapping/>
+  </p:clrMapOvr>
+</p:notes>
+</file>
+
+<file path=ppt/notesSlides/notesSlide11.xml><?xml version="1.0" encoding="utf-8"?>
+<p:notes xmlns:a="http://schemas.openxmlformats.org/drawingml/2006/main" xmlns:p="http://schemas.openxmlformats.org/presentationml/2006/main" xmlns:r="http://schemas.openxmlformats.org/officeDocument/2006/relationships">
+  <p:cSld>
+    <p:spTree>
+      <p:nvGrpSpPr>
+        <p:cNvPr id="1" name=""/>
+        <p:cNvGrpSpPr/>
+        <p:nvPr/>
+      </p:nvGrpSpPr>
+      <p:grpSpPr>
+        <a:xfrm>
+          <a:off x="0" y="0"/>
+          <a:ext cx="0" cy="0"/>
+          <a:chOff x="0" y="0"/>
+          <a:chExt cx="0" cy="0"/>
+        </a:xfrm>
+      </p:grpSpPr>
+      <p:sp>
+        <p:nvSpPr>
+          <p:cNvPr id="2" name="Slide Image Placeholder 1"/>
+          <p:cNvSpPr>
+            <a:spLocks noGrp="1"/>
+          </p:cNvSpPr>
+          <p:nvPr>
+            <p:ph type="sldImg" idx="2"/>
+          </p:nvPr>
+        </p:nvSpPr>
+        <p:spPr/>
+      </p:sp>
+      <p:sp>
+        <p:nvSpPr>
+          <p:cNvPr id="3" name="Notes Placeholder 2"/>
+          <p:cNvSpPr>
+            <a:spLocks noGrp="1"/>
+          </p:cNvSpPr>
+          <p:nvPr>
+            <p:ph type="body" idx="3" sz="quarter"/>
+          </p:nvPr>
+        </p:nvSpPr>
+        <p:spPr/>
+        <p:txBody>
+          <a:bodyPr/>
+          <a:lstStyle/>
+          <a:p>
+            <a:r>
+              <a:t>最後に、Takuyaさんの環境に合わせるなら、3レイヤーで考えるのが分かりやすい。グローバルには日本語回答やテスト重視のような共通の好みを置く。プロジェクト単位では技術や禁止事項を置く。ディレクトリ単位ではUIとインフラのような専門ルールを分ける。これにより、AIに渡す文脈が強すぎず弱すぎない状態になる。 --- [nanobanana2 icon prompt] 3つのアイコンを横一列、正方形枠、統一色、白背景、文字なしで描く。左から、全体設定、プロジェクト箱、ディレクトリ分岐を表す。</a:t>
             </a:r>
           </a:p>
         </p:txBody>
@@ -651,7 +722,7 @@
           <a:lstStyle/>
           <a:p>
             <a:r>
-              <a:t>まず全体の道筋を確認する。前半では、CLAUDE.mdが何者で、MEMORY.mdと何が違い、どのくらいの密度で書くべきかを押さえる。後半では、章立て、rulesによるスコープ分離、用途別テンプレート、継続運用へ進む。ここで大事なのは、CLAUDE.mdを一枚の説明文ではなく、AIの判断を支える複数レイヤーの仕組みとして見ることである。</a:t>
+              <a:t>まず全体像を確認する。前半ではCLAUDE.mdの正体、MEMORY.mdとの違い、情報量の決め方を扱う。後半では章立て、スコープ設計、用途別の注意点、そして継続的に育てる方法へ進む。単なるテンプレート紹介ではなく、どの判断がAIの安定性に効くかを見ていく構成である。</a:t>
             </a:r>
           </a:p>
         </p:txBody>
@@ -721,7 +792,7 @@
           <a:lstStyle/>
           <a:p>
             <a:r>
-              <a:t>まず押さえるべき前提は、CLAUDE.mdが単なる備忘録ではなく、セッション開始時に読み込まれる行動基準だという点である。ここにプロジェクトの目的、守るべき制約、作業手順を置くことで、毎回同じ説明を繰り返す必要が減る。曖昧な依頼が来たときも、AIはこの基準線に沿って命名、検証、報告の仕方を選びやすくなる。つまりCLAUDE.mdは、会話のたびに揺れがちな期待値を、プロジェクト標準へ変換する装置である。</a:t>
+              <a:t>導入として押さえるべき点は、CLAUDE.mdが設定ファイルというより、セッション開始時に参照される行動基準であることだ。毎回同じ前提を説明する代わりに、守るべきルール、作業手順、プロジェクト固有の判断軸をここへ集約する。その結果、AIは場当たり的な回答ではなく、プロジェクトの期待値に沿った作業をしやすくなる。</a:t>
             </a:r>
           </a:p>
         </p:txBody>
@@ -791,7 +862,7 @@
           <a:lstStyle/>
           <a:p>
             <a:r>
-              <a:t>ここで混同しやすいのは、CLAUDE.mdとMEMORY.mdをどちらも「文脈」として同じ棚に置いてしまうことである。CLAUDE.mdはユーザーが明示的に書く強制ルールであり、プロジェクトや組織の基準を固定する。一方、MEMORY.mdやAuto memoryは、作業から得た癖や好みを補助的に扱う。両者を分けると、必ず守るべき規約と、参考にするだけの傾向が混線しない。ここを分けることが、長期文脈を安定させる最初の実務判断である。</a:t>
+              <a:t>ここで混同しやすいのは、どちらもコンテキストに見える点である。CLAUDE.mdはユーザーが明示的に置く強制指示であり、プロジェクトや組織の基準を表す。一方、MEMORY.mdやAuto memoryはAI側が蓄積する傾向や好みのメモである。強いルールと弱い学習結果を分けることで、意図しない挙動の固定化を防げる。</a:t>
             </a:r>
           </a:p>
         </p:txBody>
@@ -861,7 +932,7 @@
           <a:lstStyle/>
           <a:p>
             <a:r>
-              <a:t>役割の違いを整理したら、次はCLAUDE.md自体の密度を考える。ルールを増やすほど安心に見えるが、実際には重要な指示が埋もれ、AIが優先順位を取りにくくなる。だからこそ、常に守るものだけを厳選し、1ルール1文で読み切れる粒度にする必要がある。さらに、抽象的なスローガンではなく、実行できるコマンドや完了条件まで書くことで、AIは迷わず作業へ移れる。 --- [nanobanana2 icon prompt] 3つのフラットアイコンを横一列に並べた1枚の画像を生成する。左から順に: アイコン1: 重要ルールを選別するフィルター, アイコン2: 1文の短いルールカード, アイコン3: 実行コマンドを示す端末とチェックマーク。各アイコンは正方形の枠内に収まるシンプルなフラットデザイン。白背景、色統一、ミニマルスタイル、文字なし。</a:t>
+              <a:t>次に見るべき論点は、どれだけ書くかである。ルールは多いほど安心に見えるが、実際には重要なものが埋もれると遵守率が落ちる。60から300行程度を目安にし、1ルール1文で、実行可能な形にする。抽象的な精神論ではなく、AIが次の行動へ変換できる文だけを残すことが肝心である。 --- [nanobanana2 icon prompt] 3つのアイコンを横一列、正方形枠、統一色、白背景、文字なしで描く。左から、絞り込みを表す漏斗、短いルール文を表すチェック付き文書、実行コマンドを表す端末。</a:t>
             </a:r>
           </a:p>
         </p:txBody>
@@ -931,7 +1002,7 @@
           <a:lstStyle/>
           <a:p>
             <a:r>
-              <a:t>では、実際に何を書けばAIは迷いにくくなるのか。ここでは章立てを、単なる整理ではなく作業地図として見る。プロジェクト概要は目的地を示し、技術スタックは使う道具を固定する。ディレクトリ構成はファイル探索の手掛かりになり、コマンド集は検証手順へ直結する。さらに作業ルールと落とし穴を入れると、AIは変更前後の判断まで揃えやすくなる。この章立てがあることで、依頼ごとに探すべき情報がぶれにくくなる。</a:t>
+              <a:t>この表は章名の羅列ではなく、AIが作業前に何を理解すべきかの順番を示している。概要で目的をつかみ、技術スタックと構成で触る場所を判断し、コマンドと規約で実行方法をそろえる。最後にワークフローと落とし穴を置くことで、変更の前後に何を確認すべきかが明確になる。</a:t>
             </a:r>
           </a:p>
         </p:txBody>
@@ -1001,7 +1072,7 @@
           <a:lstStyle/>
           <a:p>
             <a:r>
-              <a:t>章立てが整っても、大規模なリポジトリでは一つのCLAUDE.mdにすべてを詰め込むと重くなる。実際に運用へ移すと、全体共通のルールと、frontendやinfraのような領域固有のルールは分けた方がよい。まずルートには安全策や検証基準など全体原則を置く。次に領域別のrulesへ分離する。最後に、作業対象に近いルールを優先して読むことで、関係ない制約の干渉を避けられる。 --- [nanobanana2 icon prompt] 3つのフラットアイコンを横一列に並べた1枚の画像を生成する。左から順に: アイコン1: ルートフォルダと共通ルール, アイコン2: frontendとinfraに分かれたフォルダ, アイコン3: 作業ファイルへ必要なルールだけが流れる矢印。各アイコンは正方形の枠内に収まるシンプルなフラットデザイン。白背景、色統一、ミニマルスタイル、文字なし。</a:t>
+              <a:t>実際にCLAUDE.mdを書く時は、理想論から始めず、AIが実行できる手順へ落とす。まず開発、テスト、型チェック、lintのコマンドを確認する。次に触ってよい場所と触ってはいけない場所を分ける。最後に、変更後の検証順と失敗時の対応を明示する。ここまで書くと、AIは推測ではなく手順に沿って動ける。 --- [nanobanana2 icon prompt] 4つのアイコンを横一列、正方形枠、統一色、白背景、文字なしで描く。左から、端末コマンド、フォルダ地図、禁止マーク付きデータベース、チェック完了リスト。</a:t>
             </a:r>
           </a:p>
         </p:txBody>
@@ -1071,7 +1142,7 @@
           <a:lstStyle/>
           <a:p>
             <a:r>
-              <a:t>スコープを分けたうえで、次に考えるべきなのは用途ごとの差分である。WebアプリではUIライブラリやAPI配置のぶれが品質に直結する。データ分析では、保存場所や再現性が崩れると結果を追えなくなる。スクリプトや自動化では、対象OSや安全策を曖昧にすると事故につながる。つまりCLAUDE.mdのテンプレートは一種類で固定するのではなく、現場で起きやすい失敗に合わせて章の重みを変える必要がある。 --- [nanobanana2 icon prompt] 3つのフラットアイコンを横一列に並べた1枚の画像を生成する。左から順に: アイコン1: Webアプリ画面とUI部品, アイコン2: データ表と分析グラフ, アイコン3: 自動化スクリプトと安全確認。各アイコンは正方形の枠内に収まるシンプルなフラットデザイン。白背景、色統一、ミニマルスタイル、文字なし。</a:t>
+              <a:t>大きなリポジトリでは、全ルールを1つに詰めると、今の作業に関係ない情報まで読ませることになる。そこで、ルートには共通ルールを置き、frontendやinfraのような領域別ファイルへ分ける。AIが触っているファイルに近いルールほど具体的にし、遠いルールほど普遍的にすることで、判断のノイズを下げられる。 --- [nanobanana2 icon prompt] 3つのアイコンを横一列、正方形枠、統一色、白背景、文字なしで描く。左から、ルート文書、UI画面、インフラ端末を表すミニマルな図。</a:t>
             </a:r>
           </a:p>
         </p:txBody>
@@ -1141,7 +1212,7 @@
           <a:lstStyle/>
           <a:p>
             <a:r>
-              <a:t>ここまでで初期設計の考え方を見てきたが、CLAUDE.mdは一度書いて終わりではない。むしろ、会話の中で同じ注意を2回言ったら、それはルール化の候補である。次に、古くなった技術スタックや形骸化した制約を削らないと、重要な指示が埋もれていく。最後に、小さなタスクでAIの振る舞いを確認すれば、書いたルールが実際に効いているか分かる。運用の中で改善する前提を持つことが、CLAUDE.mdを生きた設計物にする。 --- [nanobanana2 icon prompt] 3つのフラットアイコンを横一列に並べた1枚の画像を生成する。左から順に: アイコン1: 会話の注意が文書へ移る矢印, アイコン2: 古いルールを削る編集ペン, アイコン3: 小さなテストタスクのチェックマーク。各アイコンは正方形の枠内に収まるシンプルなフラットデザイン。白背景、色統一、ミニマルスタイル、文字なし。</a:t>
+              <a:t>同じCLAUDE.mdでも、対象プロジェクトによって効くルールは変わる。WebアプリではUIライブラリやAPI配置が重要であり、データ分析では再現性とデータ置き場が重要になる。自動化スクリプトでは対象OSと安全策が中心である。用途ごとの失敗パターンを先に書くことで、AIの提案が現場の前提から外れにくくなる。 --- [nanobanana2 icon prompt] 3つのアイコンを横一列、正方形枠、統一色、白背景、文字なしで描く。左から、Web画面、分析グラフ、PowerShell端末と安全チェックを表す。</a:t>
             </a:r>
           </a:p>
         </p:txBody>
@@ -4214,7 +4285,7 @@
                 </a:solidFill>
                 <a:latin typeface="Segoe UI"/>
               </a:rPr>
-              <a:t>CLAUDE.md</a:t>
+              <a:t>CLAUDE.md </a:t>
             </a:r>
             <a:r>
               <a:rPr lang="ja-JP" sz="2800" b="1" i="0" dirty="0">
@@ -4223,7 +4294,7 @@
                 </a:solidFill>
                 <a:ea typeface="Meiryo"/>
               </a:rPr>
-              <a:t>設計ガイド</a:t>
+              <a:t>設計の実務ガイド</a:t>
             </a:r>
           </a:p>
           <a:p>
@@ -4239,7 +4310,7 @@
                 </a:solidFill>
                 <a:ea typeface="Meiryo"/>
               </a:rPr>
-              <a:t>長期文脈を安定させるルールブックの作り方</a:t>
+              <a:t>長期文脈を、毎回効くルールブックへ変える</a:t>
             </a:r>
           </a:p>
         </p:txBody>
@@ -4318,7 +4389,7 @@
                 </a:solidFill>
                 <a:latin typeface="Segoe UI"/>
               </a:rPr>
-              <a:t>Project Knowledge Design</a:t>
+              <a:t>Project Guidance</a:t>
             </a:r>
           </a:p>
         </p:txBody>
@@ -4511,7 +4582,7 @@
                 </a:solidFill>
                 <a:latin typeface="Segoe UI"/>
               </a:rPr>
-              <a:t>Takuya</a:t>
+              <a:t>CLAUDE.md</a:t>
             </a:r>
             <a:r>
               <a:rPr lang="ja-JP" sz="2400" b="1" i="0" dirty="0">
@@ -4520,25 +4591,7 @@
                 </a:solidFill>
                 <a:ea typeface="Meiryo"/>
               </a:rPr>
-              <a:t>さんの環境は</a:t>
-            </a:r>
-            <a:r>
-              <a:rPr lang="en-US" sz="2400" b="1" i="0" dirty="0">
-                <a:solidFill>
-                  <a:srgbClr val="FFFFFF"/>
-                </a:solidFill>
-                <a:latin typeface="Segoe UI"/>
-              </a:rPr>
-              <a:t>3</a:t>
-            </a:r>
-            <a:r>
-              <a:rPr lang="ja-JP" sz="2400" b="1" i="0" dirty="0">
-                <a:solidFill>
-                  <a:srgbClr val="FFFFFF"/>
-                </a:solidFill>
-                <a:ea typeface="Meiryo"/>
-              </a:rPr>
-              <a:t>レイヤー設計が有効である</a:t>
+              <a:t>は運用で育てる</a:t>
             </a:r>
           </a:p>
         </p:txBody>
@@ -4573,21 +4626,297 @@
                 </a:solidFill>
                 <a:ea typeface="Meiryo"/>
               </a:rPr>
-              <a:t>全体の好み、プロジェクト制約、ディレクトリ規約を分けて管理する</a:t>
-            </a:r>
-          </a:p>
-        </p:txBody>
-      </p:sp>
-      <p:sp>
-        <p:nvSpPr>
-          <p:cNvPr id="5" name="Rectangle 4"/>
+              <a:t>繰り返した注意をルールへ昇格させる</a:t>
+            </a:r>
+          </a:p>
+        </p:txBody>
+      </p:sp>
+      <p:sp>
+        <p:nvSpPr>
+          <p:cNvPr id="5" name="Step5"/>
           <p:cNvSpPr/>
           <p:nvPr/>
         </p:nvSpPr>
         <p:spPr>
           <a:xfrm>
             <a:off x="164592" y="941832"/>
-            <a:ext cx="2889504" cy="2371725"/>
+            <a:ext cx="2889504" cy="959205"/>
+          </a:xfrm>
+          <a:custGeom>
+            <a:avLst/>
+            <a:gdLst/>
+            <a:ahLst/>
+            <a:cxnLst/>
+            <a:rect l="0" t="0" r="r" b="b"/>
+            <a:pathLst>
+              <a:path w="100000" h="100000">
+                <a:moveTo>
+                  <a:pt x="0" y="0"/>
+                </a:moveTo>
+                <a:lnTo>
+                  <a:pt x="88000" y="0"/>
+                </a:lnTo>
+                <a:lnTo>
+                  <a:pt x="100000" y="50000"/>
+                </a:lnTo>
+                <a:lnTo>
+                  <a:pt x="88000" y="100000"/>
+                </a:lnTo>
+                <a:lnTo>
+                  <a:pt x="0" y="100000"/>
+                </a:lnTo>
+                <a:close/>
+              </a:path>
+            </a:pathLst>
+          </a:custGeom>
+          <a:solidFill>
+            <a:srgbClr val="D0D0D0"/>
+          </a:solidFill>
+          <a:ln w="9525">
+            <a:solidFill>
+              <a:srgbClr val="CCCCCC"/>
+            </a:solidFill>
+          </a:ln>
+          <a:effectLst/>
+        </p:spPr>
+        <p:txBody>
+          <a:bodyPr/>
+          <a:lstStyle/>
+          <a:p/>
+        </p:txBody>
+      </p:sp>
+      <p:sp>
+        <p:nvSpPr>
+          <p:cNvPr id="6" name="TextBox 5"/>
+          <p:cNvSpPr txBox="1"/>
+          <p:nvPr/>
+        </p:nvSpPr>
+        <p:spPr>
+          <a:xfrm>
+            <a:off x="301751" y="941832"/>
+            <a:ext cx="2456078" cy="959205"/>
+          </a:xfrm>
+          <a:prstGeom prst="rect">
+            <a:avLst/>
+          </a:prstGeom>
+          <a:noFill/>
+          <a:effectLst/>
+        </p:spPr>
+        <p:txBody>
+          <a:bodyPr wrap="square" lIns="0" rIns="0" tIns="0" bIns="0" anchor="ctr">
+            <a:noAutofit/>
+          </a:bodyPr>
+          <a:lstStyle/>
+          <a:p>
+            <a:r>
+              <a:rPr lang="en-US" sz="1400" b="1" i="0" dirty="0">
+                <a:solidFill>
+                  <a:srgbClr val="333333"/>
+                </a:solidFill>
+                <a:latin typeface="Segoe UI"/>
+              </a:rPr>
+              <a:t>2</a:t>
+            </a:r>
+            <a:r>
+              <a:rPr lang="ja-JP" sz="1400" b="1" i="0" dirty="0">
+                <a:solidFill>
+                  <a:srgbClr val="333333"/>
+                </a:solidFill>
+                <a:ea typeface="Meiryo"/>
+              </a:rPr>
+              <a:t>回言ったら追加する</a:t>
+            </a:r>
+          </a:p>
+        </p:txBody>
+      </p:sp>
+      <p:sp>
+        <p:nvSpPr>
+          <p:cNvPr id="7" name="Step7"/>
+          <p:cNvSpPr/>
+          <p:nvPr/>
+        </p:nvSpPr>
+        <p:spPr>
+          <a:xfrm>
+            <a:off x="3127248" y="941832"/>
+            <a:ext cx="2889504" cy="959205"/>
+          </a:xfrm>
+          <a:custGeom>
+            <a:avLst/>
+            <a:gdLst/>
+            <a:ahLst/>
+            <a:cxnLst/>
+            <a:rect l="0" t="0" r="r" b="b"/>
+            <a:pathLst>
+              <a:path w="100000" h="100000">
+                <a:moveTo>
+                  <a:pt x="0" y="0"/>
+                </a:moveTo>
+                <a:lnTo>
+                  <a:pt x="88000" y="0"/>
+                </a:lnTo>
+                <a:lnTo>
+                  <a:pt x="100000" y="50000"/>
+                </a:lnTo>
+                <a:lnTo>
+                  <a:pt x="88000" y="100000"/>
+                </a:lnTo>
+                <a:lnTo>
+                  <a:pt x="0" y="100000"/>
+                </a:lnTo>
+                <a:close/>
+              </a:path>
+            </a:pathLst>
+          </a:custGeom>
+          <a:solidFill>
+            <a:srgbClr val="D0D0D0"/>
+          </a:solidFill>
+          <a:ln w="9525">
+            <a:solidFill>
+              <a:srgbClr val="CCCCCC"/>
+            </a:solidFill>
+          </a:ln>
+          <a:effectLst/>
+        </p:spPr>
+        <p:txBody>
+          <a:bodyPr/>
+          <a:lstStyle/>
+          <a:p/>
+        </p:txBody>
+      </p:sp>
+      <p:sp>
+        <p:nvSpPr>
+          <p:cNvPr id="8" name="TextBox 7"/>
+          <p:cNvSpPr txBox="1"/>
+          <p:nvPr/>
+        </p:nvSpPr>
+        <p:spPr>
+          <a:xfrm>
+            <a:off x="3264408" y="941832"/>
+            <a:ext cx="2456078" cy="959205"/>
+          </a:xfrm>
+          <a:prstGeom prst="rect">
+            <a:avLst/>
+          </a:prstGeom>
+          <a:noFill/>
+          <a:effectLst/>
+        </p:spPr>
+        <p:txBody>
+          <a:bodyPr wrap="square" lIns="0" rIns="0" tIns="0" bIns="0" anchor="ctr">
+            <a:noAutofit/>
+          </a:bodyPr>
+          <a:lstStyle/>
+          <a:p>
+            <a:r>
+              <a:rPr lang="ja-JP" sz="1400" b="1" i="0" dirty="0">
+                <a:solidFill>
+                  <a:srgbClr val="333333"/>
+                </a:solidFill>
+                <a:ea typeface="Meiryo"/>
+              </a:rPr>
+              <a:t>古いルールを削る</a:t>
+            </a:r>
+          </a:p>
+        </p:txBody>
+      </p:sp>
+      <p:sp>
+        <p:nvSpPr>
+          <p:cNvPr id="9" name="Step9"/>
+          <p:cNvSpPr/>
+          <p:nvPr/>
+        </p:nvSpPr>
+        <p:spPr>
+          <a:xfrm>
+            <a:off x="6089904" y="941832"/>
+            <a:ext cx="2889504" cy="959205"/>
+          </a:xfrm>
+          <a:custGeom>
+            <a:avLst/>
+            <a:gdLst/>
+            <a:ahLst/>
+            <a:cxnLst/>
+            <a:rect l="0" t="0" r="r" b="b"/>
+            <a:pathLst>
+              <a:path w="100000" h="100000">
+                <a:moveTo>
+                  <a:pt x="0" y="0"/>
+                </a:moveTo>
+                <a:lnTo>
+                  <a:pt x="88000" y="0"/>
+                </a:lnTo>
+                <a:lnTo>
+                  <a:pt x="100000" y="50000"/>
+                </a:lnTo>
+                <a:lnTo>
+                  <a:pt x="88000" y="100000"/>
+                </a:lnTo>
+                <a:lnTo>
+                  <a:pt x="0" y="100000"/>
+                </a:lnTo>
+                <a:close/>
+              </a:path>
+            </a:pathLst>
+          </a:custGeom>
+          <a:solidFill>
+            <a:srgbClr val="D0D0D0"/>
+          </a:solidFill>
+          <a:ln w="9525">
+            <a:solidFill>
+              <a:srgbClr val="CCCCCC"/>
+            </a:solidFill>
+          </a:ln>
+          <a:effectLst/>
+        </p:spPr>
+        <p:txBody>
+          <a:bodyPr/>
+          <a:lstStyle/>
+          <a:p/>
+        </p:txBody>
+      </p:sp>
+      <p:sp>
+        <p:nvSpPr>
+          <p:cNvPr id="10" name="TextBox 9"/>
+          <p:cNvSpPr txBox="1"/>
+          <p:nvPr/>
+        </p:nvSpPr>
+        <p:spPr>
+          <a:xfrm>
+            <a:off x="6227064" y="941832"/>
+            <a:ext cx="2456078" cy="959205"/>
+          </a:xfrm>
+          <a:prstGeom prst="rect">
+            <a:avLst/>
+          </a:prstGeom>
+          <a:noFill/>
+          <a:effectLst/>
+        </p:spPr>
+        <p:txBody>
+          <a:bodyPr wrap="square" lIns="0" rIns="0" tIns="0" bIns="0" anchor="ctr">
+            <a:noAutofit/>
+          </a:bodyPr>
+          <a:lstStyle/>
+          <a:p>
+            <a:r>
+              <a:rPr lang="ja-JP" sz="1400" b="1" i="0" dirty="0">
+                <a:solidFill>
+                  <a:srgbClr val="333333"/>
+                </a:solidFill>
+                <a:ea typeface="Meiryo"/>
+              </a:rPr>
+              <a:t>小さく振る舞いを見る</a:t>
+            </a:r>
+          </a:p>
+        </p:txBody>
+      </p:sp>
+      <p:sp>
+        <p:nvSpPr>
+          <p:cNvPr id="11" name="Rectangle 10"/>
+          <p:cNvSpPr/>
+          <p:nvPr/>
+        </p:nvSpPr>
+        <p:spPr>
+          <a:xfrm>
+            <a:off x="164592" y="1974189"/>
+            <a:ext cx="2889504" cy="2638958"/>
           </a:xfrm>
           <a:prstGeom prst="rect">
             <a:avLst/>
@@ -4626,93 +4955,14 @@
       </p:sp>
       <p:sp>
         <p:nvSpPr>
-          <p:cNvPr id="6" name="TextBox 5"/>
+          <p:cNvPr id="12" name="TextBox 11"/>
           <p:cNvSpPr txBox="1"/>
           <p:nvPr/>
         </p:nvSpPr>
         <p:spPr>
           <a:xfrm>
-            <a:off x="301751" y="1051560"/>
-            <a:ext cx="2615184" cy="320040"/>
-          </a:xfrm>
-          <a:prstGeom prst="rect">
-            <a:avLst/>
-          </a:prstGeom>
-          <a:noFill/>
-          <a:effectLst/>
-        </p:spPr>
-        <p:txBody>
-          <a:bodyPr wrap="square" lIns="0" rIns="0" tIns="0" bIns="0" anchor="t">
-            <a:noAutofit/>
-          </a:bodyPr>
-          <a:lstStyle/>
-          <a:p>
-            <a:r>
-              <a:rPr lang="ja-JP" sz="1400" b="1" i="0" dirty="0">
-                <a:solidFill>
-                  <a:srgbClr val="333333"/>
-                </a:solidFill>
-                <a:ea typeface="Meiryo"/>
-              </a:rPr>
-              <a:t>グローバル</a:t>
-            </a:r>
-          </a:p>
-        </p:txBody>
-      </p:sp>
-      <p:sp>
-        <p:nvSpPr>
-          <p:cNvPr id="7" name="Rectangle 6"/>
-          <p:cNvSpPr/>
-          <p:nvPr/>
-        </p:nvSpPr>
-        <p:spPr>
-          <a:xfrm>
-            <a:off x="301751" y="1307592"/>
-            <a:ext cx="2615184" cy="12700"/>
-          </a:xfrm>
-          <a:prstGeom prst="rect">
-            <a:avLst/>
-          </a:prstGeom>
-          <a:solidFill>
-            <a:srgbClr val="E0E0E0"/>
-          </a:solidFill>
-          <a:ln>
-            <a:noFill/>
-          </a:ln>
-          <a:effectLst/>
-        </p:spPr>
-        <p:style>
-          <a:lnRef idx="1">
-            <a:schemeClr val="accent1"/>
-          </a:lnRef>
-          <a:fillRef idx="3">
-            <a:schemeClr val="accent1"/>
-          </a:fillRef>
-          <a:effectRef idx="2">
-            <a:schemeClr val="accent1"/>
-          </a:effectRef>
-          <a:fontRef idx="minor">
-            <a:schemeClr val="lt1"/>
-          </a:fontRef>
-        </p:style>
-        <p:txBody>
-          <a:bodyPr rtlCol="0" anchor="ctr"/>
-          <a:lstStyle/>
-          <a:p>
-            <a:pPr algn="ctr"/>
-          </a:p>
-        </p:txBody>
-      </p:sp>
-      <p:sp>
-        <p:nvSpPr>
-          <p:cNvPr id="8" name="TextBox 7"/>
-          <p:cNvSpPr txBox="1"/>
-          <p:nvPr/>
-        </p:nvSpPr>
-        <p:spPr>
-          <a:xfrm>
-            <a:off x="301751" y="1380744"/>
-            <a:ext cx="2615184" cy="1823085"/>
+            <a:off x="301751" y="2083917"/>
+            <a:ext cx="2615184" cy="2419502"/>
           </a:xfrm>
           <a:prstGeom prst="rect">
             <a:avLst/>
@@ -4745,7 +4995,632 @@
                 </a:solidFill>
                 <a:ea typeface="Meiryo"/>
               </a:rPr>
-              <a:t>全プロジェクト共通の好みを置く。</a:t>
+              <a:t>同じ注意が繰り返されるなら、会話ではなくルールに置くべきサインである。</a:t>
+            </a:r>
+          </a:p>
+        </p:txBody>
+      </p:sp>
+      <p:sp>
+        <p:nvSpPr>
+          <p:cNvPr id="13" name="Rectangle 12"/>
+          <p:cNvSpPr/>
+          <p:nvPr/>
+        </p:nvSpPr>
+        <p:spPr>
+          <a:xfrm>
+            <a:off x="3127248" y="1974189"/>
+            <a:ext cx="2889504" cy="2638958"/>
+          </a:xfrm>
+          <a:prstGeom prst="rect">
+            <a:avLst/>
+          </a:prstGeom>
+          <a:solidFill>
+            <a:srgbClr val="F5F5F5"/>
+          </a:solidFill>
+          <a:ln w="9525">
+            <a:solidFill>
+              <a:srgbClr val="E0E0E0"/>
+            </a:solidFill>
+          </a:ln>
+          <a:effectLst/>
+        </p:spPr>
+        <p:style>
+          <a:lnRef idx="1">
+            <a:schemeClr val="accent1"/>
+          </a:lnRef>
+          <a:fillRef idx="3">
+            <a:schemeClr val="accent1"/>
+          </a:fillRef>
+          <a:effectRef idx="2">
+            <a:schemeClr val="accent1"/>
+          </a:effectRef>
+          <a:fontRef idx="minor">
+            <a:schemeClr val="lt1"/>
+          </a:fontRef>
+        </p:style>
+        <p:txBody>
+          <a:bodyPr rtlCol="0" anchor="ctr"/>
+          <a:lstStyle/>
+          <a:p>
+            <a:pPr algn="ctr"/>
+          </a:p>
+        </p:txBody>
+      </p:sp>
+      <p:sp>
+        <p:nvSpPr>
+          <p:cNvPr id="14" name="TextBox 13"/>
+          <p:cNvSpPr txBox="1"/>
+          <p:nvPr/>
+        </p:nvSpPr>
+        <p:spPr>
+          <a:xfrm>
+            <a:off x="3264408" y="2083917"/>
+            <a:ext cx="2615184" cy="2419502"/>
+          </a:xfrm>
+          <a:prstGeom prst="rect">
+            <a:avLst/>
+          </a:prstGeom>
+          <a:noFill/>
+          <a:effectLst/>
+        </p:spPr>
+        <p:txBody>
+          <a:bodyPr wrap="square" lIns="0" rIns="0" tIns="0" bIns="0">
+            <a:noAutofit/>
+          </a:bodyPr>
+          <a:lstStyle/>
+          <a:p>
+            <a:pPr>
+              <a:spcBef>
+                <a:spcPts val="0"/>
+              </a:spcBef>
+              <a:spcAft>
+                <a:spcPts val="400"/>
+              </a:spcAft>
+              <a:buNone/>
+              <a:lnSpc>
+                <a:spcPts val="1980"/>
+              </a:lnSpc>
+            </a:pPr>
+            <a:r>
+              <a:rPr lang="ja-JP" sz="1100" b="0" i="0" dirty="0">
+                <a:solidFill>
+                  <a:srgbClr val="333333"/>
+                </a:solidFill>
+                <a:ea typeface="Meiryo"/>
+              </a:rPr>
+              <a:t>使わない技術スタックや形だけの制約は、重要ルールを埋もれさせる。</a:t>
+            </a:r>
+          </a:p>
+        </p:txBody>
+      </p:sp>
+      <p:sp>
+        <p:nvSpPr>
+          <p:cNvPr id="15" name="Rectangle 14"/>
+          <p:cNvSpPr/>
+          <p:nvPr/>
+        </p:nvSpPr>
+        <p:spPr>
+          <a:xfrm>
+            <a:off x="6089904" y="1974189"/>
+            <a:ext cx="2889504" cy="2638958"/>
+          </a:xfrm>
+          <a:prstGeom prst="rect">
+            <a:avLst/>
+          </a:prstGeom>
+          <a:solidFill>
+            <a:srgbClr val="F5F5F5"/>
+          </a:solidFill>
+          <a:ln w="9525">
+            <a:solidFill>
+              <a:srgbClr val="E0E0E0"/>
+            </a:solidFill>
+          </a:ln>
+          <a:effectLst/>
+        </p:spPr>
+        <p:style>
+          <a:lnRef idx="1">
+            <a:schemeClr val="accent1"/>
+          </a:lnRef>
+          <a:fillRef idx="3">
+            <a:schemeClr val="accent1"/>
+          </a:fillRef>
+          <a:effectRef idx="2">
+            <a:schemeClr val="accent1"/>
+          </a:effectRef>
+          <a:fontRef idx="minor">
+            <a:schemeClr val="lt1"/>
+          </a:fontRef>
+        </p:style>
+        <p:txBody>
+          <a:bodyPr rtlCol="0" anchor="ctr"/>
+          <a:lstStyle/>
+          <a:p>
+            <a:pPr algn="ctr"/>
+          </a:p>
+        </p:txBody>
+      </p:sp>
+      <p:sp>
+        <p:nvSpPr>
+          <p:cNvPr id="16" name="TextBox 15"/>
+          <p:cNvSpPr txBox="1"/>
+          <p:nvPr/>
+        </p:nvSpPr>
+        <p:spPr>
+          <a:xfrm>
+            <a:off x="6227064" y="2083917"/>
+            <a:ext cx="2615184" cy="2419502"/>
+          </a:xfrm>
+          <a:prstGeom prst="rect">
+            <a:avLst/>
+          </a:prstGeom>
+          <a:noFill/>
+          <a:effectLst/>
+        </p:spPr>
+        <p:txBody>
+          <a:bodyPr wrap="square" lIns="0" rIns="0" tIns="0" bIns="0">
+            <a:noAutofit/>
+          </a:bodyPr>
+          <a:lstStyle/>
+          <a:p>
+            <a:pPr>
+              <a:spcBef>
+                <a:spcPts val="0"/>
+              </a:spcBef>
+              <a:spcAft>
+                <a:spcPts val="400"/>
+              </a:spcAft>
+              <a:buNone/>
+              <a:lnSpc>
+                <a:spcPts val="1980"/>
+              </a:lnSpc>
+            </a:pPr>
+            <a:r>
+              <a:rPr lang="ja-JP" sz="1100" b="0" i="0" dirty="0">
+                <a:solidFill>
+                  <a:srgbClr val="333333"/>
+                </a:solidFill>
+                <a:ea typeface="Meiryo"/>
+              </a:rPr>
+              <a:t>更新後は軽いタスクを投げ、期待どおりに調査、変更、検証するか確認する。</a:t>
+            </a:r>
+          </a:p>
+        </p:txBody>
+      </p:sp>
+      <p:sp>
+        <p:nvSpPr>
+          <p:cNvPr id="17" name="Rectangle 16"/>
+          <p:cNvSpPr/>
+          <p:nvPr/>
+        </p:nvSpPr>
+        <p:spPr>
+          <a:xfrm>
+            <a:off x="0" y="4777740"/>
+            <a:ext cx="9144000" cy="9525"/>
+          </a:xfrm>
+          <a:prstGeom prst="rect">
+            <a:avLst/>
+          </a:prstGeom>
+          <a:solidFill>
+            <a:srgbClr val="E0E0E0"/>
+          </a:solidFill>
+          <a:ln>
+            <a:noFill/>
+          </a:ln>
+          <a:effectLst/>
+        </p:spPr>
+        <p:style>
+          <a:lnRef idx="1">
+            <a:schemeClr val="accent1"/>
+          </a:lnRef>
+          <a:fillRef idx="3">
+            <a:schemeClr val="accent1"/>
+          </a:fillRef>
+          <a:effectRef idx="2">
+            <a:schemeClr val="accent1"/>
+          </a:effectRef>
+          <a:fontRef idx="minor">
+            <a:schemeClr val="lt1"/>
+          </a:fontRef>
+        </p:style>
+        <p:txBody>
+          <a:bodyPr rtlCol="0" anchor="ctr"/>
+          <a:lstStyle/>
+          <a:p>
+            <a:pPr algn="ctr"/>
+          </a:p>
+        </p:txBody>
+      </p:sp>
+      <p:sp>
+        <p:nvSpPr>
+          <p:cNvPr id="18" name="TextBox 17"/>
+          <p:cNvSpPr txBox="1"/>
+          <p:nvPr/>
+        </p:nvSpPr>
+        <p:spPr>
+          <a:xfrm>
+            <a:off x="228600" y="4823459"/>
+            <a:ext cx="1828800" cy="274320"/>
+          </a:xfrm>
+          <a:prstGeom prst="rect">
+            <a:avLst/>
+          </a:prstGeom>
+          <a:noFill/>
+        </p:spPr>
+        <p:txBody>
+          <a:bodyPr wrap="none" anchor="ctr" lIns="0" rIns="0" tIns="0" bIns="0">
+            <a:spAutoFit/>
+          </a:bodyPr>
+          <a:lstStyle/>
+          <a:p>
+            <a:fld id="{FF3F19A5-1D65-4443-A7B5-6311B0E58479}" type="slidenum">
+              <a:rPr lang="ja-JP" smtClean="0" sz="1000">
+                <a:solidFill>
+                  <a:srgbClr val="888888"/>
+                </a:solidFill>
+              </a:rPr>
+              <a:t>&lt;#&gt;</a:t>
+            </a:fld>
+            <a:r>
+              <a:rPr lang="ja-JP" smtClean="0" sz="1000">
+                <a:solidFill>
+                  <a:srgbClr val="888888"/>
+                </a:solidFill>
+              </a:rPr>
+              <a:t>/</a:t>
+            </a:r>
+            <a:fld id="{2D3AB654-D124-4751-8A9E-9A09E74937A2}" type="slidecount">
+              <a:rPr lang="ja-JP" smtClean="0" sz="1000">
+                <a:solidFill>
+                  <a:srgbClr val="888888"/>
+                </a:solidFill>
+              </a:rPr>
+              <a:t>11</a:t>
+            </a:fld>
+          </a:p>
+        </p:txBody>
+      </p:sp>
+      <p:pic>
+        <p:nvPicPr>
+          <p:cNvPr id="19" name="Picture 18" descr="logo.png"/>
+          <p:cNvPicPr>
+            <a:picLocks noChangeAspect="1"/>
+          </p:cNvPicPr>
+          <p:nvPr/>
+        </p:nvPicPr>
+        <p:blipFill>
+          <a:blip r:embed="rId2"/>
+          <a:stretch>
+            <a:fillRect/>
+          </a:stretch>
+        </p:blipFill>
+        <p:spPr>
+          <a:xfrm>
+            <a:off x="8001000" y="4846320"/>
+            <a:ext cx="762000" cy="228600"/>
+          </a:xfrm>
+          <a:prstGeom prst="rect">
+            <a:avLst/>
+          </a:prstGeom>
+          <a:effectLst/>
+        </p:spPr>
+      </p:pic>
+    </p:spTree>
+  </p:cSld>
+  <p:clrMapOvr>
+    <a:masterClrMapping/>
+  </p:clrMapOvr>
+</p:sld>
+</file>
+
+<file path=ppt/slides/slide11.xml><?xml version="1.0" encoding="utf-8"?>
+<p:sld xmlns:a="http://schemas.openxmlformats.org/drawingml/2006/main" xmlns:p="http://schemas.openxmlformats.org/presentationml/2006/main" xmlns:r="http://schemas.openxmlformats.org/officeDocument/2006/relationships">
+  <p:cSld>
+    <p:bg>
+      <p:bgPr>
+        <a:solidFill>
+          <a:srgbClr val="FFFFFF"/>
+        </a:solidFill>
+        <a:effectLst/>
+      </p:bgPr>
+    </p:bg>
+    <p:spTree>
+      <p:nvGrpSpPr>
+        <p:cNvPr id="1" name=""/>
+        <p:cNvGrpSpPr/>
+        <p:nvPr/>
+      </p:nvGrpSpPr>
+      <p:grpSpPr/>
+      <p:sp>
+        <p:nvSpPr>
+          <p:cNvPr id="2" name="Rectangle 1"/>
+          <p:cNvSpPr/>
+          <p:nvPr/>
+        </p:nvSpPr>
+        <p:spPr>
+          <a:xfrm>
+            <a:off x="0" y="0"/>
+            <a:ext cx="9144000" cy="777240"/>
+          </a:xfrm>
+          <a:prstGeom prst="rect">
+            <a:avLst/>
+          </a:prstGeom>
+          <a:solidFill>
+            <a:srgbClr val="4A4A4A"/>
+          </a:solidFill>
+          <a:ln>
+            <a:noFill/>
+          </a:ln>
+          <a:effectLst/>
+        </p:spPr>
+        <p:style>
+          <a:lnRef idx="1">
+            <a:schemeClr val="accent1"/>
+          </a:lnRef>
+          <a:fillRef idx="3">
+            <a:schemeClr val="accent1"/>
+          </a:fillRef>
+          <a:effectRef idx="2">
+            <a:schemeClr val="accent1"/>
+          </a:effectRef>
+          <a:fontRef idx="minor">
+            <a:schemeClr val="lt1"/>
+          </a:fontRef>
+        </p:style>
+        <p:txBody>
+          <a:bodyPr rtlCol="0" anchor="ctr"/>
+          <a:lstStyle/>
+          <a:p>
+            <a:pPr algn="ctr"/>
+          </a:p>
+        </p:txBody>
+      </p:sp>
+      <p:sp>
+        <p:nvSpPr>
+          <p:cNvPr id="3" name="TextBox 2"/>
+          <p:cNvSpPr txBox="1"/>
+          <p:nvPr/>
+        </p:nvSpPr>
+        <p:spPr>
+          <a:xfrm>
+            <a:off x="228600" y="85039"/>
+            <a:ext cx="8686800" cy="411480"/>
+          </a:xfrm>
+          <a:prstGeom prst="rect">
+            <a:avLst/>
+          </a:prstGeom>
+          <a:noFill/>
+          <a:effectLst/>
+        </p:spPr>
+        <p:txBody>
+          <a:bodyPr wrap="square" lIns="0" rIns="0" tIns="0" bIns="0" anchor="ctr">
+            <a:noAutofit/>
+          </a:bodyPr>
+          <a:lstStyle/>
+          <a:p>
+            <a:r>
+              <a:rPr lang="en-US" sz="2400" b="1" i="0" dirty="0">
+                <a:solidFill>
+                  <a:srgbClr val="FFFFFF"/>
+                </a:solidFill>
+                <a:latin typeface="Segoe UI"/>
+              </a:rPr>
+              <a:t>3</a:t>
+            </a:r>
+            <a:r>
+              <a:rPr lang="ja-JP" sz="2400" b="1" i="0" dirty="0">
+                <a:solidFill>
+                  <a:srgbClr val="FFFFFF"/>
+                </a:solidFill>
+                <a:ea typeface="Meiryo"/>
+              </a:rPr>
+              <a:t>レイヤーで自分の環境に合わせる</a:t>
+            </a:r>
+          </a:p>
+        </p:txBody>
+      </p:sp>
+      <p:sp>
+        <p:nvSpPr>
+          <p:cNvPr id="4" name="TextBox 3"/>
+          <p:cNvSpPr txBox="1"/>
+          <p:nvPr/>
+        </p:nvSpPr>
+        <p:spPr>
+          <a:xfrm>
+            <a:off x="228600" y="523036"/>
+            <a:ext cx="8686800" cy="274320"/>
+          </a:xfrm>
+          <a:prstGeom prst="rect">
+            <a:avLst/>
+          </a:prstGeom>
+          <a:noFill/>
+          <a:effectLst/>
+        </p:spPr>
+        <p:txBody>
+          <a:bodyPr wrap="square" lIns="0" rIns="0" tIns="0" bIns="0" anchor="ctr">
+            <a:noAutofit/>
+          </a:bodyPr>
+          <a:lstStyle/>
+          <a:p>
+            <a:r>
+              <a:rPr lang="ja-JP" sz="1200" b="0" i="0" dirty="0">
+                <a:solidFill>
+                  <a:srgbClr val="FFFFFF"/>
+                </a:solidFill>
+                <a:ea typeface="Meiryo"/>
+              </a:rPr>
+              <a:t>共通の好み、プロジェクト制約、局所ルールを分ける</a:t>
+            </a:r>
+          </a:p>
+        </p:txBody>
+      </p:sp>
+      <p:sp>
+        <p:nvSpPr>
+          <p:cNvPr id="5" name="Rectangle 4"/>
+          <p:cNvSpPr/>
+          <p:nvPr/>
+        </p:nvSpPr>
+        <p:spPr>
+          <a:xfrm>
+            <a:off x="164592" y="941832"/>
+            <a:ext cx="2889504" cy="2371725"/>
+          </a:xfrm>
+          <a:prstGeom prst="rect">
+            <a:avLst/>
+          </a:prstGeom>
+          <a:solidFill>
+            <a:srgbClr val="F5F5F5"/>
+          </a:solidFill>
+          <a:ln w="9525">
+            <a:solidFill>
+              <a:srgbClr val="E0E0E0"/>
+            </a:solidFill>
+          </a:ln>
+          <a:effectLst/>
+        </p:spPr>
+        <p:style>
+          <a:lnRef idx="1">
+            <a:schemeClr val="accent1"/>
+          </a:lnRef>
+          <a:fillRef idx="3">
+            <a:schemeClr val="accent1"/>
+          </a:fillRef>
+          <a:effectRef idx="2">
+            <a:schemeClr val="accent1"/>
+          </a:effectRef>
+          <a:fontRef idx="minor">
+            <a:schemeClr val="lt1"/>
+          </a:fontRef>
+        </p:style>
+        <p:txBody>
+          <a:bodyPr rtlCol="0" anchor="ctr"/>
+          <a:lstStyle/>
+          <a:p>
+            <a:pPr algn="ctr"/>
+          </a:p>
+        </p:txBody>
+      </p:sp>
+      <p:sp>
+        <p:nvSpPr>
+          <p:cNvPr id="6" name="TextBox 5"/>
+          <p:cNvSpPr txBox="1"/>
+          <p:nvPr/>
+        </p:nvSpPr>
+        <p:spPr>
+          <a:xfrm>
+            <a:off x="301751" y="1051560"/>
+            <a:ext cx="2615184" cy="320040"/>
+          </a:xfrm>
+          <a:prstGeom prst="rect">
+            <a:avLst/>
+          </a:prstGeom>
+          <a:noFill/>
+          <a:effectLst/>
+        </p:spPr>
+        <p:txBody>
+          <a:bodyPr wrap="square" lIns="0" rIns="0" tIns="0" bIns="0" anchor="t">
+            <a:noAutofit/>
+          </a:bodyPr>
+          <a:lstStyle/>
+          <a:p>
+            <a:r>
+              <a:rPr lang="ja-JP" sz="1400" b="1" i="0" dirty="0">
+                <a:solidFill>
+                  <a:srgbClr val="333333"/>
+                </a:solidFill>
+                <a:ea typeface="Meiryo"/>
+              </a:rPr>
+              <a:t>グローバル</a:t>
+            </a:r>
+          </a:p>
+        </p:txBody>
+      </p:sp>
+      <p:sp>
+        <p:nvSpPr>
+          <p:cNvPr id="7" name="Rectangle 6"/>
+          <p:cNvSpPr/>
+          <p:nvPr/>
+        </p:nvSpPr>
+        <p:spPr>
+          <a:xfrm>
+            <a:off x="301751" y="1307592"/>
+            <a:ext cx="2615184" cy="12700"/>
+          </a:xfrm>
+          <a:prstGeom prst="rect">
+            <a:avLst/>
+          </a:prstGeom>
+          <a:solidFill>
+            <a:srgbClr val="E0E0E0"/>
+          </a:solidFill>
+          <a:ln>
+            <a:noFill/>
+          </a:ln>
+          <a:effectLst/>
+        </p:spPr>
+        <p:style>
+          <a:lnRef idx="1">
+            <a:schemeClr val="accent1"/>
+          </a:lnRef>
+          <a:fillRef idx="3">
+            <a:schemeClr val="accent1"/>
+          </a:fillRef>
+          <a:effectRef idx="2">
+            <a:schemeClr val="accent1"/>
+          </a:effectRef>
+          <a:fontRef idx="minor">
+            <a:schemeClr val="lt1"/>
+          </a:fontRef>
+        </p:style>
+        <p:txBody>
+          <a:bodyPr rtlCol="0" anchor="ctr"/>
+          <a:lstStyle/>
+          <a:p>
+            <a:pPr algn="ctr"/>
+          </a:p>
+        </p:txBody>
+      </p:sp>
+      <p:sp>
+        <p:nvSpPr>
+          <p:cNvPr id="8" name="TextBox 7"/>
+          <p:cNvSpPr txBox="1"/>
+          <p:nvPr/>
+        </p:nvSpPr>
+        <p:spPr>
+          <a:xfrm>
+            <a:off x="301751" y="1380744"/>
+            <a:ext cx="2615184" cy="1823085"/>
+          </a:xfrm>
+          <a:prstGeom prst="rect">
+            <a:avLst/>
+          </a:prstGeom>
+          <a:noFill/>
+          <a:effectLst/>
+        </p:spPr>
+        <p:txBody>
+          <a:bodyPr wrap="square" lIns="0" rIns="0" tIns="0" bIns="0">
+            <a:noAutofit/>
+          </a:bodyPr>
+          <a:lstStyle/>
+          <a:p>
+            <a:pPr>
+              <a:spcBef>
+                <a:spcPts val="0"/>
+              </a:spcBef>
+              <a:spcAft>
+                <a:spcPts val="400"/>
+              </a:spcAft>
+              <a:buNone/>
+              <a:lnSpc>
+                <a:spcPts val="1980"/>
+              </a:lnSpc>
+            </a:pPr>
+            <a:r>
+              <a:rPr lang="ja-JP" sz="1100" b="0" i="0" dirty="0">
+                <a:solidFill>
+                  <a:srgbClr val="333333"/>
+                </a:solidFill>
+                <a:ea typeface="Meiryo"/>
+              </a:rPr>
+              <a:t>全プロジェクトで変わらない性格や好みを置く。</a:t>
             </a:r>
           </a:p>
           <a:p>
@@ -4768,7 +5643,7 @@
                 </a:solidFill>
                 <a:ea typeface="Meiryo"/>
               </a:rPr>
-              <a:t>日本語回答や検証重視を固定する</a:t>
+              <a:t>日本語回答、テスト重視、説明の粒度などを固定する。</a:t>
             </a:r>
           </a:p>
           <a:p>
@@ -4791,7 +5666,7 @@
                 </a:solidFill>
                 <a:ea typeface="Meiryo"/>
               </a:rPr>
-              <a:t>個人の作業スタイルを反映する</a:t>
+              <a:t>個別技術に依存するルールは置きすぎない。</a:t>
             </a:r>
           </a:p>
         </p:txBody>
@@ -4872,7 +5747,7 @@
                 </a:solidFill>
                 <a:ea typeface="Meiryo"/>
               </a:rPr>
-              <a:t>プロジェクト</a:t>
+              <a:t>プロジェクト単位</a:t>
             </a:r>
           </a:p>
         </p:txBody>
@@ -4963,7 +5838,7 @@
                 </a:solidFill>
                 <a:ea typeface="Meiryo"/>
               </a:rPr>
-              <a:t>対象技術と危険操作を管理する。</a:t>
+              <a:t>対象リポジトリの構造と危険操作を制御する。</a:t>
             </a:r>
           </a:p>
           <a:p>
@@ -4986,7 +5861,7 @@
                 </a:solidFill>
                 <a:ea typeface="Meiryo"/>
               </a:rPr>
-              <a:t>技術スタックとコマンドを明示する</a:t>
+              <a:t>技術スタック、ディレクトリ構成、コマンドを書く。</a:t>
             </a:r>
           </a:p>
           <a:p>
@@ -5009,7 +5884,7 @@
                 </a:solidFill>
                 <a:ea typeface="Meiryo"/>
               </a:rPr>
-              <a:t>本番環境や秘密情報を守る</a:t>
+              <a:t>本番環境や個人情報などの事故要因を縛る。</a:t>
             </a:r>
           </a:p>
         </p:txBody>
@@ -5090,7 +5965,7 @@
                 </a:solidFill>
                 <a:ea typeface="Meiryo"/>
               </a:rPr>
-              <a:t>ディレクトリ</a:t>
+              <a:t>ディレクトリ単位</a:t>
             </a:r>
           </a:p>
         </p:txBody>
@@ -5181,7 +6056,7 @@
                 </a:solidFill>
                 <a:ea typeface="Meiryo"/>
               </a:rPr>
-              <a:t>領域ごとの細則を近くに置く。</a:t>
+              <a:t>専門領域ごとの判断を近い場所に置く。</a:t>
             </a:r>
           </a:p>
           <a:p>
@@ -5198,13 +6073,22 @@
               </a:lnSpc>
             </a:pPr>
             <a:r>
+              <a:rPr lang="ja-JP" sz="1100" b="0" i="0" dirty="0">
+                <a:solidFill>
+                  <a:srgbClr val="333333"/>
+                </a:solidFill>
+                <a:ea typeface="Meiryo"/>
+              </a:rPr>
+              <a:t>フロントエンド</a:t>
+            </a:r>
+            <a:r>
               <a:rPr lang="en-US" sz="1100" b="0" i="0" dirty="0">
                 <a:solidFill>
                   <a:srgbClr val="333333"/>
                 </a:solidFill>
                 <a:latin typeface="Segoe UI"/>
               </a:rPr>
-              <a:t>frontend</a:t>
+              <a:t>UI</a:t>
             </a:r>
             <a:r>
               <a:rPr lang="ja-JP" sz="1100" b="0" i="0" dirty="0">
@@ -5222,7 +6106,7 @@
                 </a:solidFill>
                 <a:latin typeface="Segoe UI"/>
               </a:rPr>
-              <a:t>infra</a:t>
+              <a:t>PowerShell/Python</a:t>
             </a:r>
             <a:r>
               <a:rPr lang="ja-JP" sz="1100" b="0" i="0" dirty="0">
@@ -5231,7 +6115,7 @@
                 </a:solidFill>
                 <a:ea typeface="Meiryo"/>
               </a:rPr>
-              <a:t>の規約を分ける</a:t>
+              <a:t>操作を分離する。</a:t>
             </a:r>
           </a:p>
           <a:p>
@@ -5254,7 +6138,7 @@
                 </a:solidFill>
                 <a:ea typeface="Meiryo"/>
               </a:rPr>
-              <a:t>関係ない制約の混入を防ぐ</a:t>
+              <a:t>関係する作業だけに濃いルールを効かせる。</a:t>
             </a:r>
           </a:p>
         </p:txBody>
@@ -5431,13 +6315,22 @@
               </a:lnSpc>
             </a:pPr>
             <a:r>
+              <a:rPr lang="en-US" sz="1200" b="0" i="0" dirty="0">
+                <a:solidFill>
+                  <a:srgbClr val="1A2A5A"/>
+                </a:solidFill>
+                <a:latin typeface="Segoe UI"/>
+              </a:rPr>
+              <a:t>CLAUDE.md</a:t>
+            </a:r>
+            <a:r>
               <a:rPr lang="ja-JP" sz="1200" b="0" i="0" dirty="0">
                 <a:solidFill>
                   <a:srgbClr val="1A2A5A"/>
                 </a:solidFill>
                 <a:ea typeface="Meiryo"/>
               </a:rPr>
-              <a:t>長期文脈は、</a:t>
+              <a:t>は「全部を書く場所」ではなく、</a:t>
             </a:r>
             <a:r>
               <a:rPr lang="en-US" sz="1200" b="0" i="0" dirty="0">
@@ -5446,7 +6339,7 @@
                 </a:solidFill>
                 <a:latin typeface="Segoe UI"/>
               </a:rPr>
-              <a:t>1</a:t>
+              <a:t>AI</a:t>
             </a:r>
             <a:r>
               <a:rPr lang="ja-JP" sz="1200" b="0" i="0" dirty="0">
@@ -5455,7 +6348,7 @@
                 </a:solidFill>
                 <a:ea typeface="Meiryo"/>
               </a:rPr>
-              <a:t>枚の巨大なルールではなく、必要な場所へ必要な密度で置く設計によって安定する。</a:t>
+              <a:t>が毎回迷わず動くための設計された文脈である。</a:t>
             </a:r>
           </a:p>
         </p:txBody>
@@ -5526,7 +6419,7 @@
           </a:bodyPr>
           <a:lstStyle/>
           <a:p>
-            <a:fld id="{2AC3A56A-D914-4FB1-84DF-D87123AF999C}" type="slidenum">
+            <a:fld id="{EF0B0873-D2A4-44C0-8F5A-F2CE3CAF188A}" type="slidenum">
               <a:rPr lang="ja-JP" smtClean="0" sz="1000">
                 <a:solidFill>
                   <a:srgbClr val="888888"/>
@@ -5542,13 +6435,13 @@
               </a:rPr>
               <a:t>/</a:t>
             </a:r>
-            <a:fld id="{A866A214-76B1-43C7-9109-C320B4CA88A4}" type="slidecount">
+            <a:fld id="{B35F135E-1ABE-4DF1-93B6-AB2533C4E07B}" type="slidecount">
               <a:rPr lang="ja-JP" smtClean="0" sz="1000">
                 <a:solidFill>
                   <a:srgbClr val="888888"/>
                 </a:solidFill>
               </a:rPr>
-              <a:t>10</a:t>
+              <a:t>11</a:t>
             </a:fld>
           </a:p>
         </p:txBody>
@@ -5713,7 +6606,7 @@
                 </a:solidFill>
                 <a:ea typeface="Meiryo"/>
               </a:rPr>
-              <a:t>役割理解から運用設計までを段階的に把握する</a:t>
+              <a:t>設計から運用までの流れを押さえる</a:t>
             </a:r>
           </a:p>
         </p:txBody>
@@ -5760,7 +6653,30 @@
                 </a:solidFill>
                 <a:ea typeface="Meiryo"/>
               </a:rPr>
-              <a:t>基礎理解</a:t>
+              <a:t>基本設計</a:t>
+            </a:r>
+          </a:p>
+          <a:p>
+            <a:pPr>
+              <a:spcBef>
+                <a:spcPts val="0"/>
+              </a:spcBef>
+              <a:spcAft>
+                <a:spcPts val="400"/>
+              </a:spcAft>
+              <a:buNone/>
+              <a:lnSpc>
+                <a:spcPts val="2160"/>
+              </a:lnSpc>
+            </a:pPr>
+            <a:r>
+              <a:rPr lang="ja-JP" sz="1200" b="1" i="0" dirty="0">
+                <a:solidFill>
+                  <a:srgbClr val="333333"/>
+                </a:solidFill>
+                <a:ea typeface="Meiryo"/>
+              </a:rPr>
+              <a:t>位置づけと目的</a:t>
             </a:r>
           </a:p>
           <a:p>
@@ -5792,7 +6708,7 @@
                 </a:solidFill>
                 <a:ea typeface="Meiryo"/>
               </a:rPr>
-              <a:t>はセッションのルールブックである</a:t>
+              <a:t>は開始時に効くルールブック</a:t>
             </a:r>
           </a:p>
           <a:p>
@@ -5824,20 +6740,20 @@
                 </a:solidFill>
                 <a:ea typeface="Meiryo"/>
               </a:rPr>
-              <a:t>とは強制力と用途が異なる</a:t>
+              <a:t>とは作成者と用途が異なる</a:t>
             </a:r>
           </a:p>
           <a:p>
             <a:pPr>
               <a:spcBef>
-                <a:spcPts val="800"/>
+                <a:spcPts val="0"/>
               </a:spcBef>
               <a:spcAft>
-                <a:spcPts val="300"/>
+                <a:spcPts val="400"/>
               </a:spcAft>
               <a:buNone/>
               <a:lnSpc>
-                <a:spcPts val="1679"/>
+                <a:spcPts val="2160"/>
               </a:lnSpc>
             </a:pPr>
             <a:r>
@@ -5847,7 +6763,7 @@
                 </a:solidFill>
                 <a:ea typeface="Meiryo"/>
               </a:rPr>
-              <a:t>設計原則</a:t>
+              <a:t>密度の設計</a:t>
             </a:r>
           </a:p>
           <a:p>
@@ -5870,7 +6786,43 @@
                 </a:solidFill>
                 <a:ea typeface="Meiryo"/>
               </a:rPr>
-              <a:t>重要ルールを厳選し、守れる密度にする</a:t>
+              <a:t>重要ルールを絞り、</a:t>
+            </a:r>
+            <a:r>
+              <a:rPr lang="en-US" sz="1200" b="0" i="0" dirty="0">
+                <a:solidFill>
+                  <a:srgbClr val="333333"/>
+                </a:solidFill>
+                <a:latin typeface="Segoe UI"/>
+              </a:rPr>
+              <a:t>60</a:t>
+            </a:r>
+            <a:r>
+              <a:rPr lang="ja-JP" sz="1200" b="0" i="0" dirty="0">
+                <a:solidFill>
+                  <a:srgbClr val="333333"/>
+                </a:solidFill>
+                <a:ea typeface="Meiryo"/>
+              </a:rPr>
+              <a:t>から</a:t>
+            </a:r>
+            <a:r>
+              <a:rPr lang="en-US" sz="1200" b="0" i="0" dirty="0">
+                <a:solidFill>
+                  <a:srgbClr val="333333"/>
+                </a:solidFill>
+                <a:latin typeface="Segoe UI"/>
+              </a:rPr>
+              <a:t>300</a:t>
+            </a:r>
+            <a:r>
+              <a:rPr lang="ja-JP" sz="1200" b="0" i="0" dirty="0">
+                <a:solidFill>
+                  <a:srgbClr val="333333"/>
+                </a:solidFill>
+                <a:ea typeface="Meiryo"/>
+              </a:rPr>
+              <a:t>行に抑える</a:t>
             </a:r>
           </a:p>
           <a:p>
@@ -5893,25 +6845,7 @@
                 </a:solidFill>
                 <a:ea typeface="Meiryo"/>
               </a:rPr>
-              <a:t>章立ては</a:t>
-            </a:r>
-            <a:r>
-              <a:rPr lang="en-US" sz="1200" b="0" i="0" dirty="0">
-                <a:solidFill>
-                  <a:srgbClr val="333333"/>
-                </a:solidFill>
-                <a:latin typeface="Segoe UI"/>
-              </a:rPr>
-              <a:t>AI</a:t>
-            </a:r>
-            <a:r>
-              <a:rPr lang="ja-JP" sz="1200" b="0" i="0" dirty="0">
-                <a:solidFill>
-                  <a:srgbClr val="333333"/>
-                </a:solidFill>
-                <a:ea typeface="Meiryo"/>
-              </a:rPr>
-              <a:t>の探索と判断を助ける地図になる</a:t>
+              <a:t>実行可能な文で、曖昧な標語を避ける</a:t>
             </a:r>
           </a:p>
         </p:txBody>
@@ -5958,7 +6892,30 @@
                 </a:solidFill>
                 <a:ea typeface="Meiryo"/>
               </a:rPr>
-              <a:t>適用範囲</a:t>
+              <a:t>実装と運用</a:t>
+            </a:r>
+          </a:p>
+          <a:p>
+            <a:pPr>
+              <a:spcBef>
+                <a:spcPts val="0"/>
+              </a:spcBef>
+              <a:spcAft>
+                <a:spcPts val="400"/>
+              </a:spcAft>
+              <a:buNone/>
+              <a:lnSpc>
+                <a:spcPts val="2160"/>
+              </a:lnSpc>
+            </a:pPr>
+            <a:r>
+              <a:rPr lang="ja-JP" sz="1200" b="1" i="0" dirty="0">
+                <a:solidFill>
+                  <a:srgbClr val="333333"/>
+                </a:solidFill>
+                <a:ea typeface="Meiryo"/>
+              </a:rPr>
+              <a:t>章立て</a:t>
             </a:r>
           </a:p>
           <a:p>
@@ -5975,22 +6932,13 @@
               </a:lnSpc>
             </a:pPr>
             <a:r>
-              <a:rPr lang="en-US" sz="1200" b="0" i="0" dirty="0">
-                <a:solidFill>
-                  <a:srgbClr val="333333"/>
-                </a:solidFill>
-                <a:latin typeface="Segoe UI"/>
-              </a:rPr>
-              <a:t>rules</a:t>
-            </a:r>
-            <a:r>
               <a:rPr lang="ja-JP" sz="1200" b="0" i="0" dirty="0">
                 <a:solidFill>
                   <a:srgbClr val="333333"/>
                 </a:solidFill>
                 <a:ea typeface="Meiryo"/>
               </a:rPr>
-              <a:t>でスコープを分け、文脈ノイズを減らす</a:t>
+              <a:t>プロジェクト概要から落とし穴まで整理する</a:t>
             </a:r>
           </a:p>
           <a:p>
@@ -6013,20 +6961,20 @@
                 </a:solidFill>
                 <a:ea typeface="Meiryo"/>
               </a:rPr>
-              <a:t>用途別テンプレートで現場差分を吸収する</a:t>
+              <a:t>コマンドと禁止事項はそのまま使える形にする</a:t>
             </a:r>
           </a:p>
           <a:p>
             <a:pPr>
               <a:spcBef>
-                <a:spcPts val="800"/>
+                <a:spcPts val="0"/>
               </a:spcBef>
               <a:spcAft>
-                <a:spcPts val="300"/>
+                <a:spcPts val="400"/>
               </a:spcAft>
               <a:buNone/>
               <a:lnSpc>
-                <a:spcPts val="1679"/>
+                <a:spcPts val="2160"/>
               </a:lnSpc>
             </a:pPr>
             <a:r>
@@ -6036,7 +6984,7 @@
                 </a:solidFill>
                 <a:ea typeface="Meiryo"/>
               </a:rPr>
-              <a:t>運用</a:t>
+              <a:t>スコープと改善</a:t>
             </a:r>
           </a:p>
           <a:p>
@@ -6053,22 +7001,13 @@
               </a:lnSpc>
             </a:pPr>
             <a:r>
-              <a:rPr lang="en-US" sz="1200" b="0" i="0" dirty="0">
-                <a:solidFill>
-                  <a:srgbClr val="333333"/>
-                </a:solidFill>
-                <a:latin typeface="Segoe UI"/>
-              </a:rPr>
-              <a:t>CLAUDE.md</a:t>
-            </a:r>
-            <a:r>
               <a:rPr lang="ja-JP" sz="1200" b="0" i="0" dirty="0">
                 <a:solidFill>
                   <a:srgbClr val="333333"/>
                 </a:solidFill>
                 <a:ea typeface="Meiryo"/>
               </a:rPr>
-              <a:t>は会話から育てる対象である</a:t>
+              <a:t>ルート、領域別、ディレクトリ別に分ける</a:t>
             </a:r>
           </a:p>
           <a:p>
@@ -6085,40 +7024,13 @@
               </a:lnSpc>
             </a:pPr>
             <a:r>
-              <a:rPr lang="en-US" sz="1200" b="0" i="0" dirty="0">
-                <a:solidFill>
-                  <a:srgbClr val="333333"/>
-                </a:solidFill>
-                <a:latin typeface="Segoe UI"/>
-              </a:rPr>
-              <a:t>Takuya</a:t>
-            </a:r>
-            <a:r>
               <a:rPr lang="ja-JP" sz="1200" b="0" i="0" dirty="0">
                 <a:solidFill>
                   <a:srgbClr val="333333"/>
                 </a:solidFill>
                 <a:ea typeface="Meiryo"/>
               </a:rPr>
-              <a:t>さんの環境は</a:t>
-            </a:r>
-            <a:r>
-              <a:rPr lang="en-US" sz="1200" b="0" i="0" dirty="0">
-                <a:solidFill>
-                  <a:srgbClr val="333333"/>
-                </a:solidFill>
-                <a:latin typeface="Segoe UI"/>
-              </a:rPr>
-              <a:t>3</a:t>
-            </a:r>
-            <a:r>
-              <a:rPr lang="ja-JP" sz="1200" b="0" i="0" dirty="0">
-                <a:solidFill>
-                  <a:srgbClr val="333333"/>
-                </a:solidFill>
-                <a:ea typeface="Meiryo"/>
-              </a:rPr>
-              <a:t>レイヤー設計が有効である</a:t>
+              <a:t>繰り返した注意はルールへ昇格させる</a:t>
             </a:r>
           </a:p>
         </p:txBody>
@@ -6189,7 +7101,7 @@
           </a:bodyPr>
           <a:lstStyle/>
           <a:p>
-            <a:fld id="{F842B008-B136-4DC8-A7E2-111CCC20933B}" type="slidenum">
+            <a:fld id="{BE514E3F-29B6-4B14-8F58-C35023F7E866}" type="slidenum">
               <a:rPr lang="ja-JP" smtClean="0" sz="1000">
                 <a:solidFill>
                   <a:srgbClr val="888888"/>
@@ -6205,13 +7117,13 @@
               </a:rPr>
               <a:t>/</a:t>
             </a:r>
-            <a:fld id="{E8709B93-E730-42E2-BAAE-34A06EFE8A82}" type="slidecount">
+            <a:fld id="{C5FE519A-3EF9-4260-B2E6-C60316C07AC1}" type="slidecount">
               <a:rPr lang="ja-JP" smtClean="0" sz="1000">
                 <a:solidFill>
                   <a:srgbClr val="888888"/>
                 </a:solidFill>
               </a:rPr>
-              <a:t>10</a:t>
+              <a:t>11</a:t>
             </a:fld>
           </a:p>
         </p:txBody>
@@ -6350,7 +7262,7 @@
                 </a:solidFill>
                 <a:ea typeface="Meiryo"/>
               </a:rPr>
-              <a:t>はセッションのルールブックである</a:t>
+              <a:t>は開始時に効くルールブックである</a:t>
             </a:r>
           </a:p>
         </p:txBody>
@@ -6379,13 +7291,22 @@
           <a:lstStyle/>
           <a:p>
             <a:r>
+              <a:rPr lang="en-US" sz="1200" b="0" i="0" dirty="0">
+                <a:solidFill>
+                  <a:srgbClr val="FFFFFF"/>
+                </a:solidFill>
+                <a:latin typeface="Segoe UI"/>
+              </a:rPr>
+              <a:t>AI</a:t>
+            </a:r>
+            <a:r>
               <a:rPr lang="ja-JP" sz="1200" b="0" i="0" dirty="0">
                 <a:solidFill>
                   <a:srgbClr val="FFFFFF"/>
                 </a:solidFill>
                 <a:ea typeface="Meiryo"/>
               </a:rPr>
-              <a:t>毎回の説明をプロジェクト標準の振る舞いへ変換する</a:t>
+              <a:t>の挙動をプロジェクト基準へ寄せる</a:t>
             </a:r>
           </a:p>
         </p:txBody>
@@ -6432,7 +7353,7 @@
                 </a:solidFill>
                 <a:ea typeface="Meiryo"/>
               </a:rPr>
-              <a:t>開始時の基準線</a:t>
+              <a:t>ルールを毎回の出発点にする</a:t>
             </a:r>
           </a:p>
           <a:p>
@@ -6464,7 +7385,7 @@
                 </a:solidFill>
                 <a:ea typeface="Meiryo"/>
               </a:rPr>
-              <a:t>は、</a:t>
+              <a:t>は、会話ごとの説明コストを減らし、</a:t>
             </a:r>
             <a:r>
               <a:rPr lang="en-US" sz="1200" b="0" i="0" dirty="0">
@@ -6482,7 +7403,25 @@
                 </a:solidFill>
                 <a:ea typeface="Meiryo"/>
               </a:rPr>
-              <a:t>が「この現場ではどう振る舞うか」を判断するための基準である。</a:t>
+              <a:t>の判断を安定させるための</a:t>
+            </a:r>
+            <a:r>
+              <a:rPr lang="ja-JP" sz="1200" b="1" i="0" dirty="0">
+                <a:solidFill>
+                  <a:srgbClr val="333333"/>
+                </a:solidFill>
+                <a:ea typeface="Meiryo"/>
+              </a:rPr>
+              <a:t>基準点</a:t>
+            </a:r>
+            <a:r>
+              <a:rPr lang="ja-JP" sz="1200" b="0" i="0" dirty="0">
+                <a:solidFill>
+                  <a:srgbClr val="333333"/>
+                </a:solidFill>
+                <a:ea typeface="Meiryo"/>
+              </a:rPr>
+              <a:t>である。</a:t>
             </a:r>
           </a:p>
           <a:p>
@@ -6493,55 +7432,19 @@
               <a:spcAft>
                 <a:spcPts val="400"/>
               </a:spcAft>
-              <a:buNone/>
+              <a:buChar char="•"/>
               <a:lnSpc>
                 <a:spcPts val="2160"/>
               </a:lnSpc>
             </a:pPr>
             <a:r>
-              <a:rPr lang="en-US" sz="1200" b="0" i="0" dirty="0">
-                <a:solidFill>
-                  <a:srgbClr val="333333"/>
-                </a:solidFill>
-                <a:latin typeface="Segoe UI"/>
-              </a:rPr>
-              <a:t>1. </a:t>
-            </a:r>
-            <a:r>
-              <a:rPr lang="ja-JP" sz="1200" b="1" i="0" dirty="0">
-                <a:solidFill>
-                  <a:srgbClr val="333333"/>
-                </a:solidFill>
-                <a:ea typeface="Meiryo"/>
-              </a:rPr>
-              <a:t>前提固定</a:t>
-            </a:r>
-            <a:r>
-              <a:rPr lang="en-US" sz="1200" b="1" i="0" dirty="0">
-                <a:solidFill>
-                  <a:srgbClr val="333333"/>
-                </a:solidFill>
-                <a:latin typeface="Segoe UI"/>
-              </a:rPr>
-              <a:t>:</a:t>
-            </a:r>
-            <a:r>
-              <a:rPr lang="en-US" sz="1200" b="0" i="0" dirty="0">
-                <a:solidFill>
-                  <a:srgbClr val="333333"/>
-                </a:solidFill>
-                <a:latin typeface="Segoe UI"/>
-              </a:rPr>
-              <a:t> </a:t>
-            </a:r>
-            <a:r>
               <a:rPr lang="ja-JP" sz="1200" b="0" i="0" dirty="0">
                 <a:solidFill>
                   <a:srgbClr val="333333"/>
                 </a:solidFill>
                 <a:ea typeface="Meiryo"/>
               </a:rPr>
-              <a:t>プロジェクトの目的や制約を毎回読み込ませる</a:t>
+              <a:t>セッション開始時に読み込まれる前提として設計する。</a:t>
             </a:r>
           </a:p>
           <a:p>
@@ -6552,55 +7455,19 @@
               <a:spcAft>
                 <a:spcPts val="400"/>
               </a:spcAft>
-              <a:buNone/>
+              <a:buChar char="•"/>
               <a:lnSpc>
                 <a:spcPts val="2160"/>
               </a:lnSpc>
             </a:pPr>
             <a:r>
-              <a:rPr lang="en-US" sz="1200" b="0" i="0" dirty="0">
-                <a:solidFill>
-                  <a:srgbClr val="333333"/>
-                </a:solidFill>
-                <a:latin typeface="Segoe UI"/>
-              </a:rPr>
-              <a:t>2. </a:t>
-            </a:r>
-            <a:r>
-              <a:rPr lang="ja-JP" sz="1200" b="1" i="0" dirty="0">
-                <a:solidFill>
-                  <a:srgbClr val="333333"/>
-                </a:solidFill>
-                <a:ea typeface="Meiryo"/>
-              </a:rPr>
-              <a:t>手順共有</a:t>
-            </a:r>
-            <a:r>
-              <a:rPr lang="en-US" sz="1200" b="1" i="0" dirty="0">
-                <a:solidFill>
-                  <a:srgbClr val="333333"/>
-                </a:solidFill>
-                <a:latin typeface="Segoe UI"/>
-              </a:rPr>
-              <a:t>:</a:t>
-            </a:r>
-            <a:r>
-              <a:rPr lang="en-US" sz="1200" b="0" i="0" dirty="0">
-                <a:solidFill>
-                  <a:srgbClr val="333333"/>
-                </a:solidFill>
-                <a:latin typeface="Segoe UI"/>
-              </a:rPr>
-              <a:t> </a:t>
-            </a:r>
-            <a:r>
               <a:rPr lang="ja-JP" sz="1200" b="0" i="0" dirty="0">
                 <a:solidFill>
                   <a:srgbClr val="333333"/>
                 </a:solidFill>
                 <a:ea typeface="Meiryo"/>
               </a:rPr>
-              <a:t>調査、変更、検証、報告の流れを揃える</a:t>
+              <a:t>単発の依頼ではなく、継続して守るルールを書く。</a:t>
             </a:r>
           </a:p>
           <a:p>
@@ -6611,101 +7478,51 @@
               <a:spcAft>
                 <a:spcPts val="400"/>
               </a:spcAft>
-              <a:buNone/>
+              <a:buChar char="•"/>
               <a:lnSpc>
                 <a:spcPts val="2160"/>
               </a:lnSpc>
             </a:pPr>
             <a:r>
-              <a:rPr lang="en-US" sz="1200" b="0" i="0" dirty="0">
-                <a:solidFill>
-                  <a:srgbClr val="333333"/>
-                </a:solidFill>
-                <a:latin typeface="Segoe UI"/>
-              </a:rPr>
-              <a:t>3. </a:t>
-            </a:r>
-            <a:r>
-              <a:rPr lang="ja-JP" sz="1200" b="1" i="0" dirty="0">
-                <a:solidFill>
-                  <a:srgbClr val="333333"/>
-                </a:solidFill>
-                <a:ea typeface="Meiryo"/>
-              </a:rPr>
-              <a:t>判断補正</a:t>
-            </a:r>
-            <a:r>
-              <a:rPr lang="en-US" sz="1200" b="1" i="0" dirty="0">
-                <a:solidFill>
-                  <a:srgbClr val="333333"/>
-                </a:solidFill>
-                <a:latin typeface="Segoe UI"/>
-              </a:rPr>
-              <a:t>:</a:t>
-            </a:r>
-            <a:r>
-              <a:rPr lang="en-US" sz="1200" b="0" i="0" dirty="0">
-                <a:solidFill>
-                  <a:srgbClr val="333333"/>
-                </a:solidFill>
-                <a:latin typeface="Segoe UI"/>
-              </a:rPr>
-              <a:t> </a:t>
-            </a:r>
-            <a:r>
               <a:rPr lang="ja-JP" sz="1200" b="0" i="0" dirty="0">
                 <a:solidFill>
                   <a:srgbClr val="333333"/>
                 </a:solidFill>
                 <a:ea typeface="Meiryo"/>
               </a:rPr>
-              <a:t>曖昧な依頼でも、現場の流儀に寄せて動ける</a:t>
-            </a:r>
-          </a:p>
-          <a:p>
-            <a:pPr>
-              <a:spcBef>
-                <a:spcPts val="800"/>
-              </a:spcBef>
-              <a:spcAft>
-                <a:spcPts val="300"/>
-              </a:spcAft>
-              <a:buNone/>
-              <a:lnSpc>
-                <a:spcPts val="1679"/>
-              </a:lnSpc>
-            </a:pPr>
-            <a:r>
-              <a:rPr lang="ja-JP" sz="1200" b="1" i="0" dirty="0">
-                <a:solidFill>
-                  <a:srgbClr val="333333"/>
-                </a:solidFill>
-                <a:ea typeface="Meiryo"/>
-              </a:rPr>
-              <a:t>設計上の意味</a:t>
-            </a:r>
-          </a:p>
-          <a:p>
-            <a:pPr>
+              <a:t>プロジェクトの目的、禁止事項、確認手順を明文化する。</a:t>
+            </a:r>
+          </a:p>
+          <a:p>
+            <a:pPr marL="228600" indent="-228600">
               <a:spcBef>
                 <a:spcPts val="0"/>
               </a:spcBef>
               <a:spcAft>
                 <a:spcPts val="400"/>
               </a:spcAft>
-              <a:buNone/>
+              <a:buChar char="•"/>
               <a:lnSpc>
                 <a:spcPts val="2160"/>
               </a:lnSpc>
             </a:pPr>
             <a:r>
+              <a:rPr lang="en-US" sz="1200" b="0" i="0" dirty="0">
+                <a:solidFill>
+                  <a:srgbClr val="333333"/>
+                </a:solidFill>
+                <a:latin typeface="Segoe UI"/>
+              </a:rPr>
+              <a:t>AI</a:t>
+            </a:r>
+            <a:r>
               <a:rPr lang="ja-JP" sz="1200" b="0" i="0" dirty="0">
                 <a:solidFill>
                   <a:srgbClr val="333333"/>
                 </a:solidFill>
                 <a:ea typeface="Meiryo"/>
               </a:rPr>
-              <a:t>単発指示を積み重ねるより、繰り返し使う前提を文書化する方が安定する。</a:t>
+              <a:t>に期待する振る舞いを、行動レベルの文へ落とす。</a:t>
             </a:r>
           </a:p>
         </p:txBody>
@@ -6768,7 +7585,7 @@
                 </a:solidFill>
                 <a:ea typeface="Meiryo"/>
               </a:rPr>
-              <a:t>の行動基準をプロジェクト標準へ揃える様子を表すシンプルなイラスト。フラットデザイン、ミニマルアイコン風、ビジネス向け、白背景。</a:t>
+              <a:t>の作業開始時に読み込まれるルールブックであることを表すシンプルなイラスト。フラットデザイン、ミニマルアイコン風、ビジネス向け、白背景。</a:t>
             </a:r>
             <a:r>
               <a:rPr lang="en-US" sz="1200" b="0" i="0" dirty="0">
@@ -6786,25 +7603,7 @@
                 </a:solidFill>
                 <a:ea typeface="Meiryo"/>
               </a:rPr>
-              <a:t>の比率で、開いたルール文書、チェックリスト、</a:t>
-            </a:r>
-            <a:r>
-              <a:rPr lang="en-US" sz="1200" b="0" i="0" dirty="0">
-                <a:solidFill>
-                  <a:srgbClr val="888888"/>
-                </a:solidFill>
-                <a:latin typeface="Segoe UI"/>
-              </a:rPr>
-              <a:t>AI</a:t>
-            </a:r>
-            <a:r>
-              <a:rPr lang="ja-JP" sz="1200" b="0" i="0" dirty="0">
-                <a:solidFill>
-                  <a:srgbClr val="888888"/>
-                </a:solidFill>
-                <a:ea typeface="Meiryo"/>
-              </a:rPr>
-              <a:t>アシスタント、プロジェクトフォルダを</a:t>
+              <a:t>の比率で開かれたドキュメント、チェックリスト、作業画面、整列した歯車を</a:t>
             </a:r>
             <a:r>
               <a:rPr lang="en-US" sz="1200" b="0" i="0" dirty="0">
@@ -6893,7 +7692,7 @@
           </a:bodyPr>
           <a:lstStyle/>
           <a:p>
-            <a:fld id="{26F9DEAD-9B63-4F54-92C4-8B44E616D8BD}" type="slidenum">
+            <a:fld id="{B5A268B6-5CE1-4119-B57E-F965A1820562}" type="slidenum">
               <a:rPr lang="ja-JP" smtClean="0" sz="1000">
                 <a:solidFill>
                   <a:srgbClr val="888888"/>
@@ -6909,13 +7708,13 @@
               </a:rPr>
               <a:t>/</a:t>
             </a:r>
-            <a:fld id="{296DFDBE-51F1-4E3A-BC5C-2D7E80C79576}" type="slidecount">
+            <a:fld id="{28C5B937-EDD5-4615-A41A-00D1A4B4296C}" type="slidecount">
               <a:rPr lang="ja-JP" smtClean="0" sz="1000">
                 <a:solidFill>
                   <a:srgbClr val="888888"/>
                 </a:solidFill>
               </a:rPr>
-              <a:t>10</a:t>
+              <a:t>11</a:t>
             </a:fld>
           </a:p>
         </p:txBody>
@@ -7072,7 +7871,7 @@
                 </a:solidFill>
                 <a:ea typeface="Meiryo"/>
               </a:rPr>
-              <a:t>は役割が異なる</a:t>
+              <a:t>は役割が違う</a:t>
             </a:r>
           </a:p>
         </p:txBody>
@@ -7107,7 +7906,7 @@
                 </a:solidFill>
                 <a:ea typeface="Meiryo"/>
               </a:rPr>
-              <a:t>強制ルールと学習メモを混ぜないことが安定性を生む</a:t>
+              <a:t>強制指示と学習メモを混ぜない</a:t>
             </a:r>
           </a:p>
         </p:txBody>
@@ -7343,7 +8142,7 @@
                 </a:solidFill>
                 <a:ea typeface="Meiryo"/>
               </a:rPr>
-              <a:t>ユーザーが意図して明示する</a:t>
+              <a:t>ユーザーが意図して書く。合意済みルールを置く場所である。</a:t>
             </a:r>
           </a:p>
         </p:txBody>
@@ -7402,7 +8201,7 @@
                 </a:solidFill>
                 <a:latin typeface="Segoe UI"/>
               </a:rPr>
-              <a:t>AI</a:t>
+              <a:t>Claude</a:t>
             </a:r>
             <a:r>
               <a:rPr lang="ja-JP" sz="1200" b="0" i="0" dirty="0">
@@ -7411,7 +8210,7 @@
                 </a:solidFill>
                 <a:ea typeface="Meiryo"/>
               </a:rPr>
-              <a:t>が作業から自動的に学習する</a:t>
+              <a:t>が作業から学ぶ。好みや反復パターンが蓄積される。</a:t>
             </a:r>
           </a:p>
         </p:txBody>
@@ -7470,7 +8269,7 @@
                 </a:solidFill>
                 <a:ea typeface="Meiryo"/>
               </a:rPr>
-              <a:t>内容</a:t>
+              <a:t>書く内容</a:t>
             </a:r>
           </a:p>
         </p:txBody>
@@ -7529,7 +8328,7 @@
                 </a:solidFill>
                 <a:ea typeface="Meiryo"/>
               </a:rPr>
-              <a:t>規約、前提、手順、禁止事項</a:t>
+              <a:t>コーディング規約、禁止事項、必須コマンド、設計方針を記述する。</a:t>
             </a:r>
           </a:p>
         </p:txBody>
@@ -7588,7 +8387,7 @@
                 </a:solidFill>
                 <a:ea typeface="Meiryo"/>
               </a:rPr>
-              <a:t>好み、癖、最近の対処パターン</a:t>
+              <a:t>よく使う命名、最近の対処法、弱い好みを残す。</a:t>
             </a:r>
           </a:p>
         </p:txBody>
@@ -7647,7 +8446,7 @@
                 </a:solidFill>
                 <a:ea typeface="Meiryo"/>
               </a:rPr>
-              <a:t>扱い方</a:t>
+              <a:t>判断基準</a:t>
             </a:r>
           </a:p>
         </p:txBody>
@@ -7706,7 +8505,7 @@
                 </a:solidFill>
                 <a:ea typeface="Meiryo"/>
               </a:rPr>
-              <a:t>守るべき基準として参照する</a:t>
+              <a:t>「必ず守る」ものを置く。迷った時の優先順位が高い。</a:t>
             </a:r>
           </a:p>
         </p:txBody>
@@ -7765,7 +8564,7 @@
                 </a:solidFill>
                 <a:ea typeface="Meiryo"/>
               </a:rPr>
-              <a:t>判断を補助するヒントとして使う</a:t>
+              <a:t>「いつもこうしがち」を補助する。強制力は持たせすぎない。</a:t>
             </a:r>
           </a:p>
         </p:txBody>
@@ -7905,7 +8704,7 @@
           </a:bodyPr>
           <a:lstStyle/>
           <a:p>
-            <a:fld id="{046AD0EE-CF68-4B00-B980-2972104C5A75}" type="slidenum">
+            <a:fld id="{AF99A165-A2A5-4C80-89E9-93DB015D1B87}" type="slidenum">
               <a:rPr lang="ja-JP" smtClean="0" sz="1000">
                 <a:solidFill>
                   <a:srgbClr val="888888"/>
@@ -7921,13 +8720,13 @@
               </a:rPr>
               <a:t>/</a:t>
             </a:r>
-            <a:fld id="{F75F4FDB-DA2D-4950-923B-CCF3F6E05A3D}" type="slidecount">
+            <a:fld id="{658ECC93-FD1D-4C37-8625-203BF86A813E}" type="slidecount">
               <a:rPr lang="ja-JP" smtClean="0" sz="1000">
                 <a:solidFill>
                   <a:srgbClr val="888888"/>
                 </a:solidFill>
               </a:rPr>
-              <a:t>10</a:t>
+              <a:t>11</a:t>
             </a:fld>
           </a:p>
         </p:txBody>
@@ -8057,7 +8856,7 @@
                 </a:solidFill>
                 <a:ea typeface="Meiryo"/>
               </a:rPr>
-              <a:t>重要ルールを厳選し、守れる密度にする</a:t>
+              <a:t>重要ルールだけに絞るほど効きやすい</a:t>
             </a:r>
           </a:p>
         </p:txBody>
@@ -8092,25 +8891,7 @@
                 </a:solidFill>
                 <a:ea typeface="Meiryo"/>
               </a:rPr>
-              <a:t>長く書くより、</a:t>
-            </a:r>
-            <a:r>
-              <a:rPr lang="en-US" sz="1200" b="0" i="0" dirty="0">
-                <a:solidFill>
-                  <a:srgbClr val="FFFFFF"/>
-                </a:solidFill>
-                <a:latin typeface="Segoe UI"/>
-              </a:rPr>
-              <a:t>AI</a:t>
-            </a:r>
-            <a:r>
-              <a:rPr lang="ja-JP" sz="1200" b="0" i="0" dirty="0">
-                <a:solidFill>
-                  <a:srgbClr val="FFFFFF"/>
-                </a:solidFill>
-                <a:ea typeface="Meiryo"/>
-              </a:rPr>
-              <a:t>が実行できる粒度へ落とす</a:t>
+              <a:t>長さは管理可能な密度にする</a:t>
             </a:r>
           </a:p>
         </p:txBody>
@@ -8124,100 +8905,7 @@
         <p:spPr>
           <a:xfrm>
             <a:off x="164592" y="941832"/>
-            <a:ext cx="8814816" cy="844677"/>
-          </a:xfrm>
-          <a:prstGeom prst="rect">
-            <a:avLst/>
-          </a:prstGeom>
-          <a:solidFill>
-            <a:srgbClr val="E8EDF2"/>
-          </a:solidFill>
-          <a:ln w="9525">
-            <a:solidFill>
-              <a:srgbClr val="E0E0E0"/>
-            </a:solidFill>
-          </a:ln>
-          <a:effectLst/>
-        </p:spPr>
-        <p:style>
-          <a:lnRef idx="1">
-            <a:schemeClr val="accent1"/>
-          </a:lnRef>
-          <a:fillRef idx="3">
-            <a:schemeClr val="accent1"/>
-          </a:fillRef>
-          <a:effectRef idx="2">
-            <a:schemeClr val="accent1"/>
-          </a:effectRef>
-          <a:fontRef idx="minor">
-            <a:schemeClr val="lt1"/>
-          </a:fontRef>
-        </p:style>
-        <p:txBody>
-          <a:bodyPr rtlCol="0" anchor="ctr"/>
-          <a:lstStyle/>
-          <a:p>
-            <a:pPr algn="ctr"/>
-          </a:p>
-        </p:txBody>
-      </p:sp>
-      <p:sp>
-        <p:nvSpPr>
-          <p:cNvPr id="6" name="TextBox 5"/>
-          <p:cNvSpPr txBox="1"/>
-          <p:nvPr/>
-        </p:nvSpPr>
-        <p:spPr>
-          <a:xfrm>
-            <a:off x="301751" y="1051560"/>
-            <a:ext cx="8540496" cy="625221"/>
-          </a:xfrm>
-          <a:prstGeom prst="rect">
-            <a:avLst/>
-          </a:prstGeom>
-          <a:noFill/>
-          <a:effectLst/>
-        </p:spPr>
-        <p:txBody>
-          <a:bodyPr wrap="square" lIns="0" rIns="0" tIns="0" bIns="0">
-            <a:noAutofit/>
-          </a:bodyPr>
-          <a:lstStyle/>
-          <a:p>
-            <a:pPr>
-              <a:spcBef>
-                <a:spcPts val="0"/>
-              </a:spcBef>
-              <a:spcAft>
-                <a:spcPts val="400"/>
-              </a:spcAft>
-              <a:buNone/>
-              <a:lnSpc>
-                <a:spcPts val="2160"/>
-              </a:lnSpc>
-            </a:pPr>
-            <a:r>
-              <a:rPr lang="ja-JP" sz="1200" b="0" i="0" dirty="0">
-                <a:solidFill>
-                  <a:srgbClr val="333333"/>
-                </a:solidFill>
-                <a:ea typeface="Meiryo"/>
-              </a:rPr>
-              <a:t>ルールを増やすほど安心に見えるが、実際には重要な指示が埋もれやすくなる。</a:t>
-            </a:r>
-          </a:p>
-        </p:txBody>
-      </p:sp>
-      <p:sp>
-        <p:nvSpPr>
-          <p:cNvPr id="7" name="Rectangle 6"/>
-          <p:cNvSpPr/>
-          <p:nvPr/>
-        </p:nvSpPr>
-        <p:spPr>
-          <a:xfrm>
-            <a:off x="164592" y="1859661"/>
-            <a:ext cx="2889504" cy="2753486"/>
+            <a:ext cx="2889504" cy="3671315"/>
           </a:xfrm>
           <a:prstGeom prst="rect">
             <a:avLst/>
@@ -8256,13 +8944,13 @@
       </p:sp>
       <p:sp>
         <p:nvSpPr>
-          <p:cNvPr id="8" name="TextBox 7"/>
+          <p:cNvPr id="6" name="TextBox 5"/>
           <p:cNvSpPr txBox="1"/>
           <p:nvPr/>
         </p:nvSpPr>
         <p:spPr>
           <a:xfrm>
-            <a:off x="301751" y="1969389"/>
+            <a:off x="301751" y="1051560"/>
             <a:ext cx="2615184" cy="320040"/>
           </a:xfrm>
           <a:prstGeom prst="rect">
@@ -8284,20 +8972,20 @@
                 </a:solidFill>
                 <a:ea typeface="Meiryo"/>
               </a:rPr>
-              <a:t>厳選</a:t>
-            </a:r>
-          </a:p>
-        </p:txBody>
-      </p:sp>
-      <p:sp>
-        <p:nvSpPr>
-          <p:cNvPr id="9" name="Rectangle 8"/>
+              <a:t>量を抑える</a:t>
+            </a:r>
+          </a:p>
+        </p:txBody>
+      </p:sp>
+      <p:sp>
+        <p:nvSpPr>
+          <p:cNvPr id="7" name="Rectangle 6"/>
           <p:cNvSpPr/>
           <p:nvPr/>
         </p:nvSpPr>
         <p:spPr>
           <a:xfrm>
-            <a:off x="301751" y="2225421"/>
+            <a:off x="301751" y="1307592"/>
             <a:ext cx="2615184" cy="12700"/>
           </a:xfrm>
           <a:prstGeom prst="rect">
@@ -8335,14 +9023,14 @@
       </p:sp>
       <p:sp>
         <p:nvSpPr>
-          <p:cNvPr id="10" name="TextBox 9"/>
+          <p:cNvPr id="8" name="TextBox 7"/>
           <p:cNvSpPr txBox="1"/>
           <p:nvPr/>
         </p:nvSpPr>
         <p:spPr>
           <a:xfrm>
-            <a:off x="301751" y="2298573"/>
-            <a:ext cx="2615184" cy="2204847"/>
+            <a:off x="301751" y="1380744"/>
+            <a:ext cx="2615184" cy="3122675"/>
           </a:xfrm>
           <a:prstGeom prst="rect">
             <a:avLst/>
@@ -8375,7 +9063,25 @@
                 </a:solidFill>
                 <a:ea typeface="Meiryo"/>
               </a:rPr>
-              <a:t>常に守るものだけを残す。</a:t>
+              <a:t>多すぎるルールは優先順位をぼかす。</a:t>
+            </a:r>
+            <a:r>
+              <a:rPr lang="en-US" sz="1100" b="0" i="0" dirty="0">
+                <a:solidFill>
+                  <a:srgbClr val="333333"/>
+                </a:solidFill>
+                <a:latin typeface="Segoe UI"/>
+              </a:rPr>
+              <a:t>AI</a:t>
+            </a:r>
+            <a:r>
+              <a:rPr lang="ja-JP" sz="1100" b="0" i="0" dirty="0">
+                <a:solidFill>
+                  <a:srgbClr val="333333"/>
+                </a:solidFill>
+                <a:ea typeface="Meiryo"/>
+              </a:rPr>
+              <a:t>が常に守るべき基準だけを残す。</a:t>
             </a:r>
           </a:p>
           <a:p>
@@ -8398,7 +9104,52 @@
                 </a:solidFill>
                 <a:ea typeface="Meiryo"/>
               </a:rPr>
-              <a:t>単発の依頼は会話で処理する</a:t>
+              <a:t>目安は</a:t>
+            </a:r>
+            <a:r>
+              <a:rPr lang="en-US" sz="1100" b="1" i="0" dirty="0">
+                <a:solidFill>
+                  <a:srgbClr val="333333"/>
+                </a:solidFill>
+                <a:latin typeface="Segoe UI"/>
+              </a:rPr>
+              <a:t>60</a:t>
+            </a:r>
+            <a:r>
+              <a:rPr lang="ja-JP" sz="1100" b="1" i="0" dirty="0">
+                <a:solidFill>
+                  <a:srgbClr val="333333"/>
+                </a:solidFill>
+                <a:ea typeface="Meiryo"/>
+              </a:rPr>
+              <a:t>から</a:t>
+            </a:r>
+            <a:r>
+              <a:rPr lang="en-US" sz="1100" b="1" i="0" dirty="0">
+                <a:solidFill>
+                  <a:srgbClr val="333333"/>
+                </a:solidFill>
+                <a:latin typeface="Segoe UI"/>
+              </a:rPr>
+              <a:t>300</a:t>
+            </a:r>
+            <a:r>
+              <a:rPr lang="ja-JP" sz="1100" b="1" i="0" dirty="0">
+                <a:solidFill>
+                  <a:srgbClr val="333333"/>
+                </a:solidFill>
+                <a:ea typeface="Meiryo"/>
+              </a:rPr>
+              <a:t>行</a:t>
+            </a:r>
+            <a:r>
+              <a:rPr lang="ja-JP" sz="1100" b="0" i="0" dirty="0">
+                <a:solidFill>
+                  <a:srgbClr val="333333"/>
+                </a:solidFill>
+                <a:ea typeface="Meiryo"/>
+              </a:rPr>
+              <a:t>である。</a:t>
             </a:r>
           </a:p>
           <a:p>
@@ -8421,7 +9172,7 @@
                 </a:solidFill>
                 <a:ea typeface="Meiryo"/>
               </a:rPr>
-              <a:t>古い技術前提や重複を削る</a:t>
+              <a:t>重要度の低い説明は会話や別資料へ逃がす。</a:t>
             </a:r>
           </a:p>
           <a:p>
@@ -8444,39 +9195,21 @@
                 </a:solidFill>
                 <a:ea typeface="Meiryo"/>
               </a:rPr>
-              <a:t>重要度の低い好みは</a:t>
-            </a:r>
-            <a:r>
-              <a:rPr lang="en-US" sz="1100" b="0" i="0" dirty="0">
-                <a:solidFill>
-                  <a:srgbClr val="333333"/>
-                </a:solidFill>
-                <a:latin typeface="Segoe UI"/>
-              </a:rPr>
-              <a:t>MEMORY</a:t>
-            </a:r>
-            <a:r>
-              <a:rPr lang="ja-JP" sz="1100" b="0" i="0" dirty="0">
-                <a:solidFill>
-                  <a:srgbClr val="333333"/>
-                </a:solidFill>
-                <a:ea typeface="Meiryo"/>
-              </a:rPr>
-              <a:t>側へ逃がす</a:t>
-            </a:r>
-          </a:p>
-        </p:txBody>
-      </p:sp>
-      <p:sp>
-        <p:nvSpPr>
-          <p:cNvPr id="11" name="Rectangle 10"/>
+              <a:t>似たルールは統合し、重複を減らす。</a:t>
+            </a:r>
+          </a:p>
+        </p:txBody>
+      </p:sp>
+      <p:sp>
+        <p:nvSpPr>
+          <p:cNvPr id="9" name="Rectangle 8"/>
           <p:cNvSpPr/>
           <p:nvPr/>
         </p:nvSpPr>
         <p:spPr>
           <a:xfrm>
-            <a:off x="3127248" y="1859661"/>
-            <a:ext cx="2889504" cy="2753486"/>
+            <a:off x="3127248" y="941832"/>
+            <a:ext cx="2889504" cy="3671315"/>
           </a:xfrm>
           <a:prstGeom prst="rect">
             <a:avLst/>
@@ -8515,13 +9248,13 @@
       </p:sp>
       <p:sp>
         <p:nvSpPr>
-          <p:cNvPr id="12" name="TextBox 11"/>
+          <p:cNvPr id="10" name="TextBox 9"/>
           <p:cNvSpPr txBox="1"/>
           <p:nvPr/>
         </p:nvSpPr>
         <p:spPr>
           <a:xfrm>
-            <a:off x="3264408" y="1969389"/>
+            <a:off x="3264408" y="1051560"/>
             <a:ext cx="2615184" cy="320040"/>
           </a:xfrm>
           <a:prstGeom prst="rect">
@@ -8543,20 +9276,20 @@
                 </a:solidFill>
                 <a:ea typeface="Meiryo"/>
               </a:rPr>
-              <a:t>粒度</a:t>
-            </a:r>
-          </a:p>
-        </p:txBody>
-      </p:sp>
-      <p:sp>
-        <p:nvSpPr>
-          <p:cNvPr id="13" name="Rectangle 12"/>
+              <a:t>粒度を揃える</a:t>
+            </a:r>
+          </a:p>
+        </p:txBody>
+      </p:sp>
+      <p:sp>
+        <p:nvSpPr>
+          <p:cNvPr id="11" name="Rectangle 10"/>
           <p:cNvSpPr/>
           <p:nvPr/>
         </p:nvSpPr>
         <p:spPr>
           <a:xfrm>
-            <a:off x="3264408" y="2225421"/>
+            <a:off x="3264408" y="1307592"/>
             <a:ext cx="2615184" cy="12700"/>
           </a:xfrm>
           <a:prstGeom prst="rect">
@@ -8594,14 +9327,14 @@
       </p:sp>
       <p:sp>
         <p:nvSpPr>
-          <p:cNvPr id="14" name="TextBox 13"/>
+          <p:cNvPr id="12" name="TextBox 11"/>
           <p:cNvSpPr txBox="1"/>
           <p:nvPr/>
         </p:nvSpPr>
         <p:spPr>
           <a:xfrm>
-            <a:off x="3264408" y="2298573"/>
-            <a:ext cx="2615184" cy="2204847"/>
+            <a:off x="3264408" y="1380744"/>
+            <a:ext cx="2615184" cy="3122675"/>
           </a:xfrm>
           <a:prstGeom prst="rect">
             <a:avLst/>
@@ -8643,7 +9376,7 @@
                 </a:solidFill>
                 <a:ea typeface="Meiryo"/>
               </a:rPr>
-              <a:t>ルール</a:t>
+              <a:t>つの文で</a:t>
             </a:r>
             <a:r>
               <a:rPr lang="en-US" sz="1100" b="0" i="0" dirty="0">
@@ -8661,7 +9394,7 @@
                 </a:solidFill>
                 <a:ea typeface="Meiryo"/>
               </a:rPr>
-              <a:t>文で読める形にする。</a:t>
+              <a:t>つの行動を指定すると、判断の余地が減る。</a:t>
             </a:r>
           </a:p>
           <a:p>
@@ -8678,13 +9411,40 @@
               </a:lnSpc>
             </a:pPr>
             <a:r>
+              <a:rPr lang="en-US" sz="1100" b="0" i="0" dirty="0">
+                <a:solidFill>
+                  <a:srgbClr val="333333"/>
+                </a:solidFill>
+                <a:latin typeface="Segoe UI"/>
+              </a:rPr>
+              <a:t>1</a:t>
+            </a:r>
+            <a:r>
               <a:rPr lang="ja-JP" sz="1100" b="0" i="0" dirty="0">
                 <a:solidFill>
                   <a:srgbClr val="333333"/>
                 </a:solidFill>
                 <a:ea typeface="Meiryo"/>
               </a:rPr>
-              <a:t>長い説明より判断条件を明確にする</a:t>
+              <a:t>ルール</a:t>
+            </a:r>
+            <a:r>
+              <a:rPr lang="en-US" sz="1100" b="0" i="0" dirty="0">
+                <a:solidFill>
+                  <a:srgbClr val="333333"/>
+                </a:solidFill>
+                <a:latin typeface="Segoe UI"/>
+              </a:rPr>
+              <a:t>1</a:t>
+            </a:r>
+            <a:r>
+              <a:rPr lang="ja-JP" sz="1100" b="0" i="0" dirty="0">
+                <a:solidFill>
+                  <a:srgbClr val="333333"/>
+                </a:solidFill>
+                <a:ea typeface="Meiryo"/>
+              </a:rPr>
+              <a:t>文を基本にする。</a:t>
             </a:r>
           </a:p>
           <a:p>
@@ -8707,7 +9467,7 @@
                 </a:solidFill>
                 <a:ea typeface="Meiryo"/>
               </a:rPr>
-              <a:t>例外がある場合は条件を添える</a:t>
+              <a:t>「しっかり」などの評価語だけで終えない。</a:t>
             </a:r>
           </a:p>
           <a:p>
@@ -8730,21 +9490,21 @@
                 </a:solidFill>
                 <a:ea typeface="Meiryo"/>
               </a:rPr>
-              <a:t>抽象語だけで終わらせない</a:t>
-            </a:r>
-          </a:p>
-        </p:txBody>
-      </p:sp>
-      <p:sp>
-        <p:nvSpPr>
-          <p:cNvPr id="15" name="Rectangle 14"/>
+              <a:t>宣言調で、守る状態を明確にする。</a:t>
+            </a:r>
+          </a:p>
+        </p:txBody>
+      </p:sp>
+      <p:sp>
+        <p:nvSpPr>
+          <p:cNvPr id="13" name="Rectangle 12"/>
           <p:cNvSpPr/>
           <p:nvPr/>
         </p:nvSpPr>
         <p:spPr>
           <a:xfrm>
-            <a:off x="6089904" y="1859661"/>
-            <a:ext cx="2889504" cy="2753486"/>
+            <a:off x="6089904" y="941832"/>
+            <a:ext cx="2889504" cy="3671315"/>
           </a:xfrm>
           <a:prstGeom prst="rect">
             <a:avLst/>
@@ -8783,13 +9543,13 @@
       </p:sp>
       <p:sp>
         <p:nvSpPr>
-          <p:cNvPr id="16" name="TextBox 15"/>
+          <p:cNvPr id="14" name="TextBox 13"/>
           <p:cNvSpPr txBox="1"/>
           <p:nvPr/>
         </p:nvSpPr>
         <p:spPr>
           <a:xfrm>
-            <a:off x="6227064" y="1969389"/>
+            <a:off x="6227064" y="1051560"/>
             <a:ext cx="2615184" cy="320040"/>
           </a:xfrm>
           <a:prstGeom prst="rect">
@@ -8811,20 +9571,20 @@
                 </a:solidFill>
                 <a:ea typeface="Meiryo"/>
               </a:rPr>
-              <a:t>実行性</a:t>
-            </a:r>
-          </a:p>
-        </p:txBody>
-      </p:sp>
-      <p:sp>
-        <p:nvSpPr>
-          <p:cNvPr id="17" name="Rectangle 16"/>
+              <a:t>実行可能にする</a:t>
+            </a:r>
+          </a:p>
+        </p:txBody>
+      </p:sp>
+      <p:sp>
+        <p:nvSpPr>
+          <p:cNvPr id="15" name="Rectangle 14"/>
           <p:cNvSpPr/>
           <p:nvPr/>
         </p:nvSpPr>
         <p:spPr>
           <a:xfrm>
-            <a:off x="6227064" y="2225421"/>
+            <a:off x="6227064" y="1307592"/>
             <a:ext cx="2615184" cy="12700"/>
           </a:xfrm>
           <a:prstGeom prst="rect">
@@ -8862,14 +9622,14 @@
       </p:sp>
       <p:sp>
         <p:nvSpPr>
-          <p:cNvPr id="18" name="TextBox 17"/>
+          <p:cNvPr id="16" name="TextBox 15"/>
           <p:cNvSpPr txBox="1"/>
           <p:nvPr/>
         </p:nvSpPr>
         <p:spPr>
           <a:xfrm>
-            <a:off x="6227064" y="2298573"/>
-            <a:ext cx="2615184" cy="2204847"/>
+            <a:off x="6227064" y="1380744"/>
+            <a:ext cx="2615184" cy="3122675"/>
           </a:xfrm>
           <a:prstGeom prst="rect">
             <a:avLst/>
@@ -8896,13 +9656,22 @@
               </a:lnSpc>
             </a:pPr>
             <a:r>
+              <a:rPr lang="en-US" sz="1100" b="0" i="0" dirty="0">
+                <a:solidFill>
+                  <a:srgbClr val="333333"/>
+                </a:solidFill>
+                <a:latin typeface="Segoe UI"/>
+              </a:rPr>
+              <a:t>AI</a:t>
+            </a:r>
+            <a:r>
               <a:rPr lang="ja-JP" sz="1100" b="0" i="0" dirty="0">
                 <a:solidFill>
                   <a:srgbClr val="333333"/>
                 </a:solidFill>
                 <a:ea typeface="Meiryo"/>
               </a:rPr>
-              <a:t>行動へ移せる指示にする。</a:t>
+              <a:t>が即座に作業へ移せる文字列へ落とすと、再現性が上がる。</a:t>
             </a:r>
           </a:p>
           <a:p>
@@ -8919,13 +9688,31 @@
               </a:lnSpc>
             </a:pPr>
             <a:r>
+              <a:rPr lang="en-US" sz="1100" b="0" i="0" dirty="0">
+                <a:solidFill>
+                  <a:srgbClr val="333333"/>
+                </a:solidFill>
+                <a:latin typeface="Consolas"/>
+              </a:rPr>
+              <a:t>pnpm test</a:t>
+            </a:r>
+            <a:r>
+              <a:rPr lang="en-US" sz="1100" b="0" i="0" dirty="0">
+                <a:solidFill>
+                  <a:srgbClr val="333333"/>
+                </a:solidFill>
+                <a:latin typeface="Segoe UI"/>
+              </a:rPr>
+              <a:t> </a:t>
+            </a:r>
+            <a:r>
               <a:rPr lang="ja-JP" sz="1100" b="0" i="0" dirty="0">
                 <a:solidFill>
                   <a:srgbClr val="333333"/>
                 </a:solidFill>
                 <a:ea typeface="Meiryo"/>
               </a:rPr>
-              <a:t>「しっかりテスト」では弱い</a:t>
+              <a:t>のようにコマンドを書く。</a:t>
             </a:r>
           </a:p>
           <a:p>
@@ -8942,31 +9729,13 @@
               </a:lnSpc>
             </a:pPr>
             <a:r>
-              <a:rPr lang="en-US" sz="1100" b="0" i="0" dirty="0">
-                <a:solidFill>
-                  <a:srgbClr val="333333"/>
-                </a:solidFill>
-                <a:latin typeface="Consolas"/>
-              </a:rPr>
-              <a:t>pnpm test</a:t>
-            </a:r>
-            <a:r>
-              <a:rPr lang="en-US" sz="1100" b="0" i="0" dirty="0">
-                <a:solidFill>
-                  <a:srgbClr val="333333"/>
-                </a:solidFill>
-                <a:latin typeface="Segoe UI"/>
-              </a:rPr>
-              <a:t> </a:t>
-            </a:r>
-            <a:r>
               <a:rPr lang="ja-JP" sz="1100" b="0" i="0" dirty="0">
                 <a:solidFill>
                   <a:srgbClr val="333333"/>
                 </a:solidFill>
                 <a:ea typeface="Meiryo"/>
               </a:rPr>
-              <a:t>のようにコマンドまで書く</a:t>
+              <a:t>禁止事項は対象と理由をそろえる。</a:t>
             </a:r>
           </a:p>
           <a:p>
@@ -8989,14 +9758,14 @@
                 </a:solidFill>
                 <a:ea typeface="Meiryo"/>
               </a:rPr>
-              <a:t>成功条件や修正対象を明示する</a:t>
-            </a:r>
-          </a:p>
-        </p:txBody>
-      </p:sp>
-      <p:sp>
-        <p:nvSpPr>
-          <p:cNvPr id="19" name="Rectangle 18"/>
+              <a:t>完了条件や確認順序まで含める。</a:t>
+            </a:r>
+          </a:p>
+        </p:txBody>
+      </p:sp>
+      <p:sp>
+        <p:nvSpPr>
+          <p:cNvPr id="17" name="Rectangle 16"/>
           <p:cNvSpPr/>
           <p:nvPr/>
         </p:nvSpPr>
@@ -9040,7 +9809,7 @@
       </p:sp>
       <p:sp>
         <p:nvSpPr>
-          <p:cNvPr id="20" name="TextBox 19"/>
+          <p:cNvPr id="18" name="TextBox 17"/>
           <p:cNvSpPr txBox="1"/>
           <p:nvPr/>
         </p:nvSpPr>
@@ -9060,7 +9829,7 @@
           </a:bodyPr>
           <a:lstStyle/>
           <a:p>
-            <a:fld id="{49DF6B02-DBC5-41E7-A2BA-9C7669701261}" type="slidenum">
+            <a:fld id="{F2F360E1-FBB9-48D6-9FC8-C0BA8EF72BF7}" type="slidenum">
               <a:rPr lang="ja-JP" smtClean="0" sz="1000">
                 <a:solidFill>
                   <a:srgbClr val="888888"/>
@@ -9076,20 +9845,20 @@
               </a:rPr>
               <a:t>/</a:t>
             </a:r>
-            <a:fld id="{1570EF08-0277-4ABF-8EB7-463DCA06C7B8}" type="slidecount">
+            <a:fld id="{BA483F28-3477-4272-860D-415297F4706F}" type="slidecount">
               <a:rPr lang="ja-JP" smtClean="0" sz="1000">
                 <a:solidFill>
                   <a:srgbClr val="888888"/>
                 </a:solidFill>
               </a:rPr>
-              <a:t>10</a:t>
+              <a:t>11</a:t>
             </a:fld>
           </a:p>
         </p:txBody>
       </p:sp>
       <p:pic>
         <p:nvPicPr>
-          <p:cNvPr id="21" name="Picture 20" descr="logo.png"/>
+          <p:cNvPr id="19" name="Picture 18" descr="logo.png"/>
           <p:cNvPicPr>
             <a:picLocks noChangeAspect="1"/>
           </p:cNvPicPr>
@@ -9212,7 +9981,7 @@
                 </a:solidFill>
                 <a:ea typeface="Meiryo"/>
               </a:rPr>
-              <a:t>推奨章立ては</a:t>
+              <a:t>章立ては</a:t>
             </a:r>
             <a:r>
               <a:rPr lang="en-US" sz="2400" b="1" i="0" dirty="0">
@@ -9230,7 +9999,7 @@
                 </a:solidFill>
                 <a:ea typeface="Meiryo"/>
               </a:rPr>
-              <a:t>の探索と判断を助ける</a:t>
+              <a:t>の探索順を作る</a:t>
             </a:r>
           </a:p>
         </p:txBody>
@@ -9265,7 +10034,7 @@
                 </a:solidFill>
                 <a:latin typeface="Segoe UI"/>
               </a:rPr>
-              <a:t>What</a:t>
+              <a:t>7</a:t>
             </a:r>
             <a:r>
               <a:rPr lang="ja-JP" sz="1200" b="0" i="0" dirty="0">
@@ -9274,61 +10043,7 @@
                 </a:solidFill>
                 <a:ea typeface="Meiryo"/>
               </a:rPr>
-              <a:t>、</a:t>
-            </a:r>
-            <a:r>
-              <a:rPr lang="en-US" sz="1200" b="0" i="0" dirty="0">
-                <a:solidFill>
-                  <a:srgbClr val="FFFFFF"/>
-                </a:solidFill>
-                <a:latin typeface="Segoe UI"/>
-              </a:rPr>
-              <a:t>How</a:t>
-            </a:r>
-            <a:r>
-              <a:rPr lang="ja-JP" sz="1200" b="0" i="0" dirty="0">
-                <a:solidFill>
-                  <a:srgbClr val="FFFFFF"/>
-                </a:solidFill>
-                <a:ea typeface="Meiryo"/>
-              </a:rPr>
-              <a:t>、</a:t>
-            </a:r>
-            <a:r>
-              <a:rPr lang="en-US" sz="1200" b="0" i="0" dirty="0">
-                <a:solidFill>
-                  <a:srgbClr val="FFFFFF"/>
-                </a:solidFill>
-                <a:latin typeface="Segoe UI"/>
-              </a:rPr>
-              <a:t>Workflow</a:t>
-            </a:r>
-            <a:r>
-              <a:rPr lang="ja-JP" sz="1200" b="0" i="0" dirty="0">
-                <a:solidFill>
-                  <a:srgbClr val="FFFFFF"/>
-                </a:solidFill>
-                <a:ea typeface="Meiryo"/>
-              </a:rPr>
-              <a:t>、</a:t>
-            </a:r>
-            <a:r>
-              <a:rPr lang="en-US" sz="1200" b="0" i="0" dirty="0">
-                <a:solidFill>
-                  <a:srgbClr val="FFFFFF"/>
-                </a:solidFill>
-                <a:latin typeface="Segoe UI"/>
-              </a:rPr>
-              <a:t>Gotchas</a:t>
-            </a:r>
-            <a:r>
-              <a:rPr lang="ja-JP" sz="1200" b="0" i="0" dirty="0">
-                <a:solidFill>
-                  <a:srgbClr val="FFFFFF"/>
-                </a:solidFill>
-                <a:ea typeface="Meiryo"/>
-              </a:rPr>
-              <a:t>を地図として渡す</a:t>
+              <a:t>章で「何を、どう触るか」を迷わせない</a:t>
             </a:r>
           </a:p>
         </p:txBody>
@@ -9343,7 +10058,7 @@
         </p:nvGraphicFramePr>
         <p:xfrm>
           <a:off x="164592" y="941832"/>
-          <a:ext cx="8814816" cy="2753485"/>
+          <a:ext cx="8814816" cy="2753480"/>
         </p:xfrm>
         <a:graphic>
           <a:graphicData uri="http://schemas.openxmlformats.org/drawingml/2006/table">
@@ -9356,7 +10071,7 @@
                 <a:gridCol w="2938272"/>
                 <a:gridCol w="2938272"/>
               </a:tblGrid>
-              <a:tr h="393355">
+              <a:tr h="344185">
                 <a:tc>
                   <a:txBody>
                     <a:bodyPr lIns="88900" rIns="88900" tIns="38100" bIns="38100" wrap="square" anchor="ctr"/>
@@ -9496,7 +10211,7 @@
                   </a:tcPr>
                 </a:tc>
               </a:tr>
-              <a:tr h="393355">
+              <a:tr h="344185">
                 <a:tc>
                   <a:txBody>
                     <a:bodyPr lIns="88900" rIns="88900" tIns="38100" bIns="38100" wrap="square" anchor="ctr"/>
@@ -9555,7 +10270,7 @@
                           </a:solidFill>
                           <a:ea typeface="Meiryo"/>
                         </a:rPr>
-                        <a:t>何を作るかを理解させる</a:t>
+                        <a:t>何を作るかを共有する</a:t>
                       </a:r>
                     </a:p>
                   </a:txBody>
@@ -9601,7 +10316,7 @@
                           </a:solidFill>
                           <a:ea typeface="Meiryo"/>
                         </a:rPr>
-                        <a:t>目的、ユーザー、重要ユースケース</a:t>
+                        <a:t>目的、ユーザー、非機能要件</a:t>
                       </a:r>
                     </a:p>
                   </a:txBody>
@@ -9636,7 +10351,7 @@
                   </a:tcPr>
                 </a:tc>
               </a:tr>
-              <a:tr h="393355">
+              <a:tr h="344185">
                 <a:tc>
                   <a:txBody>
                     <a:bodyPr lIns="88900" rIns="88900" tIns="38100" bIns="38100" wrap="square" anchor="ctr"/>
@@ -9695,7 +10410,7 @@
                           </a:solidFill>
                           <a:ea typeface="Meiryo"/>
                         </a:rPr>
-                        <a:t>提案の前提を揃える</a:t>
+                        <a:t>提案の幅を制御する</a:t>
                       </a:r>
                     </a:p>
                   </a:txBody>
@@ -9741,43 +10456,7 @@
                           </a:solidFill>
                           <a:ea typeface="Meiryo"/>
                         </a:rPr>
-                        <a:t>言語、</a:t>
-                      </a:r>
-                      <a:r>
-                        <a:rPr lang="en-US" sz="1200" b="0" i="0" dirty="0">
-                          <a:solidFill>
-                            <a:srgbClr val="333333"/>
-                          </a:solidFill>
-                          <a:latin typeface="Segoe UI"/>
-                        </a:rPr>
-                        <a:t>FW</a:t>
-                      </a:r>
-                      <a:r>
-                        <a:rPr lang="ja-JP" sz="1200" b="0" i="0" dirty="0">
-                          <a:solidFill>
-                            <a:srgbClr val="333333"/>
-                          </a:solidFill>
-                          <a:ea typeface="Meiryo"/>
-                        </a:rPr>
-                        <a:t>、</a:t>
-                      </a:r>
-                      <a:r>
-                        <a:rPr lang="en-US" sz="1200" b="0" i="0" dirty="0">
-                          <a:solidFill>
-                            <a:srgbClr val="333333"/>
-                          </a:solidFill>
-                          <a:latin typeface="Segoe UI"/>
-                        </a:rPr>
-                        <a:t>UI</a:t>
-                      </a:r>
-                      <a:r>
-                        <a:rPr lang="ja-JP" sz="1200" b="0" i="0" dirty="0">
-                          <a:solidFill>
-                            <a:srgbClr val="333333"/>
-                          </a:solidFill>
-                          <a:ea typeface="Meiryo"/>
-                        </a:rPr>
-                        <a:t>ライブラリ、禁止ライブラリ</a:t>
+                        <a:t>言語、フレームワーク、禁止ライブラリ</a:t>
                       </a:r>
                     </a:p>
                   </a:txBody>
@@ -9812,7 +10491,7 @@
                   </a:tcPr>
                 </a:tc>
               </a:tr>
-              <a:tr h="393355">
+              <a:tr h="344185">
                 <a:tc>
                   <a:txBody>
                     <a:bodyPr lIns="88900" rIns="88900" tIns="38100" bIns="38100" wrap="square" anchor="ctr"/>
@@ -9871,7 +10550,7 @@
                           </a:solidFill>
                           <a:ea typeface="Meiryo"/>
                         </a:rPr>
-                        <a:t>ファイル探索の地図にする</a:t>
+                        <a:t>ファイル探索を助ける</a:t>
                       </a:r>
                     </a:p>
                   </a:txBody>
@@ -9917,7 +10596,7 @@
                           </a:solidFill>
                           <a:ea typeface="Meiryo"/>
                         </a:rPr>
-                        <a:t>主要フォルダの役割、隔離ルール</a:t>
+                        <a:t>主要フォルダ、責務、隔離ルール</a:t>
                       </a:r>
                     </a:p>
                   </a:txBody>
@@ -9952,7 +10631,7 @@
                   </a:tcPr>
                 </a:tc>
               </a:tr>
-              <a:tr h="393355">
+              <a:tr h="344185">
                 <a:tc>
                   <a:txBody>
                     <a:bodyPr lIns="88900" rIns="88900" tIns="38100" bIns="38100" wrap="square" anchor="ctr"/>
@@ -10011,7 +10690,7 @@
                           </a:solidFill>
                           <a:ea typeface="Meiryo"/>
                         </a:rPr>
-                        <a:t>実行計画へ組み込ませる</a:t>
+                        <a:t>検証を自動化しやすくする</a:t>
                       </a:r>
                     </a:p>
                   </a:txBody>
@@ -10055,7 +10734,7 @@
                           <a:solidFill>
                             <a:srgbClr val="333333"/>
                           </a:solidFill>
-                          <a:latin typeface="Consolas"/>
+                          <a:latin typeface="Segoe UI"/>
                         </a:rPr>
                         <a:t>dev</a:t>
                       </a:r>
@@ -10073,7 +10752,7 @@
                           <a:solidFill>
                             <a:srgbClr val="333333"/>
                           </a:solidFill>
-                          <a:latin typeface="Consolas"/>
+                          <a:latin typeface="Segoe UI"/>
                         </a:rPr>
                         <a:t>test</a:t>
                       </a:r>
@@ -10091,9 +10770,9 @@
                           <a:solidFill>
                             <a:srgbClr val="333333"/>
                           </a:solidFill>
-                          <a:latin typeface="Consolas"/>
+                          <a:latin typeface="Segoe UI"/>
                         </a:rPr>
-                        <a:t>lint</a:t>
+                        <a:t>typecheck</a:t>
                       </a:r>
                       <a:r>
                         <a:rPr lang="ja-JP" sz="1200" b="0" i="0" dirty="0">
@@ -10109,9 +10788,9 @@
                           <a:solidFill>
                             <a:srgbClr val="333333"/>
                           </a:solidFill>
-                          <a:latin typeface="Consolas"/>
+                          <a:latin typeface="Segoe UI"/>
                         </a:rPr>
-                        <a:t>typecheck</a:t>
+                        <a:t>lint</a:t>
                       </a:r>
                     </a:p>
                   </a:txBody>
@@ -10146,7 +10825,7 @@
                   </a:tcPr>
                 </a:tc>
               </a:tr>
-              <a:tr h="393355">
+              <a:tr h="344185">
                 <a:tc>
                   <a:txBody>
                     <a:bodyPr lIns="88900" rIns="88900" tIns="38100" bIns="38100" wrap="square" anchor="ctr"/>
@@ -10159,7 +10838,165 @@
                           </a:solidFill>
                           <a:ea typeface="Meiryo"/>
                         </a:rPr>
-                        <a:t>作業ルール</a:t>
+                        <a:t>コーディング規約</a:t>
+                      </a:r>
+                    </a:p>
+                  </a:txBody>
+                  <a:tcPr anchor="ctr">
+                    <a:solidFill>
+                      <a:srgbClr val="6B7A99"/>
+                    </a:solidFill>
+                    <a:lnL w="9525" cap="flat" cmpd="sng" algn="ctr">
+                      <a:solidFill>
+                        <a:srgbClr val="D0D0D0"/>
+                      </a:solidFill>
+                      <a:prstDash val="solid"/>
+                    </a:lnL>
+                    <a:lnR w="9525" cap="flat" cmpd="sng" algn="ctr">
+                      <a:solidFill>
+                        <a:srgbClr val="D0D0D0"/>
+                      </a:solidFill>
+                      <a:prstDash val="solid"/>
+                    </a:lnR>
+                    <a:lnT w="9525" cap="flat" cmpd="sng" algn="ctr">
+                      <a:solidFill>
+                        <a:srgbClr val="D0D0D0"/>
+                      </a:solidFill>
+                      <a:prstDash val="solid"/>
+                    </a:lnT>
+                    <a:lnB w="9525" cap="flat" cmpd="sng" algn="ctr">
+                      <a:solidFill>
+                        <a:srgbClr val="D0D0D0"/>
+                      </a:solidFill>
+                      <a:prstDash val="solid"/>
+                    </a:lnB>
+                  </a:tcPr>
+                </a:tc>
+                <a:tc>
+                  <a:txBody>
+                    <a:bodyPr lIns="88900" rIns="88900" tIns="38100" bIns="38100" wrap="square" anchor="ctr"/>
+                    <a:lstStyle/>
+                    <a:p>
+                      <a:r>
+                        <a:rPr lang="ja-JP" sz="1200" b="0" i="0" dirty="0">
+                          <a:solidFill>
+                            <a:srgbClr val="333333"/>
+                          </a:solidFill>
+                          <a:ea typeface="Meiryo"/>
+                        </a:rPr>
+                        <a:t>自動化しにくい好みを固定する</a:t>
+                      </a:r>
+                    </a:p>
+                  </a:txBody>
+                  <a:tcPr anchor="ctr">
+                    <a:solidFill>
+                      <a:srgbClr val="FFFFFF"/>
+                    </a:solidFill>
+                    <a:lnL w="9525" cap="flat" cmpd="sng" algn="ctr">
+                      <a:solidFill>
+                        <a:srgbClr val="D0D0D0"/>
+                      </a:solidFill>
+                      <a:prstDash val="solid"/>
+                    </a:lnL>
+                    <a:lnR w="9525" cap="flat" cmpd="sng" algn="ctr">
+                      <a:solidFill>
+                        <a:srgbClr val="D0D0D0"/>
+                      </a:solidFill>
+                      <a:prstDash val="solid"/>
+                    </a:lnR>
+                    <a:lnT w="9525" cap="flat" cmpd="sng" algn="ctr">
+                      <a:solidFill>
+                        <a:srgbClr val="D0D0D0"/>
+                      </a:solidFill>
+                      <a:prstDash val="solid"/>
+                    </a:lnT>
+                    <a:lnB w="9525" cap="flat" cmpd="sng" algn="ctr">
+                      <a:solidFill>
+                        <a:srgbClr val="D0D0D0"/>
+                      </a:solidFill>
+                      <a:prstDash val="solid"/>
+                    </a:lnB>
+                  </a:tcPr>
+                </a:tc>
+                <a:tc>
+                  <a:txBody>
+                    <a:bodyPr lIns="88900" rIns="88900" tIns="38100" bIns="38100" wrap="square" anchor="ctr"/>
+                    <a:lstStyle/>
+                    <a:p>
+                      <a:r>
+                        <a:rPr lang="ja-JP" sz="1200" b="0" i="0" dirty="0">
+                          <a:solidFill>
+                            <a:srgbClr val="333333"/>
+                          </a:solidFill>
+                          <a:ea typeface="Meiryo"/>
+                        </a:rPr>
+                        <a:t>インデント、命名、</a:t>
+                      </a:r>
+                      <a:r>
+                        <a:rPr lang="en-US" sz="1200" b="0" i="0" dirty="0">
+                          <a:solidFill>
+                            <a:srgbClr val="333333"/>
+                          </a:solidFill>
+                          <a:latin typeface="Segoe UI"/>
+                        </a:rPr>
+                        <a:t>TypeScript</a:t>
+                      </a:r>
+                      <a:r>
+                        <a:rPr lang="ja-JP" sz="1200" b="0" i="0" dirty="0">
+                          <a:solidFill>
+                            <a:srgbClr val="333333"/>
+                          </a:solidFill>
+                          <a:ea typeface="Meiryo"/>
+                        </a:rPr>
+                        <a:t>方針</a:t>
+                      </a:r>
+                    </a:p>
+                  </a:txBody>
+                  <a:tcPr anchor="ctr">
+                    <a:solidFill>
+                      <a:srgbClr val="FFFFFF"/>
+                    </a:solidFill>
+                    <a:lnL w="9525" cap="flat" cmpd="sng" algn="ctr">
+                      <a:solidFill>
+                        <a:srgbClr val="D0D0D0"/>
+                      </a:solidFill>
+                      <a:prstDash val="solid"/>
+                    </a:lnL>
+                    <a:lnR w="9525" cap="flat" cmpd="sng" algn="ctr">
+                      <a:solidFill>
+                        <a:srgbClr val="D0D0D0"/>
+                      </a:solidFill>
+                      <a:prstDash val="solid"/>
+                    </a:lnR>
+                    <a:lnT w="9525" cap="flat" cmpd="sng" algn="ctr">
+                      <a:solidFill>
+                        <a:srgbClr val="D0D0D0"/>
+                      </a:solidFill>
+                      <a:prstDash val="solid"/>
+                    </a:lnT>
+                    <a:lnB w="9525" cap="flat" cmpd="sng" algn="ctr">
+                      <a:solidFill>
+                        <a:srgbClr val="D0D0D0"/>
+                      </a:solidFill>
+                      <a:prstDash val="solid"/>
+                    </a:lnB>
+                  </a:tcPr>
+                </a:tc>
+              </a:tr>
+              <a:tr h="344185">
+                <a:tc>
+                  <a:txBody>
+                    <a:bodyPr lIns="88900" rIns="88900" tIns="38100" bIns="38100" wrap="square" anchor="ctr"/>
+                    <a:lstStyle/>
+                    <a:p>
+                      <a:r>
+                        <a:rPr lang="ja-JP" sz="1200" b="1" i="0" dirty="0">
+                          <a:solidFill>
+                            <a:srgbClr val="FFFFFF"/>
+                          </a:solidFill>
+                          <a:ea typeface="Meiryo"/>
+                        </a:rPr>
+                        <a:t>ワークフロー</a:t>
                       </a:r>
                     </a:p>
                   </a:txBody>
@@ -10214,13 +11051,13 @@
                           </a:solidFill>
                           <a:ea typeface="Meiryo"/>
                         </a:rPr>
-                        <a:t>の行動を制御する</a:t>
+                        <a:t>の作業手順を制御する</a:t>
                       </a:r>
                     </a:p>
                   </a:txBody>
                   <a:tcPr anchor="ctr">
                     <a:solidFill>
-                      <a:srgbClr val="FFFFFF"/>
+                      <a:srgbClr val="F5F5F5"/>
                     </a:solidFill>
                     <a:lnL w="9525" cap="flat" cmpd="sng" algn="ctr">
                       <a:solidFill>
@@ -10260,13 +11097,13 @@
                           </a:solidFill>
                           <a:ea typeface="Meiryo"/>
                         </a:rPr>
-                        <a:t>調査、計画、検証、要約時の保持事項</a:t>
+                        <a:t>調査、計画、変更、検証の順序</a:t>
                       </a:r>
                     </a:p>
                   </a:txBody>
                   <a:tcPr anchor="ctr">
                     <a:solidFill>
-                      <a:srgbClr val="FFFFFF"/>
+                      <a:srgbClr val="F5F5F5"/>
                     </a:solidFill>
                     <a:lnL w="9525" cap="flat" cmpd="sng" algn="ctr">
                       <a:solidFill>
@@ -10295,7 +11132,7 @@
                   </a:tcPr>
                 </a:tc>
               </a:tr>
-              <a:tr h="393355">
+              <a:tr h="344185">
                 <a:tc>
                   <a:txBody>
                     <a:bodyPr lIns="88900" rIns="88900" tIns="38100" bIns="38100" wrap="square" anchor="ctr"/>
@@ -10354,13 +11191,13 @@
                           </a:solidFill>
                           <a:ea typeface="Meiryo"/>
                         </a:rPr>
-                        <a:t>現場固有の事故を防ぐ</a:t>
+                        <a:t>推測しにくい制約を守る</a:t>
                       </a:r>
                     </a:p>
                   </a:txBody>
                   <a:tcPr anchor="ctr">
                     <a:solidFill>
-                      <a:srgbClr val="F5F5F5"/>
+                      <a:srgbClr val="FFFFFF"/>
                     </a:solidFill>
                     <a:lnL w="9525" cap="flat" cmpd="sng" algn="ctr">
                       <a:solidFill>
@@ -10400,13 +11237,31 @@
                           </a:solidFill>
                           <a:ea typeface="Meiryo"/>
                         </a:rPr>
-                        <a:t>本番環境、個人情報、シェル差分</a:t>
+                        <a:t>本番環境、個人情報、</a:t>
+                      </a:r>
+                      <a:r>
+                        <a:rPr lang="en-US" sz="1200" b="0" i="0" dirty="0">
+                          <a:solidFill>
+                            <a:srgbClr val="333333"/>
+                          </a:solidFill>
+                          <a:latin typeface="Segoe UI"/>
+                        </a:rPr>
+                        <a:t>OS</a:t>
+                      </a:r>
+                      <a:r>
+                        <a:rPr lang="ja-JP" sz="1200" b="0" i="0" dirty="0">
+                          <a:solidFill>
+                            <a:srgbClr val="333333"/>
+                          </a:solidFill>
+                          <a:ea typeface="Meiryo"/>
+                        </a:rPr>
+                        <a:t>前提</a:t>
                       </a:r>
                     </a:p>
                   </a:txBody>
                   <a:tcPr anchor="ctr">
                     <a:solidFill>
-                      <a:srgbClr val="F5F5F5"/>
+                      <a:srgbClr val="FFFFFF"/>
                     </a:solidFill>
                     <a:lnL w="9525" cap="flat" cmpd="sng" algn="ctr">
                       <a:solidFill>
@@ -10571,7 +11426,7 @@
                 </a:solidFill>
                 <a:ea typeface="Meiryo"/>
               </a:rPr>
-              <a:t>章立ては情報分類ではなく、</a:t>
+              <a:t>章立ては情報整理ではなく、</a:t>
             </a:r>
             <a:r>
               <a:rPr lang="en-US" sz="1200" b="0" i="0" dirty="0">
@@ -10589,7 +11444,25 @@
                 </a:solidFill>
                 <a:ea typeface="Meiryo"/>
               </a:rPr>
-              <a:t>が次に何を読むべきかを迷わないための作業地図である。</a:t>
+              <a:t>が安全に作業へ入るための</a:t>
+            </a:r>
+            <a:r>
+              <a:rPr lang="ja-JP" sz="1200" b="1" i="0" dirty="0">
+                <a:solidFill>
+                  <a:srgbClr val="1A2A5A"/>
+                </a:solidFill>
+                <a:ea typeface="Meiryo"/>
+              </a:rPr>
+              <a:t>探索導線</a:t>
+            </a:r>
+            <a:r>
+              <a:rPr lang="ja-JP" sz="1200" b="0" i="0" dirty="0">
+                <a:solidFill>
+                  <a:srgbClr val="1A2A5A"/>
+                </a:solidFill>
+                <a:ea typeface="Meiryo"/>
+              </a:rPr>
+              <a:t>である。</a:t>
             </a:r>
           </a:p>
         </p:txBody>
@@ -10660,7 +11533,7 @@
           </a:bodyPr>
           <a:lstStyle/>
           <a:p>
-            <a:fld id="{DA4EDF9D-3E91-461D-BE75-F2CF29D794D3}" type="slidenum">
+            <a:fld id="{9A77507D-25FC-4B63-A508-51A888CDD98D}" type="slidenum">
               <a:rPr lang="ja-JP" smtClean="0" sz="1000">
                 <a:solidFill>
                   <a:srgbClr val="888888"/>
@@ -10676,13 +11549,13 @@
               </a:rPr>
               <a:t>/</a:t>
             </a:r>
-            <a:fld id="{7C2613E8-B310-4DB6-9CD6-CEF4E9EF7746}" type="slidecount">
+            <a:fld id="{B11C64D6-EC2F-43F8-899F-D6CB56FB3A29}" type="slidecount">
               <a:rPr lang="ja-JP" smtClean="0" sz="1000">
                 <a:solidFill>
                   <a:srgbClr val="888888"/>
                 </a:solidFill>
               </a:rPr>
-              <a:t>10</a:t>
+              <a:t>11</a:t>
             </a:fld>
           </a:p>
         </p:txBody>
@@ -10806,22 +11679,13 @@
           <a:lstStyle/>
           <a:p>
             <a:r>
-              <a:rPr lang="en-US" sz="2400" b="1" i="0" dirty="0">
+              <a:rPr lang="ja-JP" sz="2400" b="1" i="0" dirty="0">
                 <a:solidFill>
                   <a:srgbClr val="FFFFFF"/>
                 </a:solidFill>
-                <a:latin typeface="Segoe UI"/>
-              </a:rPr>
-              <a:t>rules</a:t>
-            </a:r>
-            <a:r>
-              <a:rPr lang="ja-JP" sz="2400" b="1" i="0" dirty="0">
-                <a:solidFill>
-                  <a:srgbClr val="FFFFFF"/>
-                </a:solidFill>
-                <a:ea typeface="Meiryo"/>
-              </a:rPr>
-              <a:t>でスコープを分け、文脈ノイズを減らす</a:t>
+                <a:ea typeface="Meiryo"/>
+              </a:rPr>
+              <a:t>コマンドと禁止事項はそのまま使える形にする</a:t>
             </a:r>
           </a:p>
         </p:txBody>
@@ -10856,7 +11720,7 @@
                 </a:solidFill>
                 <a:ea typeface="Meiryo"/>
               </a:rPr>
-              <a:t>全体ルールと領域別ルールを分離して必要な情報だけを読ませる</a:t>
+              <a:t>抽象ルールを実行手順へ変換する</a:t>
             </a:r>
           </a:p>
         </p:txBody>
@@ -10870,7 +11734,7 @@
         <p:spPr>
           <a:xfrm>
             <a:off x="164592" y="941832"/>
-            <a:ext cx="2889504" cy="959205"/>
+            <a:ext cx="2148840" cy="959205"/>
           </a:xfrm>
           <a:custGeom>
             <a:avLst/>
@@ -10924,7 +11788,7 @@
         <p:spPr>
           <a:xfrm>
             <a:off x="301751" y="941832"/>
-            <a:ext cx="2456078" cy="959205"/>
+            <a:ext cx="1826514" cy="959205"/>
           </a:xfrm>
           <a:prstGeom prst="rect">
             <a:avLst/>
@@ -10939,22 +11803,13 @@
           <a:lstStyle/>
           <a:p>
             <a:r>
-              <a:rPr lang="en-US" sz="1400" b="1" i="0" dirty="0">
-                <a:solidFill>
-                  <a:srgbClr val="333333"/>
-                </a:solidFill>
-                <a:latin typeface="Segoe UI"/>
-              </a:rPr>
-              <a:t>1. </a:t>
-            </a:r>
-            <a:r>
               <a:rPr lang="ja-JP" sz="1400" b="1" i="0" dirty="0">
                 <a:solidFill>
                   <a:srgbClr val="333333"/>
                 </a:solidFill>
                 <a:ea typeface="Meiryo"/>
               </a:rPr>
-              <a:t>共通</a:t>
+              <a:t>コマンドを固定する</a:t>
             </a:r>
           </a:p>
         </p:txBody>
@@ -10967,8 +11822,8 @@
         </p:nvSpPr>
         <p:spPr>
           <a:xfrm>
-            <a:off x="3127248" y="941832"/>
-            <a:ext cx="2889504" cy="959205"/>
+            <a:off x="2386584" y="941832"/>
+            <a:ext cx="2148840" cy="959205"/>
           </a:xfrm>
           <a:custGeom>
             <a:avLst/>
@@ -11021,8 +11876,8 @@
         </p:nvSpPr>
         <p:spPr>
           <a:xfrm>
-            <a:off x="3264408" y="941832"/>
-            <a:ext cx="2456078" cy="959205"/>
+            <a:off x="2523744" y="941832"/>
+            <a:ext cx="1826514" cy="959205"/>
           </a:xfrm>
           <a:prstGeom prst="rect">
             <a:avLst/>
@@ -11037,22 +11892,13 @@
           <a:lstStyle/>
           <a:p>
             <a:r>
-              <a:rPr lang="en-US" sz="1400" b="1" i="0" dirty="0">
-                <a:solidFill>
-                  <a:srgbClr val="333333"/>
-                </a:solidFill>
-                <a:latin typeface="Segoe UI"/>
-              </a:rPr>
-              <a:t>2. </a:t>
-            </a:r>
-            <a:r>
               <a:rPr lang="ja-JP" sz="1400" b="1" i="0" dirty="0">
                 <a:solidFill>
                   <a:srgbClr val="333333"/>
                 </a:solidFill>
                 <a:ea typeface="Meiryo"/>
               </a:rPr>
-              <a:t>分離</a:t>
+              <a:t>触る場所を示す</a:t>
             </a:r>
           </a:p>
         </p:txBody>
@@ -11065,8 +11911,8 @@
         </p:nvSpPr>
         <p:spPr>
           <a:xfrm>
-            <a:off x="6089904" y="941832"/>
-            <a:ext cx="2889504" cy="959205"/>
+            <a:off x="4608576" y="941832"/>
+            <a:ext cx="2148840" cy="959205"/>
           </a:xfrm>
           <a:custGeom>
             <a:avLst/>
@@ -11119,8 +11965,8 @@
         </p:nvSpPr>
         <p:spPr>
           <a:xfrm>
-            <a:off x="6227064" y="941832"/>
-            <a:ext cx="2456078" cy="959205"/>
+            <a:off x="4745736" y="941832"/>
+            <a:ext cx="1826514" cy="959205"/>
           </a:xfrm>
           <a:prstGeom prst="rect">
             <a:avLst/>
@@ -11135,1971 +11981,27 @@
           <a:lstStyle/>
           <a:p>
             <a:r>
-              <a:rPr lang="en-US" sz="1400" b="1" i="0" dirty="0">
-                <a:solidFill>
-                  <a:srgbClr val="333333"/>
-                </a:solidFill>
-                <a:latin typeface="Segoe UI"/>
-              </a:rPr>
-              <a:t>3. </a:t>
-            </a:r>
-            <a:r>
               <a:rPr lang="ja-JP" sz="1400" b="1" i="0" dirty="0">
                 <a:solidFill>
                   <a:srgbClr val="333333"/>
                 </a:solidFill>
                 <a:ea typeface="Meiryo"/>
               </a:rPr>
-              <a:t>近傍</a:t>
-            </a:r>
-          </a:p>
-        </p:txBody>
-      </p:sp>
-      <p:sp>
-        <p:nvSpPr>
-          <p:cNvPr id="11" name="Rectangle 10"/>
+              <a:t>禁止操作を明示する</a:t>
+            </a:r>
+          </a:p>
+        </p:txBody>
+      </p:sp>
+      <p:sp>
+        <p:nvSpPr>
+          <p:cNvPr id="11" name="Step11"/>
           <p:cNvSpPr/>
           <p:nvPr/>
         </p:nvSpPr>
         <p:spPr>
           <a:xfrm>
-            <a:off x="164592" y="1974189"/>
-            <a:ext cx="2889504" cy="2638958"/>
-          </a:xfrm>
-          <a:prstGeom prst="rect">
-            <a:avLst/>
-          </a:prstGeom>
-          <a:solidFill>
-            <a:srgbClr val="F5F5F5"/>
-          </a:solidFill>
-          <a:ln w="9525">
-            <a:solidFill>
-              <a:srgbClr val="E0E0E0"/>
-            </a:solidFill>
-          </a:ln>
-          <a:effectLst/>
-        </p:spPr>
-        <p:style>
-          <a:lnRef idx="1">
-            <a:schemeClr val="accent1"/>
-          </a:lnRef>
-          <a:fillRef idx="3">
-            <a:schemeClr val="accent1"/>
-          </a:fillRef>
-          <a:effectRef idx="2">
-            <a:schemeClr val="accent1"/>
-          </a:effectRef>
-          <a:fontRef idx="minor">
-            <a:schemeClr val="lt1"/>
-          </a:fontRef>
-        </p:style>
-        <p:txBody>
-          <a:bodyPr rtlCol="0" anchor="ctr"/>
-          <a:lstStyle/>
-          <a:p>
-            <a:pPr algn="ctr"/>
-          </a:p>
-        </p:txBody>
-      </p:sp>
-      <p:sp>
-        <p:nvSpPr>
-          <p:cNvPr id="12" name="TextBox 11"/>
-          <p:cNvSpPr txBox="1"/>
-          <p:nvPr/>
-        </p:nvSpPr>
-        <p:spPr>
-          <a:xfrm>
-            <a:off x="301751" y="2083917"/>
-            <a:ext cx="2615184" cy="2419502"/>
-          </a:xfrm>
-          <a:prstGeom prst="rect">
-            <a:avLst/>
-          </a:prstGeom>
-          <a:noFill/>
-          <a:effectLst/>
-        </p:spPr>
-        <p:txBody>
-          <a:bodyPr wrap="square" lIns="0" rIns="0" tIns="0" bIns="0">
-            <a:noAutofit/>
-          </a:bodyPr>
-          <a:lstStyle/>
-          <a:p>
-            <a:pPr>
-              <a:spcBef>
-                <a:spcPts val="0"/>
-              </a:spcBef>
-              <a:spcAft>
-                <a:spcPts val="400"/>
-              </a:spcAft>
-              <a:buNone/>
-              <a:lnSpc>
-                <a:spcPts val="1980"/>
-              </a:lnSpc>
-            </a:pPr>
-            <a:r>
-              <a:rPr lang="ja-JP" sz="1100" b="0" i="0" dirty="0">
-                <a:solidFill>
-                  <a:srgbClr val="333333"/>
-                </a:solidFill>
-                <a:ea typeface="Meiryo"/>
-              </a:rPr>
-              <a:t>ルート</a:t>
-            </a:r>
-            <a:r>
-              <a:rPr lang="en-US" sz="1100" b="0" i="0" dirty="0">
-                <a:solidFill>
-                  <a:srgbClr val="333333"/>
-                </a:solidFill>
-                <a:latin typeface="Segoe UI"/>
-              </a:rPr>
-              <a:t>CLAUDE.md</a:t>
-            </a:r>
-            <a:r>
-              <a:rPr lang="ja-JP" sz="1100" b="0" i="0" dirty="0">
-                <a:solidFill>
-                  <a:srgbClr val="333333"/>
-                </a:solidFill>
-                <a:ea typeface="Meiryo"/>
-              </a:rPr>
-              <a:t>に全体原則を置く。</a:t>
-            </a:r>
-          </a:p>
-          <a:p>
-            <a:pPr marL="228600" indent="-228600">
-              <a:spcBef>
-                <a:spcPts val="0"/>
-              </a:spcBef>
-              <a:spcAft>
-                <a:spcPts val="400"/>
-              </a:spcAft>
-              <a:buChar char="•"/>
-              <a:lnSpc>
-                <a:spcPts val="1980"/>
-              </a:lnSpc>
-            </a:pPr>
-            <a:r>
-              <a:rPr lang="ja-JP" sz="1100" b="0" i="0" dirty="0">
-                <a:solidFill>
-                  <a:srgbClr val="333333"/>
-                </a:solidFill>
-                <a:ea typeface="Meiryo"/>
-              </a:rPr>
-              <a:t>安全策、回答言語、検証基準を固定する</a:t>
-            </a:r>
-          </a:p>
-          <a:p>
-            <a:pPr marL="228600" indent="-228600">
-              <a:spcBef>
-                <a:spcPts val="0"/>
-              </a:spcBef>
-              <a:spcAft>
-                <a:spcPts val="400"/>
-              </a:spcAft>
-              <a:buChar char="•"/>
-              <a:lnSpc>
-                <a:spcPts val="1980"/>
-              </a:lnSpc>
-            </a:pPr>
-            <a:r>
-              <a:rPr lang="ja-JP" sz="1100" b="0" i="0" dirty="0">
-                <a:solidFill>
-                  <a:srgbClr val="333333"/>
-                </a:solidFill>
-                <a:ea typeface="Meiryo"/>
-              </a:rPr>
-              <a:t>すべての領域に効くルールだけを残す</a:t>
-            </a:r>
-          </a:p>
-        </p:txBody>
-      </p:sp>
-      <p:sp>
-        <p:nvSpPr>
-          <p:cNvPr id="13" name="Rectangle 12"/>
-          <p:cNvSpPr/>
-          <p:nvPr/>
-        </p:nvSpPr>
-        <p:spPr>
-          <a:xfrm>
-            <a:off x="3127248" y="1974189"/>
-            <a:ext cx="2889504" cy="2638958"/>
-          </a:xfrm>
-          <a:prstGeom prst="rect">
-            <a:avLst/>
-          </a:prstGeom>
-          <a:solidFill>
-            <a:srgbClr val="F5F5F5"/>
-          </a:solidFill>
-          <a:ln w="9525">
-            <a:solidFill>
-              <a:srgbClr val="E0E0E0"/>
-            </a:solidFill>
-          </a:ln>
-          <a:effectLst/>
-        </p:spPr>
-        <p:style>
-          <a:lnRef idx="1">
-            <a:schemeClr val="accent1"/>
-          </a:lnRef>
-          <a:fillRef idx="3">
-            <a:schemeClr val="accent1"/>
-          </a:fillRef>
-          <a:effectRef idx="2">
-            <a:schemeClr val="accent1"/>
-          </a:effectRef>
-          <a:fontRef idx="minor">
-            <a:schemeClr val="lt1"/>
-          </a:fontRef>
-        </p:style>
-        <p:txBody>
-          <a:bodyPr rtlCol="0" anchor="ctr"/>
-          <a:lstStyle/>
-          <a:p>
-            <a:pPr algn="ctr"/>
-          </a:p>
-        </p:txBody>
-      </p:sp>
-      <p:sp>
-        <p:nvSpPr>
-          <p:cNvPr id="14" name="TextBox 13"/>
-          <p:cNvSpPr txBox="1"/>
-          <p:nvPr/>
-        </p:nvSpPr>
-        <p:spPr>
-          <a:xfrm>
-            <a:off x="3264408" y="2083917"/>
-            <a:ext cx="2615184" cy="2419502"/>
-          </a:xfrm>
-          <a:prstGeom prst="rect">
-            <a:avLst/>
-          </a:prstGeom>
-          <a:noFill/>
-          <a:effectLst/>
-        </p:spPr>
-        <p:txBody>
-          <a:bodyPr wrap="square" lIns="0" rIns="0" tIns="0" bIns="0">
-            <a:noAutofit/>
-          </a:bodyPr>
-          <a:lstStyle/>
-          <a:p>
-            <a:pPr>
-              <a:spcBef>
-                <a:spcPts val="0"/>
-              </a:spcBef>
-              <a:spcAft>
-                <a:spcPts val="400"/>
-              </a:spcAft>
-              <a:buNone/>
-              <a:lnSpc>
-                <a:spcPts val="1980"/>
-              </a:lnSpc>
-            </a:pPr>
-            <a:r>
-              <a:rPr lang="ja-JP" sz="1100" b="0" i="0" dirty="0">
-                <a:solidFill>
-                  <a:srgbClr val="333333"/>
-                </a:solidFill>
-                <a:ea typeface="Meiryo"/>
-              </a:rPr>
-              <a:t>領域別のルールへ分ける。</a:t>
-            </a:r>
-          </a:p>
-          <a:p>
-            <a:pPr marL="228600" indent="-228600">
-              <a:spcBef>
-                <a:spcPts val="0"/>
-              </a:spcBef>
-              <a:spcAft>
-                <a:spcPts val="400"/>
-              </a:spcAft>
-              <a:buChar char="•"/>
-              <a:lnSpc>
-                <a:spcPts val="1980"/>
-              </a:lnSpc>
-            </a:pPr>
-            <a:r>
-              <a:rPr lang="en-US" sz="1100" b="0" i="0" dirty="0">
-                <a:solidFill>
-                  <a:srgbClr val="333333"/>
-                </a:solidFill>
-                <a:latin typeface="Segoe UI"/>
-              </a:rPr>
-              <a:t>UI</a:t>
-            </a:r>
-            <a:r>
-              <a:rPr lang="ja-JP" sz="1100" b="0" i="0" dirty="0">
-                <a:solidFill>
-                  <a:srgbClr val="333333"/>
-                </a:solidFill>
-                <a:ea typeface="Meiryo"/>
-              </a:rPr>
-              <a:t>なら</a:t>
-            </a:r>
-            <a:r>
-              <a:rPr lang="en-US" sz="1100" b="0" i="0" dirty="0">
-                <a:solidFill>
-                  <a:srgbClr val="333333"/>
-                </a:solidFill>
-                <a:latin typeface="Segoe UI"/>
-              </a:rPr>
-              <a:t>frontend.md</a:t>
-            </a:r>
-            <a:r>
-              <a:rPr lang="ja-JP" sz="1100" b="0" i="0" dirty="0">
-                <a:solidFill>
-                  <a:srgbClr val="333333"/>
-                </a:solidFill>
-                <a:ea typeface="Meiryo"/>
-              </a:rPr>
-              <a:t>に寄せる</a:t>
-            </a:r>
-          </a:p>
-          <a:p>
-            <a:pPr marL="228600" indent="-228600">
-              <a:spcBef>
-                <a:spcPts val="0"/>
-              </a:spcBef>
-              <a:spcAft>
-                <a:spcPts val="400"/>
-              </a:spcAft>
-              <a:buChar char="•"/>
-              <a:lnSpc>
-                <a:spcPts val="1980"/>
-              </a:lnSpc>
-            </a:pPr>
-            <a:r>
-              <a:rPr lang="ja-JP" sz="1100" b="0" i="0" dirty="0">
-                <a:solidFill>
-                  <a:srgbClr val="333333"/>
-                </a:solidFill>
-                <a:ea typeface="Meiryo"/>
-              </a:rPr>
-              <a:t>スクリプトやインフラは</a:t>
-            </a:r>
-            <a:r>
-              <a:rPr lang="en-US" sz="1100" b="0" i="0" dirty="0">
-                <a:solidFill>
-                  <a:srgbClr val="333333"/>
-                </a:solidFill>
-                <a:latin typeface="Segoe UI"/>
-              </a:rPr>
-              <a:t>infra.md</a:t>
-            </a:r>
-            <a:r>
-              <a:rPr lang="ja-JP" sz="1100" b="0" i="0" dirty="0">
-                <a:solidFill>
-                  <a:srgbClr val="333333"/>
-                </a:solidFill>
-                <a:ea typeface="Meiryo"/>
-              </a:rPr>
-              <a:t>に寄せる</a:t>
-            </a:r>
-          </a:p>
-        </p:txBody>
-      </p:sp>
-      <p:sp>
-        <p:nvSpPr>
-          <p:cNvPr id="15" name="Rectangle 14"/>
-          <p:cNvSpPr/>
-          <p:nvPr/>
-        </p:nvSpPr>
-        <p:spPr>
-          <a:xfrm>
-            <a:off x="6089904" y="1974189"/>
-            <a:ext cx="2889504" cy="2638958"/>
-          </a:xfrm>
-          <a:prstGeom prst="rect">
-            <a:avLst/>
-          </a:prstGeom>
-          <a:solidFill>
-            <a:srgbClr val="F5F5F5"/>
-          </a:solidFill>
-          <a:ln w="9525">
-            <a:solidFill>
-              <a:srgbClr val="E0E0E0"/>
-            </a:solidFill>
-          </a:ln>
-          <a:effectLst/>
-        </p:spPr>
-        <p:style>
-          <a:lnRef idx="1">
-            <a:schemeClr val="accent1"/>
-          </a:lnRef>
-          <a:fillRef idx="3">
-            <a:schemeClr val="accent1"/>
-          </a:fillRef>
-          <a:effectRef idx="2">
-            <a:schemeClr val="accent1"/>
-          </a:effectRef>
-          <a:fontRef idx="minor">
-            <a:schemeClr val="lt1"/>
-          </a:fontRef>
-        </p:style>
-        <p:txBody>
-          <a:bodyPr rtlCol="0" anchor="ctr"/>
-          <a:lstStyle/>
-          <a:p>
-            <a:pPr algn="ctr"/>
-          </a:p>
-        </p:txBody>
-      </p:sp>
-      <p:sp>
-        <p:nvSpPr>
-          <p:cNvPr id="16" name="TextBox 15"/>
-          <p:cNvSpPr txBox="1"/>
-          <p:nvPr/>
-        </p:nvSpPr>
-        <p:spPr>
-          <a:xfrm>
-            <a:off x="6227064" y="2083917"/>
-            <a:ext cx="2615184" cy="2419502"/>
-          </a:xfrm>
-          <a:prstGeom prst="rect">
-            <a:avLst/>
-          </a:prstGeom>
-          <a:noFill/>
-          <a:effectLst/>
-        </p:spPr>
-        <p:txBody>
-          <a:bodyPr wrap="square" lIns="0" rIns="0" tIns="0" bIns="0">
-            <a:noAutofit/>
-          </a:bodyPr>
-          <a:lstStyle/>
-          <a:p>
-            <a:pPr>
-              <a:spcBef>
-                <a:spcPts val="0"/>
-              </a:spcBef>
-              <a:spcAft>
-                <a:spcPts val="400"/>
-              </a:spcAft>
-              <a:buNone/>
-              <a:lnSpc>
-                <a:spcPts val="1980"/>
-              </a:lnSpc>
-            </a:pPr>
-            <a:r>
-              <a:rPr lang="ja-JP" sz="1100" b="0" i="0" dirty="0">
-                <a:solidFill>
-                  <a:srgbClr val="333333"/>
-                </a:solidFill>
-                <a:ea typeface="Meiryo"/>
-              </a:rPr>
-              <a:t>作業対象に近いルールを優先する。</a:t>
-            </a:r>
-          </a:p>
-          <a:p>
-            <a:pPr marL="228600" indent="-228600">
-              <a:spcBef>
-                <a:spcPts val="0"/>
-              </a:spcBef>
-              <a:spcAft>
-                <a:spcPts val="400"/>
-              </a:spcAft>
-              <a:buChar char="•"/>
-              <a:lnSpc>
-                <a:spcPts val="1980"/>
-              </a:lnSpc>
-            </a:pPr>
-            <a:r>
-              <a:rPr lang="ja-JP" sz="1100" b="0" i="0" dirty="0">
-                <a:solidFill>
-                  <a:srgbClr val="333333"/>
-                </a:solidFill>
-                <a:ea typeface="Meiryo"/>
-              </a:rPr>
-              <a:t>関係ない制約の干渉を避ける</a:t>
-            </a:r>
-          </a:p>
-          <a:p>
-            <a:pPr marL="228600" indent="-228600">
-              <a:spcBef>
-                <a:spcPts val="0"/>
-              </a:spcBef>
-              <a:spcAft>
-                <a:spcPts val="400"/>
-              </a:spcAft>
-              <a:buChar char="•"/>
-              <a:lnSpc>
-                <a:spcPts val="1980"/>
-              </a:lnSpc>
-            </a:pPr>
-            <a:r>
-              <a:rPr lang="ja-JP" sz="1100" b="0" i="0" dirty="0">
-                <a:solidFill>
-                  <a:srgbClr val="333333"/>
-                </a:solidFill>
-                <a:ea typeface="Meiryo"/>
-              </a:rPr>
-              <a:t>読む量を減らし判断速度を上げる</a:t>
-            </a:r>
-          </a:p>
-        </p:txBody>
-      </p:sp>
-      <p:sp>
-        <p:nvSpPr>
-          <p:cNvPr id="17" name="Rectangle 16"/>
-          <p:cNvSpPr/>
-          <p:nvPr/>
-        </p:nvSpPr>
-        <p:spPr>
-          <a:xfrm>
-            <a:off x="0" y="4777740"/>
-            <a:ext cx="9144000" cy="9525"/>
-          </a:xfrm>
-          <a:prstGeom prst="rect">
-            <a:avLst/>
-          </a:prstGeom>
-          <a:solidFill>
-            <a:srgbClr val="E0E0E0"/>
-          </a:solidFill>
-          <a:ln>
-            <a:noFill/>
-          </a:ln>
-          <a:effectLst/>
-        </p:spPr>
-        <p:style>
-          <a:lnRef idx="1">
-            <a:schemeClr val="accent1"/>
-          </a:lnRef>
-          <a:fillRef idx="3">
-            <a:schemeClr val="accent1"/>
-          </a:fillRef>
-          <a:effectRef idx="2">
-            <a:schemeClr val="accent1"/>
-          </a:effectRef>
-          <a:fontRef idx="minor">
-            <a:schemeClr val="lt1"/>
-          </a:fontRef>
-        </p:style>
-        <p:txBody>
-          <a:bodyPr rtlCol="0" anchor="ctr"/>
-          <a:lstStyle/>
-          <a:p>
-            <a:pPr algn="ctr"/>
-          </a:p>
-        </p:txBody>
-      </p:sp>
-      <p:sp>
-        <p:nvSpPr>
-          <p:cNvPr id="18" name="TextBox 17"/>
-          <p:cNvSpPr txBox="1"/>
-          <p:nvPr/>
-        </p:nvSpPr>
-        <p:spPr>
-          <a:xfrm>
-            <a:off x="228600" y="4823459"/>
-            <a:ext cx="1828800" cy="274320"/>
-          </a:xfrm>
-          <a:prstGeom prst="rect">
-            <a:avLst/>
-          </a:prstGeom>
-          <a:noFill/>
-        </p:spPr>
-        <p:txBody>
-          <a:bodyPr wrap="none" anchor="ctr" lIns="0" rIns="0" tIns="0" bIns="0">
-            <a:spAutoFit/>
-          </a:bodyPr>
-          <a:lstStyle/>
-          <a:p>
-            <a:fld id="{B527DC13-D241-4E78-8805-DE44463528D5}" type="slidenum">
-              <a:rPr lang="ja-JP" smtClean="0" sz="1000">
-                <a:solidFill>
-                  <a:srgbClr val="888888"/>
-                </a:solidFill>
-              </a:rPr>
-              <a:t>&lt;#&gt;</a:t>
-            </a:fld>
-            <a:r>
-              <a:rPr lang="ja-JP" smtClean="0" sz="1000">
-                <a:solidFill>
-                  <a:srgbClr val="888888"/>
-                </a:solidFill>
-              </a:rPr>
-              <a:t>/</a:t>
-            </a:r>
-            <a:fld id="{94D94019-38C3-49D4-B5D5-890FE3E6CAA2}" type="slidecount">
-              <a:rPr lang="ja-JP" smtClean="0" sz="1000">
-                <a:solidFill>
-                  <a:srgbClr val="888888"/>
-                </a:solidFill>
-              </a:rPr>
-              <a:t>10</a:t>
-            </a:fld>
-          </a:p>
-        </p:txBody>
-      </p:sp>
-      <p:pic>
-        <p:nvPicPr>
-          <p:cNvPr id="19" name="Picture 18" descr="logo.png"/>
-          <p:cNvPicPr>
-            <a:picLocks noChangeAspect="1"/>
-          </p:cNvPicPr>
-          <p:nvPr/>
-        </p:nvPicPr>
-        <p:blipFill>
-          <a:blip r:embed="rId2"/>
-          <a:stretch>
-            <a:fillRect/>
-          </a:stretch>
-        </p:blipFill>
-        <p:spPr>
-          <a:xfrm>
-            <a:off x="8001000" y="4846320"/>
-            <a:ext cx="762000" cy="228600"/>
-          </a:xfrm>
-          <a:prstGeom prst="rect">
-            <a:avLst/>
-          </a:prstGeom>
-          <a:effectLst/>
-        </p:spPr>
-      </p:pic>
-    </p:spTree>
-  </p:cSld>
-  <p:clrMapOvr>
-    <a:masterClrMapping/>
-  </p:clrMapOvr>
-</p:sld>
-</file>
-
-<file path=ppt/slides/slide8.xml><?xml version="1.0" encoding="utf-8"?>
-<p:sld xmlns:a="http://schemas.openxmlformats.org/drawingml/2006/main" xmlns:p="http://schemas.openxmlformats.org/presentationml/2006/main" xmlns:r="http://schemas.openxmlformats.org/officeDocument/2006/relationships">
-  <p:cSld>
-    <p:bg>
-      <p:bgPr>
-        <a:solidFill>
-          <a:srgbClr val="FFFFFF"/>
-        </a:solidFill>
-        <a:effectLst/>
-      </p:bgPr>
-    </p:bg>
-    <p:spTree>
-      <p:nvGrpSpPr>
-        <p:cNvPr id="1" name=""/>
-        <p:cNvGrpSpPr/>
-        <p:nvPr/>
-      </p:nvGrpSpPr>
-      <p:grpSpPr/>
-      <p:sp>
-        <p:nvSpPr>
-          <p:cNvPr id="2" name="Rectangle 1"/>
-          <p:cNvSpPr/>
-          <p:nvPr/>
-        </p:nvSpPr>
-        <p:spPr>
-          <a:xfrm>
-            <a:off x="0" y="0"/>
-            <a:ext cx="9144000" cy="777240"/>
-          </a:xfrm>
-          <a:prstGeom prst="rect">
-            <a:avLst/>
-          </a:prstGeom>
-          <a:solidFill>
-            <a:srgbClr val="4A4A4A"/>
-          </a:solidFill>
-          <a:ln>
-            <a:noFill/>
-          </a:ln>
-          <a:effectLst/>
-        </p:spPr>
-        <p:style>
-          <a:lnRef idx="1">
-            <a:schemeClr val="accent1"/>
-          </a:lnRef>
-          <a:fillRef idx="3">
-            <a:schemeClr val="accent1"/>
-          </a:fillRef>
-          <a:effectRef idx="2">
-            <a:schemeClr val="accent1"/>
-          </a:effectRef>
-          <a:fontRef idx="minor">
-            <a:schemeClr val="lt1"/>
-          </a:fontRef>
-        </p:style>
-        <p:txBody>
-          <a:bodyPr rtlCol="0" anchor="ctr"/>
-          <a:lstStyle/>
-          <a:p>
-            <a:pPr algn="ctr"/>
-          </a:p>
-        </p:txBody>
-      </p:sp>
-      <p:sp>
-        <p:nvSpPr>
-          <p:cNvPr id="3" name="TextBox 2"/>
-          <p:cNvSpPr txBox="1"/>
-          <p:nvPr/>
-        </p:nvSpPr>
-        <p:spPr>
-          <a:xfrm>
-            <a:off x="228600" y="85039"/>
-            <a:ext cx="8686800" cy="411480"/>
-          </a:xfrm>
-          <a:prstGeom prst="rect">
-            <a:avLst/>
-          </a:prstGeom>
-          <a:noFill/>
-          <a:effectLst/>
-        </p:spPr>
-        <p:txBody>
-          <a:bodyPr wrap="square" lIns="0" rIns="0" tIns="0" bIns="0" anchor="ctr">
-            <a:noAutofit/>
-          </a:bodyPr>
-          <a:lstStyle/>
-          <a:p>
-            <a:r>
-              <a:rPr lang="ja-JP" sz="2400" b="1" i="0" dirty="0">
-                <a:solidFill>
-                  <a:srgbClr val="FFFFFF"/>
-                </a:solidFill>
-                <a:ea typeface="Meiryo"/>
-              </a:rPr>
-              <a:t>用途別テンプレートで現場差分を吸収する</a:t>
-            </a:r>
-          </a:p>
-        </p:txBody>
-      </p:sp>
-      <p:sp>
-        <p:nvSpPr>
-          <p:cNvPr id="4" name="TextBox 3"/>
-          <p:cNvSpPr txBox="1"/>
-          <p:nvPr/>
-        </p:nvSpPr>
-        <p:spPr>
-          <a:xfrm>
-            <a:off x="228600" y="523036"/>
-            <a:ext cx="8686800" cy="274320"/>
-          </a:xfrm>
-          <a:prstGeom prst="rect">
-            <a:avLst/>
-          </a:prstGeom>
-          <a:noFill/>
-          <a:effectLst/>
-        </p:spPr>
-        <p:txBody>
-          <a:bodyPr wrap="square" lIns="0" rIns="0" tIns="0" bIns="0" anchor="ctr">
-            <a:noAutofit/>
-          </a:bodyPr>
-          <a:lstStyle/>
-          <a:p>
-            <a:r>
-              <a:rPr lang="en-US" sz="1200" b="0" i="0" dirty="0">
-                <a:solidFill>
-                  <a:srgbClr val="FFFFFF"/>
-                </a:solidFill>
-                <a:latin typeface="Segoe UI"/>
-              </a:rPr>
-              <a:t>Web</a:t>
-            </a:r>
-            <a:r>
-              <a:rPr lang="ja-JP" sz="1200" b="0" i="0" dirty="0">
-                <a:solidFill>
-                  <a:srgbClr val="FFFFFF"/>
-                </a:solidFill>
-                <a:ea typeface="Meiryo"/>
-              </a:rPr>
-              <a:t>、分析、自動化では失敗しやすい場所が違う</a:t>
-            </a:r>
-          </a:p>
-        </p:txBody>
-      </p:sp>
-      <p:sp>
-        <p:nvSpPr>
-          <p:cNvPr id="5" name="Rectangle 4"/>
-          <p:cNvSpPr/>
-          <p:nvPr/>
-        </p:nvSpPr>
-        <p:spPr>
-          <a:xfrm>
-            <a:off x="164592" y="941832"/>
-            <a:ext cx="2889504" cy="3671315"/>
-          </a:xfrm>
-          <a:prstGeom prst="rect">
-            <a:avLst/>
-          </a:prstGeom>
-          <a:solidFill>
-            <a:srgbClr val="F5F5F5"/>
-          </a:solidFill>
-          <a:ln w="9525">
-            <a:solidFill>
-              <a:srgbClr val="E0E0E0"/>
-            </a:solidFill>
-          </a:ln>
-          <a:effectLst/>
-        </p:spPr>
-        <p:style>
-          <a:lnRef idx="1">
-            <a:schemeClr val="accent1"/>
-          </a:lnRef>
-          <a:fillRef idx="3">
-            <a:schemeClr val="accent1"/>
-          </a:fillRef>
-          <a:effectRef idx="2">
-            <a:schemeClr val="accent1"/>
-          </a:effectRef>
-          <a:fontRef idx="minor">
-            <a:schemeClr val="lt1"/>
-          </a:fontRef>
-        </p:style>
-        <p:txBody>
-          <a:bodyPr rtlCol="0" anchor="ctr"/>
-          <a:lstStyle/>
-          <a:p>
-            <a:pPr algn="ctr"/>
-          </a:p>
-        </p:txBody>
-      </p:sp>
-      <p:sp>
-        <p:nvSpPr>
-          <p:cNvPr id="6" name="TextBox 5"/>
-          <p:cNvSpPr txBox="1"/>
-          <p:nvPr/>
-        </p:nvSpPr>
-        <p:spPr>
-          <a:xfrm>
-            <a:off x="301751" y="1051560"/>
-            <a:ext cx="2615184" cy="320040"/>
-          </a:xfrm>
-          <a:prstGeom prst="rect">
-            <a:avLst/>
-          </a:prstGeom>
-          <a:noFill/>
-          <a:effectLst/>
-        </p:spPr>
-        <p:txBody>
-          <a:bodyPr wrap="square" lIns="0" rIns="0" tIns="0" bIns="0" anchor="t">
-            <a:noAutofit/>
-          </a:bodyPr>
-          <a:lstStyle/>
-          <a:p>
-            <a:r>
-              <a:rPr lang="en-US" sz="1400" b="1" i="0" dirty="0">
-                <a:solidFill>
-                  <a:srgbClr val="333333"/>
-                </a:solidFill>
-                <a:latin typeface="Segoe UI"/>
-              </a:rPr>
-              <a:t>Web</a:t>
-            </a:r>
-            <a:r>
-              <a:rPr lang="ja-JP" sz="1400" b="1" i="0" dirty="0">
-                <a:solidFill>
-                  <a:srgbClr val="333333"/>
-                </a:solidFill>
-                <a:ea typeface="Meiryo"/>
-              </a:rPr>
-              <a:t>アプリ</a:t>
-            </a:r>
-          </a:p>
-        </p:txBody>
-      </p:sp>
-      <p:sp>
-        <p:nvSpPr>
-          <p:cNvPr id="7" name="Rectangle 6"/>
-          <p:cNvSpPr/>
-          <p:nvPr/>
-        </p:nvSpPr>
-        <p:spPr>
-          <a:xfrm>
-            <a:off x="301751" y="1307592"/>
-            <a:ext cx="2615184" cy="12700"/>
-          </a:xfrm>
-          <a:prstGeom prst="rect">
-            <a:avLst/>
-          </a:prstGeom>
-          <a:solidFill>
-            <a:srgbClr val="E0E0E0"/>
-          </a:solidFill>
-          <a:ln>
-            <a:noFill/>
-          </a:ln>
-          <a:effectLst/>
-        </p:spPr>
-        <p:style>
-          <a:lnRef idx="1">
-            <a:schemeClr val="accent1"/>
-          </a:lnRef>
-          <a:fillRef idx="3">
-            <a:schemeClr val="accent1"/>
-          </a:fillRef>
-          <a:effectRef idx="2">
-            <a:schemeClr val="accent1"/>
-          </a:effectRef>
-          <a:fontRef idx="minor">
-            <a:schemeClr val="lt1"/>
-          </a:fontRef>
-        </p:style>
-        <p:txBody>
-          <a:bodyPr rtlCol="0" anchor="ctr"/>
-          <a:lstStyle/>
-          <a:p>
-            <a:pPr algn="ctr"/>
-          </a:p>
-        </p:txBody>
-      </p:sp>
-      <p:sp>
-        <p:nvSpPr>
-          <p:cNvPr id="8" name="TextBox 7"/>
-          <p:cNvSpPr txBox="1"/>
-          <p:nvPr/>
-        </p:nvSpPr>
-        <p:spPr>
-          <a:xfrm>
-            <a:off x="301751" y="1380744"/>
-            <a:ext cx="2615184" cy="3122675"/>
-          </a:xfrm>
-          <a:prstGeom prst="rect">
-            <a:avLst/>
-          </a:prstGeom>
-          <a:noFill/>
-          <a:effectLst/>
-        </p:spPr>
-        <p:txBody>
-          <a:bodyPr wrap="square" lIns="0" rIns="0" tIns="0" bIns="0">
-            <a:noAutofit/>
-          </a:bodyPr>
-          <a:lstStyle/>
-          <a:p>
-            <a:pPr>
-              <a:spcBef>
-                <a:spcPts val="0"/>
-              </a:spcBef>
-              <a:spcAft>
-                <a:spcPts val="400"/>
-              </a:spcAft>
-              <a:buNone/>
-              <a:lnSpc>
-                <a:spcPts val="1980"/>
-              </a:lnSpc>
-            </a:pPr>
-            <a:r>
-              <a:rPr lang="en-US" sz="1100" b="0" i="0" dirty="0">
-                <a:solidFill>
-                  <a:srgbClr val="333333"/>
-                </a:solidFill>
-                <a:latin typeface="Segoe UI"/>
-              </a:rPr>
-              <a:t>UI</a:t>
-            </a:r>
-            <a:r>
-              <a:rPr lang="ja-JP" sz="1100" b="0" i="0" dirty="0">
-                <a:solidFill>
-                  <a:srgbClr val="333333"/>
-                </a:solidFill>
-                <a:ea typeface="Meiryo"/>
-              </a:rPr>
-              <a:t>と状態管理の選択を固定する領域である。</a:t>
-            </a:r>
-          </a:p>
-          <a:p>
-            <a:pPr marL="228600" indent="-228600">
-              <a:spcBef>
-                <a:spcPts val="0"/>
-              </a:spcBef>
-              <a:spcAft>
-                <a:spcPts val="400"/>
-              </a:spcAft>
-              <a:buChar char="•"/>
-              <a:lnSpc>
-                <a:spcPts val="1980"/>
-              </a:lnSpc>
-            </a:pPr>
-            <a:r>
-              <a:rPr lang="en-US" sz="1100" b="0" i="0" dirty="0">
-                <a:solidFill>
-                  <a:srgbClr val="333333"/>
-                </a:solidFill>
-                <a:latin typeface="Segoe UI"/>
-              </a:rPr>
-              <a:t>CSS</a:t>
-            </a:r>
-            <a:r>
-              <a:rPr lang="ja-JP" sz="1100" b="0" i="0" dirty="0">
-                <a:solidFill>
-                  <a:srgbClr val="333333"/>
-                </a:solidFill>
-                <a:ea typeface="Meiryo"/>
-              </a:rPr>
-              <a:t>や</a:t>
-            </a:r>
-            <a:r>
-              <a:rPr lang="en-US" sz="1100" b="0" i="0" dirty="0">
-                <a:solidFill>
-                  <a:srgbClr val="333333"/>
-                </a:solidFill>
-                <a:latin typeface="Segoe UI"/>
-              </a:rPr>
-              <a:t>UI</a:t>
-            </a:r>
-            <a:r>
-              <a:rPr lang="ja-JP" sz="1100" b="0" i="0" dirty="0">
-                <a:solidFill>
-                  <a:srgbClr val="333333"/>
-                </a:solidFill>
-                <a:ea typeface="Meiryo"/>
-              </a:rPr>
-              <a:t>ライブラリの採用基準を明示する</a:t>
-            </a:r>
-          </a:p>
-          <a:p>
-            <a:pPr marL="228600" indent="-228600">
-              <a:spcBef>
-                <a:spcPts val="0"/>
-              </a:spcBef>
-              <a:spcAft>
-                <a:spcPts val="400"/>
-              </a:spcAft>
-              <a:buChar char="•"/>
-              <a:lnSpc>
-                <a:spcPts val="1980"/>
-              </a:lnSpc>
-            </a:pPr>
-            <a:r>
-              <a:rPr lang="en-US" sz="1100" b="0" i="0" dirty="0">
-                <a:solidFill>
-                  <a:srgbClr val="333333"/>
-                </a:solidFill>
-                <a:latin typeface="Segoe UI"/>
-              </a:rPr>
-              <a:t>API</a:t>
-            </a:r>
-            <a:r>
-              <a:rPr lang="ja-JP" sz="1100" b="0" i="0" dirty="0">
-                <a:solidFill>
-                  <a:srgbClr val="333333"/>
-                </a:solidFill>
-                <a:ea typeface="Meiryo"/>
-              </a:rPr>
-              <a:t>呼び出しの配置を決める</a:t>
-            </a:r>
-          </a:p>
-          <a:p>
-            <a:pPr marL="228600" indent="-228600">
-              <a:spcBef>
-                <a:spcPts val="0"/>
-              </a:spcBef>
-              <a:spcAft>
-                <a:spcPts val="400"/>
-              </a:spcAft>
-              <a:buChar char="•"/>
-              <a:lnSpc>
-                <a:spcPts val="1980"/>
-              </a:lnSpc>
-            </a:pPr>
-            <a:r>
-              <a:rPr lang="ja-JP" sz="1100" b="0" i="0" dirty="0">
-                <a:solidFill>
-                  <a:srgbClr val="333333"/>
-                </a:solidFill>
-                <a:ea typeface="Meiryo"/>
-              </a:rPr>
-              <a:t>禁止ライブラリを先に書く</a:t>
-            </a:r>
-          </a:p>
-        </p:txBody>
-      </p:sp>
-      <p:sp>
-        <p:nvSpPr>
-          <p:cNvPr id="9" name="Rectangle 8"/>
-          <p:cNvSpPr/>
-          <p:nvPr/>
-        </p:nvSpPr>
-        <p:spPr>
-          <a:xfrm>
-            <a:off x="3127248" y="941832"/>
-            <a:ext cx="2889504" cy="3671315"/>
-          </a:xfrm>
-          <a:prstGeom prst="rect">
-            <a:avLst/>
-          </a:prstGeom>
-          <a:solidFill>
-            <a:srgbClr val="F5F5F5"/>
-          </a:solidFill>
-          <a:ln w="9525">
-            <a:solidFill>
-              <a:srgbClr val="E0E0E0"/>
-            </a:solidFill>
-          </a:ln>
-          <a:effectLst/>
-        </p:spPr>
-        <p:style>
-          <a:lnRef idx="1">
-            <a:schemeClr val="accent1"/>
-          </a:lnRef>
-          <a:fillRef idx="3">
-            <a:schemeClr val="accent1"/>
-          </a:fillRef>
-          <a:effectRef idx="2">
-            <a:schemeClr val="accent1"/>
-          </a:effectRef>
-          <a:fontRef idx="minor">
-            <a:schemeClr val="lt1"/>
-          </a:fontRef>
-        </p:style>
-        <p:txBody>
-          <a:bodyPr rtlCol="0" anchor="ctr"/>
-          <a:lstStyle/>
-          <a:p>
-            <a:pPr algn="ctr"/>
-          </a:p>
-        </p:txBody>
-      </p:sp>
-      <p:sp>
-        <p:nvSpPr>
-          <p:cNvPr id="10" name="TextBox 9"/>
-          <p:cNvSpPr txBox="1"/>
-          <p:nvPr/>
-        </p:nvSpPr>
-        <p:spPr>
-          <a:xfrm>
-            <a:off x="3264408" y="1051560"/>
-            <a:ext cx="2615184" cy="320040"/>
-          </a:xfrm>
-          <a:prstGeom prst="rect">
-            <a:avLst/>
-          </a:prstGeom>
-          <a:noFill/>
-          <a:effectLst/>
-        </p:spPr>
-        <p:txBody>
-          <a:bodyPr wrap="square" lIns="0" rIns="0" tIns="0" bIns="0" anchor="t">
-            <a:noAutofit/>
-          </a:bodyPr>
-          <a:lstStyle/>
-          <a:p>
-            <a:r>
-              <a:rPr lang="ja-JP" sz="1400" b="1" i="0" dirty="0">
-                <a:solidFill>
-                  <a:srgbClr val="333333"/>
-                </a:solidFill>
-                <a:ea typeface="Meiryo"/>
-              </a:rPr>
-              <a:t>データ分析</a:t>
-            </a:r>
-          </a:p>
-        </p:txBody>
-      </p:sp>
-      <p:sp>
-        <p:nvSpPr>
-          <p:cNvPr id="11" name="Rectangle 10"/>
-          <p:cNvSpPr/>
-          <p:nvPr/>
-        </p:nvSpPr>
-        <p:spPr>
-          <a:xfrm>
-            <a:off x="3264408" y="1307592"/>
-            <a:ext cx="2615184" cy="12700"/>
-          </a:xfrm>
-          <a:prstGeom prst="rect">
-            <a:avLst/>
-          </a:prstGeom>
-          <a:solidFill>
-            <a:srgbClr val="E0E0E0"/>
-          </a:solidFill>
-          <a:ln>
-            <a:noFill/>
-          </a:ln>
-          <a:effectLst/>
-        </p:spPr>
-        <p:style>
-          <a:lnRef idx="1">
-            <a:schemeClr val="accent1"/>
-          </a:lnRef>
-          <a:fillRef idx="3">
-            <a:schemeClr val="accent1"/>
-          </a:fillRef>
-          <a:effectRef idx="2">
-            <a:schemeClr val="accent1"/>
-          </a:effectRef>
-          <a:fontRef idx="minor">
-            <a:schemeClr val="lt1"/>
-          </a:fontRef>
-        </p:style>
-        <p:txBody>
-          <a:bodyPr rtlCol="0" anchor="ctr"/>
-          <a:lstStyle/>
-          <a:p>
-            <a:pPr algn="ctr"/>
-          </a:p>
-        </p:txBody>
-      </p:sp>
-      <p:sp>
-        <p:nvSpPr>
-          <p:cNvPr id="12" name="TextBox 11"/>
-          <p:cNvSpPr txBox="1"/>
-          <p:nvPr/>
-        </p:nvSpPr>
-        <p:spPr>
-          <a:xfrm>
-            <a:off x="3264408" y="1380744"/>
-            <a:ext cx="2615184" cy="3122675"/>
-          </a:xfrm>
-          <a:prstGeom prst="rect">
-            <a:avLst/>
-          </a:prstGeom>
-          <a:noFill/>
-          <a:effectLst/>
-        </p:spPr>
-        <p:txBody>
-          <a:bodyPr wrap="square" lIns="0" rIns="0" tIns="0" bIns="0">
-            <a:noAutofit/>
-          </a:bodyPr>
-          <a:lstStyle/>
-          <a:p>
-            <a:pPr>
-              <a:spcBef>
-                <a:spcPts val="0"/>
-              </a:spcBef>
-              <a:spcAft>
-                <a:spcPts val="400"/>
-              </a:spcAft>
-              <a:buNone/>
-              <a:lnSpc>
-                <a:spcPts val="1980"/>
-              </a:lnSpc>
-            </a:pPr>
-            <a:r>
-              <a:rPr lang="ja-JP" sz="1100" b="0" i="0" dirty="0">
-                <a:solidFill>
-                  <a:srgbClr val="333333"/>
-                </a:solidFill>
-                <a:ea typeface="Meiryo"/>
-              </a:rPr>
-              <a:t>再現性と保存場所が品質を左右する。</a:t>
-            </a:r>
-          </a:p>
-          <a:p>
-            <a:pPr marL="228600" indent="-228600">
-              <a:spcBef>
-                <a:spcPts val="0"/>
-              </a:spcBef>
-              <a:spcAft>
-                <a:spcPts val="400"/>
-              </a:spcAft>
-              <a:buChar char="•"/>
-              <a:lnSpc>
-                <a:spcPts val="1980"/>
-              </a:lnSpc>
-            </a:pPr>
-            <a:r>
-              <a:rPr lang="en-US" sz="1100" b="0" i="0" dirty="0">
-                <a:solidFill>
-                  <a:srgbClr val="333333"/>
-                </a:solidFill>
-                <a:latin typeface="Consolas"/>
-              </a:rPr>
-              <a:t>data/raw</a:t>
-            </a:r>
-            <a:r>
-              <a:rPr lang="en-US" sz="1100" b="0" i="0" dirty="0">
-                <a:solidFill>
-                  <a:srgbClr val="333333"/>
-                </a:solidFill>
-                <a:latin typeface="Segoe UI"/>
-              </a:rPr>
-              <a:t> </a:t>
-            </a:r>
-            <a:r>
-              <a:rPr lang="ja-JP" sz="1100" b="0" i="0" dirty="0">
-                <a:solidFill>
-                  <a:srgbClr val="333333"/>
-                </a:solidFill>
-                <a:ea typeface="Meiryo"/>
-              </a:rPr>
-              <a:t>と</a:t>
-            </a:r>
-            <a:r>
-              <a:rPr lang="en-US" sz="1100" b="0" i="0" dirty="0">
-                <a:solidFill>
-                  <a:srgbClr val="333333"/>
-                </a:solidFill>
-                <a:latin typeface="Segoe UI"/>
-              </a:rPr>
-              <a:t> </a:t>
-            </a:r>
-            <a:r>
-              <a:rPr lang="en-US" sz="1100" b="0" i="0" dirty="0">
-                <a:solidFill>
-                  <a:srgbClr val="333333"/>
-                </a:solidFill>
-                <a:latin typeface="Consolas"/>
-              </a:rPr>
-              <a:t>data/processed</a:t>
-            </a:r>
-            <a:r>
-              <a:rPr lang="en-US" sz="1100" b="0" i="0" dirty="0">
-                <a:solidFill>
-                  <a:srgbClr val="333333"/>
-                </a:solidFill>
-                <a:latin typeface="Segoe UI"/>
-              </a:rPr>
-              <a:t> </a:t>
-            </a:r>
-            <a:r>
-              <a:rPr lang="ja-JP" sz="1100" b="0" i="0" dirty="0">
-                <a:solidFill>
-                  <a:srgbClr val="333333"/>
-                </a:solidFill>
-                <a:ea typeface="Meiryo"/>
-              </a:rPr>
-              <a:t>を分ける</a:t>
-            </a:r>
-          </a:p>
-          <a:p>
-            <a:pPr marL="228600" indent="-228600">
-              <a:spcBef>
-                <a:spcPts val="0"/>
-              </a:spcBef>
-              <a:spcAft>
-                <a:spcPts val="400"/>
-              </a:spcAft>
-              <a:buChar char="•"/>
-              <a:lnSpc>
-                <a:spcPts val="1980"/>
-              </a:lnSpc>
-            </a:pPr>
-            <a:r>
-              <a:rPr lang="ja-JP" sz="1100" b="0" i="0" dirty="0">
-                <a:solidFill>
-                  <a:srgbClr val="333333"/>
-                </a:solidFill>
-                <a:ea typeface="Meiryo"/>
-              </a:rPr>
-              <a:t>ランダムシードを固定する</a:t>
-            </a:r>
-          </a:p>
-          <a:p>
-            <a:pPr marL="228600" indent="-228600">
-              <a:spcBef>
-                <a:spcPts val="0"/>
-              </a:spcBef>
-              <a:spcAft>
-                <a:spcPts val="400"/>
-              </a:spcAft>
-              <a:buChar char="•"/>
-              <a:lnSpc>
-                <a:spcPts val="1980"/>
-              </a:lnSpc>
-            </a:pPr>
-            <a:r>
-              <a:rPr lang="ja-JP" sz="1100" b="0" i="0" dirty="0">
-                <a:solidFill>
-                  <a:srgbClr val="333333"/>
-                </a:solidFill>
-                <a:ea typeface="Meiryo"/>
-              </a:rPr>
-              <a:t>出力物の保存先を明確にする</a:t>
-            </a:r>
-          </a:p>
-        </p:txBody>
-      </p:sp>
-      <p:sp>
-        <p:nvSpPr>
-          <p:cNvPr id="13" name="Rectangle 12"/>
-          <p:cNvSpPr/>
-          <p:nvPr/>
-        </p:nvSpPr>
-        <p:spPr>
-          <a:xfrm>
-            <a:off x="6089904" y="941832"/>
-            <a:ext cx="2889504" cy="3671315"/>
-          </a:xfrm>
-          <a:prstGeom prst="rect">
-            <a:avLst/>
-          </a:prstGeom>
-          <a:solidFill>
-            <a:srgbClr val="F5F5F5"/>
-          </a:solidFill>
-          <a:ln w="9525">
-            <a:solidFill>
-              <a:srgbClr val="E0E0E0"/>
-            </a:solidFill>
-          </a:ln>
-          <a:effectLst/>
-        </p:spPr>
-        <p:style>
-          <a:lnRef idx="1">
-            <a:schemeClr val="accent1"/>
-          </a:lnRef>
-          <a:fillRef idx="3">
-            <a:schemeClr val="accent1"/>
-          </a:fillRef>
-          <a:effectRef idx="2">
-            <a:schemeClr val="accent1"/>
-          </a:effectRef>
-          <a:fontRef idx="minor">
-            <a:schemeClr val="lt1"/>
-          </a:fontRef>
-        </p:style>
-        <p:txBody>
-          <a:bodyPr rtlCol="0" anchor="ctr"/>
-          <a:lstStyle/>
-          <a:p>
-            <a:pPr algn="ctr"/>
-          </a:p>
-        </p:txBody>
-      </p:sp>
-      <p:sp>
-        <p:nvSpPr>
-          <p:cNvPr id="14" name="TextBox 13"/>
-          <p:cNvSpPr txBox="1"/>
-          <p:nvPr/>
-        </p:nvSpPr>
-        <p:spPr>
-          <a:xfrm>
-            <a:off x="6227064" y="1051560"/>
-            <a:ext cx="2615184" cy="320040"/>
-          </a:xfrm>
-          <a:prstGeom prst="rect">
-            <a:avLst/>
-          </a:prstGeom>
-          <a:noFill/>
-          <a:effectLst/>
-        </p:spPr>
-        <p:txBody>
-          <a:bodyPr wrap="square" lIns="0" rIns="0" tIns="0" bIns="0" anchor="t">
-            <a:noAutofit/>
-          </a:bodyPr>
-          <a:lstStyle/>
-          <a:p>
-            <a:r>
-              <a:rPr lang="ja-JP" sz="1400" b="1" i="0" dirty="0">
-                <a:solidFill>
-                  <a:srgbClr val="333333"/>
-                </a:solidFill>
-                <a:ea typeface="Meiryo"/>
-              </a:rPr>
-              <a:t>自動化</a:t>
-            </a:r>
-          </a:p>
-        </p:txBody>
-      </p:sp>
-      <p:sp>
-        <p:nvSpPr>
-          <p:cNvPr id="15" name="Rectangle 14"/>
-          <p:cNvSpPr/>
-          <p:nvPr/>
-        </p:nvSpPr>
-        <p:spPr>
-          <a:xfrm>
-            <a:off x="6227064" y="1307592"/>
-            <a:ext cx="2615184" cy="12700"/>
-          </a:xfrm>
-          <a:prstGeom prst="rect">
-            <a:avLst/>
-          </a:prstGeom>
-          <a:solidFill>
-            <a:srgbClr val="E0E0E0"/>
-          </a:solidFill>
-          <a:ln>
-            <a:noFill/>
-          </a:ln>
-          <a:effectLst/>
-        </p:spPr>
-        <p:style>
-          <a:lnRef idx="1">
-            <a:schemeClr val="accent1"/>
-          </a:lnRef>
-          <a:fillRef idx="3">
-            <a:schemeClr val="accent1"/>
-          </a:fillRef>
-          <a:effectRef idx="2">
-            <a:schemeClr val="accent1"/>
-          </a:effectRef>
-          <a:fontRef idx="minor">
-            <a:schemeClr val="lt1"/>
-          </a:fontRef>
-        </p:style>
-        <p:txBody>
-          <a:bodyPr rtlCol="0" anchor="ctr"/>
-          <a:lstStyle/>
-          <a:p>
-            <a:pPr algn="ctr"/>
-          </a:p>
-        </p:txBody>
-      </p:sp>
-      <p:sp>
-        <p:nvSpPr>
-          <p:cNvPr id="16" name="TextBox 15"/>
-          <p:cNvSpPr txBox="1"/>
-          <p:nvPr/>
-        </p:nvSpPr>
-        <p:spPr>
-          <a:xfrm>
-            <a:off x="6227064" y="1380744"/>
-            <a:ext cx="2615184" cy="3122675"/>
-          </a:xfrm>
-          <a:prstGeom prst="rect">
-            <a:avLst/>
-          </a:prstGeom>
-          <a:noFill/>
-          <a:effectLst/>
-        </p:spPr>
-        <p:txBody>
-          <a:bodyPr wrap="square" lIns="0" rIns="0" tIns="0" bIns="0">
-            <a:noAutofit/>
-          </a:bodyPr>
-          <a:lstStyle/>
-          <a:p>
-            <a:pPr>
-              <a:spcBef>
-                <a:spcPts val="0"/>
-              </a:spcBef>
-              <a:spcAft>
-                <a:spcPts val="400"/>
-              </a:spcAft>
-              <a:buNone/>
-              <a:lnSpc>
-                <a:spcPts val="1980"/>
-              </a:lnSpc>
-            </a:pPr>
-            <a:r>
-              <a:rPr lang="ja-JP" sz="1100" b="0" i="0" dirty="0">
-                <a:solidFill>
-                  <a:srgbClr val="333333"/>
-                </a:solidFill>
-                <a:ea typeface="Meiryo"/>
-              </a:rPr>
-              <a:t>実行環境と安全策を先に縛る。</a:t>
-            </a:r>
-          </a:p>
-          <a:p>
-            <a:pPr marL="228600" indent="-228600">
-              <a:spcBef>
-                <a:spcPts val="0"/>
-              </a:spcBef>
-              <a:spcAft>
-                <a:spcPts val="400"/>
-              </a:spcAft>
-              <a:buChar char="•"/>
-              <a:lnSpc>
-                <a:spcPts val="1980"/>
-              </a:lnSpc>
-            </a:pPr>
-            <a:r>
-              <a:rPr lang="en-US" sz="1100" b="0" i="0" dirty="0">
-                <a:solidFill>
-                  <a:srgbClr val="333333"/>
-                </a:solidFill>
-                <a:latin typeface="Segoe UI"/>
-              </a:rPr>
-              <a:t>Windows</a:t>
-            </a:r>
-            <a:r>
-              <a:rPr lang="ja-JP" sz="1100" b="0" i="0" dirty="0">
-                <a:solidFill>
-                  <a:srgbClr val="333333"/>
-                </a:solidFill>
-                <a:ea typeface="Meiryo"/>
-              </a:rPr>
-              <a:t>、</a:t>
-            </a:r>
-            <a:r>
-              <a:rPr lang="en-US" sz="1100" b="0" i="0" dirty="0">
-                <a:solidFill>
-                  <a:srgbClr val="333333"/>
-                </a:solidFill>
-                <a:latin typeface="Segoe UI"/>
-              </a:rPr>
-              <a:t>PowerShell</a:t>
-            </a:r>
-            <a:r>
-              <a:rPr lang="ja-JP" sz="1100" b="0" i="0" dirty="0">
-                <a:solidFill>
-                  <a:srgbClr val="333333"/>
-                </a:solidFill>
-                <a:ea typeface="Meiryo"/>
-              </a:rPr>
-              <a:t>、</a:t>
-            </a:r>
-            <a:r>
-              <a:rPr lang="en-US" sz="1100" b="0" i="0" dirty="0">
-                <a:solidFill>
-                  <a:srgbClr val="333333"/>
-                </a:solidFill>
-                <a:latin typeface="Segoe UI"/>
-              </a:rPr>
-              <a:t>WSL</a:t>
-            </a:r>
-            <a:r>
-              <a:rPr lang="ja-JP" sz="1100" b="0" i="0" dirty="0">
-                <a:solidFill>
-                  <a:srgbClr val="333333"/>
-                </a:solidFill>
-                <a:ea typeface="Meiryo"/>
-              </a:rPr>
-              <a:t>などを明示する</a:t>
-            </a:r>
-          </a:p>
-          <a:p>
-            <a:pPr marL="228600" indent="-228600">
-              <a:spcBef>
-                <a:spcPts val="0"/>
-              </a:spcBef>
-              <a:spcAft>
-                <a:spcPts val="400"/>
-              </a:spcAft>
-              <a:buChar char="•"/>
-              <a:lnSpc>
-                <a:spcPts val="1980"/>
-              </a:lnSpc>
-            </a:pPr>
-            <a:r>
-              <a:rPr lang="ja-JP" sz="1100" b="0" i="0" dirty="0">
-                <a:solidFill>
-                  <a:srgbClr val="333333"/>
-                </a:solidFill>
-                <a:ea typeface="Meiryo"/>
-              </a:rPr>
-              <a:t>破壊的操作は</a:t>
-            </a:r>
-            <a:r>
-              <a:rPr lang="en-US" sz="1100" b="0" i="0" dirty="0">
-                <a:solidFill>
-                  <a:srgbClr val="333333"/>
-                </a:solidFill>
-                <a:latin typeface="Segoe UI"/>
-              </a:rPr>
-              <a:t>dry-run</a:t>
-            </a:r>
-            <a:r>
-              <a:rPr lang="ja-JP" sz="1100" b="0" i="0" dirty="0">
-                <a:solidFill>
-                  <a:srgbClr val="333333"/>
-                </a:solidFill>
-                <a:ea typeface="Meiryo"/>
-              </a:rPr>
-              <a:t>や</a:t>
-            </a:r>
-            <a:r>
-              <a:rPr lang="en-US" sz="1100" b="0" i="0" dirty="0">
-                <a:solidFill>
-                  <a:srgbClr val="333333"/>
-                </a:solidFill>
-                <a:latin typeface="Segoe UI"/>
-              </a:rPr>
-              <a:t>WhatIf</a:t>
-            </a:r>
-            <a:r>
-              <a:rPr lang="ja-JP" sz="1100" b="0" i="0" dirty="0">
-                <a:solidFill>
-                  <a:srgbClr val="333333"/>
-                </a:solidFill>
-                <a:ea typeface="Meiryo"/>
-              </a:rPr>
-              <a:t>を挟む</a:t>
-            </a:r>
-          </a:p>
-          <a:p>
-            <a:pPr marL="228600" indent="-228600">
-              <a:spcBef>
-                <a:spcPts val="0"/>
-              </a:spcBef>
-              <a:spcAft>
-                <a:spcPts val="400"/>
-              </a:spcAft>
-              <a:buChar char="•"/>
-              <a:lnSpc>
-                <a:spcPts val="1980"/>
-              </a:lnSpc>
-            </a:pPr>
-            <a:r>
-              <a:rPr lang="ja-JP" sz="1100" b="0" i="0" dirty="0">
-                <a:solidFill>
-                  <a:srgbClr val="333333"/>
-                </a:solidFill>
-                <a:ea typeface="Meiryo"/>
-              </a:rPr>
-              <a:t>ログ出力とエラー処理を標準化する</a:t>
-            </a:r>
-          </a:p>
-        </p:txBody>
-      </p:sp>
-      <p:sp>
-        <p:nvSpPr>
-          <p:cNvPr id="17" name="Rectangle 16"/>
-          <p:cNvSpPr/>
-          <p:nvPr/>
-        </p:nvSpPr>
-        <p:spPr>
-          <a:xfrm>
-            <a:off x="0" y="4777740"/>
-            <a:ext cx="9144000" cy="9525"/>
-          </a:xfrm>
-          <a:prstGeom prst="rect">
-            <a:avLst/>
-          </a:prstGeom>
-          <a:solidFill>
-            <a:srgbClr val="E0E0E0"/>
-          </a:solidFill>
-          <a:ln>
-            <a:noFill/>
-          </a:ln>
-          <a:effectLst/>
-        </p:spPr>
-        <p:style>
-          <a:lnRef idx="1">
-            <a:schemeClr val="accent1"/>
-          </a:lnRef>
-          <a:fillRef idx="3">
-            <a:schemeClr val="accent1"/>
-          </a:fillRef>
-          <a:effectRef idx="2">
-            <a:schemeClr val="accent1"/>
-          </a:effectRef>
-          <a:fontRef idx="minor">
-            <a:schemeClr val="lt1"/>
-          </a:fontRef>
-        </p:style>
-        <p:txBody>
-          <a:bodyPr rtlCol="0" anchor="ctr"/>
-          <a:lstStyle/>
-          <a:p>
-            <a:pPr algn="ctr"/>
-          </a:p>
-        </p:txBody>
-      </p:sp>
-      <p:sp>
-        <p:nvSpPr>
-          <p:cNvPr id="18" name="TextBox 17"/>
-          <p:cNvSpPr txBox="1"/>
-          <p:nvPr/>
-        </p:nvSpPr>
-        <p:spPr>
-          <a:xfrm>
-            <a:off x="228600" y="4823459"/>
-            <a:ext cx="1828800" cy="274320"/>
-          </a:xfrm>
-          <a:prstGeom prst="rect">
-            <a:avLst/>
-          </a:prstGeom>
-          <a:noFill/>
-        </p:spPr>
-        <p:txBody>
-          <a:bodyPr wrap="none" anchor="ctr" lIns="0" rIns="0" tIns="0" bIns="0">
-            <a:spAutoFit/>
-          </a:bodyPr>
-          <a:lstStyle/>
-          <a:p>
-            <a:fld id="{0C0CB77C-9FAA-4B75-BA4F-92541925B55A}" type="slidenum">
-              <a:rPr lang="ja-JP" smtClean="0" sz="1000">
-                <a:solidFill>
-                  <a:srgbClr val="888888"/>
-                </a:solidFill>
-              </a:rPr>
-              <a:t>&lt;#&gt;</a:t>
-            </a:fld>
-            <a:r>
-              <a:rPr lang="ja-JP" smtClean="0" sz="1000">
-                <a:solidFill>
-                  <a:srgbClr val="888888"/>
-                </a:solidFill>
-              </a:rPr>
-              <a:t>/</a:t>
-            </a:r>
-            <a:fld id="{EA291D86-29D1-4C1F-9AA4-23358FE348E4}" type="slidecount">
-              <a:rPr lang="ja-JP" smtClean="0" sz="1000">
-                <a:solidFill>
-                  <a:srgbClr val="888888"/>
-                </a:solidFill>
-              </a:rPr>
-              <a:t>10</a:t>
-            </a:fld>
-          </a:p>
-        </p:txBody>
-      </p:sp>
-      <p:pic>
-        <p:nvPicPr>
-          <p:cNvPr id="19" name="Picture 18" descr="logo.png"/>
-          <p:cNvPicPr>
-            <a:picLocks noChangeAspect="1"/>
-          </p:cNvPicPr>
-          <p:nvPr/>
-        </p:nvPicPr>
-        <p:blipFill>
-          <a:blip r:embed="rId2"/>
-          <a:stretch>
-            <a:fillRect/>
-          </a:stretch>
-        </p:blipFill>
-        <p:spPr>
-          <a:xfrm>
-            <a:off x="8001000" y="4846320"/>
-            <a:ext cx="762000" cy="228600"/>
-          </a:xfrm>
-          <a:prstGeom prst="rect">
-            <a:avLst/>
-          </a:prstGeom>
-          <a:effectLst/>
-        </p:spPr>
-      </p:pic>
-    </p:spTree>
-  </p:cSld>
-  <p:clrMapOvr>
-    <a:masterClrMapping/>
-  </p:clrMapOvr>
-</p:sld>
-</file>
-
-<file path=ppt/slides/slide9.xml><?xml version="1.0" encoding="utf-8"?>
-<p:sld xmlns:a="http://schemas.openxmlformats.org/drawingml/2006/main" xmlns:p="http://schemas.openxmlformats.org/presentationml/2006/main" xmlns:r="http://schemas.openxmlformats.org/officeDocument/2006/relationships">
-  <p:cSld>
-    <p:bg>
-      <p:bgPr>
-        <a:solidFill>
-          <a:srgbClr val="FFFFFF"/>
-        </a:solidFill>
-        <a:effectLst/>
-      </p:bgPr>
-    </p:bg>
-    <p:spTree>
-      <p:nvGrpSpPr>
-        <p:cNvPr id="1" name=""/>
-        <p:cNvGrpSpPr/>
-        <p:nvPr/>
-      </p:nvGrpSpPr>
-      <p:grpSpPr/>
-      <p:sp>
-        <p:nvSpPr>
-          <p:cNvPr id="2" name="Rectangle 1"/>
-          <p:cNvSpPr/>
-          <p:nvPr/>
-        </p:nvSpPr>
-        <p:spPr>
-          <a:xfrm>
-            <a:off x="0" y="0"/>
-            <a:ext cx="9144000" cy="777240"/>
-          </a:xfrm>
-          <a:prstGeom prst="rect">
-            <a:avLst/>
-          </a:prstGeom>
-          <a:solidFill>
-            <a:srgbClr val="4A4A4A"/>
-          </a:solidFill>
-          <a:ln>
-            <a:noFill/>
-          </a:ln>
-          <a:effectLst/>
-        </p:spPr>
-        <p:style>
-          <a:lnRef idx="1">
-            <a:schemeClr val="accent1"/>
-          </a:lnRef>
-          <a:fillRef idx="3">
-            <a:schemeClr val="accent1"/>
-          </a:fillRef>
-          <a:effectRef idx="2">
-            <a:schemeClr val="accent1"/>
-          </a:effectRef>
-          <a:fontRef idx="minor">
-            <a:schemeClr val="lt1"/>
-          </a:fontRef>
-        </p:style>
-        <p:txBody>
-          <a:bodyPr rtlCol="0" anchor="ctr"/>
-          <a:lstStyle/>
-          <a:p>
-            <a:pPr algn="ctr"/>
-          </a:p>
-        </p:txBody>
-      </p:sp>
-      <p:sp>
-        <p:nvSpPr>
-          <p:cNvPr id="3" name="TextBox 2"/>
-          <p:cNvSpPr txBox="1"/>
-          <p:nvPr/>
-        </p:nvSpPr>
-        <p:spPr>
-          <a:xfrm>
-            <a:off x="228600" y="85039"/>
-            <a:ext cx="8686800" cy="411480"/>
-          </a:xfrm>
-          <a:prstGeom prst="rect">
-            <a:avLst/>
-          </a:prstGeom>
-          <a:noFill/>
-          <a:effectLst/>
-        </p:spPr>
-        <p:txBody>
-          <a:bodyPr wrap="square" lIns="0" rIns="0" tIns="0" bIns="0" anchor="ctr">
-            <a:noAutofit/>
-          </a:bodyPr>
-          <a:lstStyle/>
-          <a:p>
-            <a:r>
-              <a:rPr lang="en-US" sz="2400" b="1" i="0" dirty="0">
-                <a:solidFill>
-                  <a:srgbClr val="FFFFFF"/>
-                </a:solidFill>
-                <a:latin typeface="Segoe UI"/>
-              </a:rPr>
-              <a:t>CLAUDE.md</a:t>
-            </a:r>
-            <a:r>
-              <a:rPr lang="ja-JP" sz="2400" b="1" i="0" dirty="0">
-                <a:solidFill>
-                  <a:srgbClr val="FFFFFF"/>
-                </a:solidFill>
-                <a:ea typeface="Meiryo"/>
-              </a:rPr>
-              <a:t>は会話から育てる対象である</a:t>
-            </a:r>
-          </a:p>
-        </p:txBody>
-      </p:sp>
-      <p:sp>
-        <p:nvSpPr>
-          <p:cNvPr id="4" name="TextBox 3"/>
-          <p:cNvSpPr txBox="1"/>
-          <p:nvPr/>
-        </p:nvSpPr>
-        <p:spPr>
-          <a:xfrm>
-            <a:off x="228600" y="523036"/>
-            <a:ext cx="8686800" cy="274320"/>
-          </a:xfrm>
-          <a:prstGeom prst="rect">
-            <a:avLst/>
-          </a:prstGeom>
-          <a:noFill/>
-          <a:effectLst/>
-        </p:spPr>
-        <p:txBody>
-          <a:bodyPr wrap="square" lIns="0" rIns="0" tIns="0" bIns="0" anchor="ctr">
-            <a:noAutofit/>
-          </a:bodyPr>
-          <a:lstStyle/>
-          <a:p>
-            <a:r>
-              <a:rPr lang="en-US" sz="1200" b="0" i="0" dirty="0">
-                <a:solidFill>
-                  <a:srgbClr val="FFFFFF"/>
-                </a:solidFill>
-                <a:latin typeface="Segoe UI"/>
-              </a:rPr>
-              <a:t>2</a:t>
-            </a:r>
-            <a:r>
-              <a:rPr lang="ja-JP" sz="1200" b="0" i="0" dirty="0">
-                <a:solidFill>
-                  <a:srgbClr val="FFFFFF"/>
-                </a:solidFill>
-                <a:ea typeface="Meiryo"/>
-              </a:rPr>
-              <a:t>回言った注意をルールへ昇格させ、古い前提を削る</a:t>
-            </a:r>
-          </a:p>
-        </p:txBody>
-      </p:sp>
-      <p:sp>
-        <p:nvSpPr>
-          <p:cNvPr id="5" name="Step5"/>
-          <p:cNvSpPr/>
-          <p:nvPr/>
-        </p:nvSpPr>
-        <p:spPr>
-          <a:xfrm>
-            <a:off x="164592" y="941832"/>
-            <a:ext cx="2889504" cy="959205"/>
+            <a:off x="6830568" y="941832"/>
+            <a:ext cx="2148840" cy="959205"/>
           </a:xfrm>
           <a:custGeom>
             <a:avLst/>
@@ -13146,14 +12048,14 @@
       </p:sp>
       <p:sp>
         <p:nvSpPr>
-          <p:cNvPr id="6" name="TextBox 5"/>
+          <p:cNvPr id="12" name="TextBox 11"/>
           <p:cNvSpPr txBox="1"/>
           <p:nvPr/>
         </p:nvSpPr>
         <p:spPr>
           <a:xfrm>
-            <a:off x="301751" y="941832"/>
-            <a:ext cx="2456078" cy="959205"/>
+            <a:off x="6967728" y="941832"/>
+            <a:ext cx="1826514" cy="959205"/>
           </a:xfrm>
           <a:prstGeom prst="rect">
             <a:avLst/>
@@ -13168,232 +12070,27 @@
           <a:lstStyle/>
           <a:p>
             <a:r>
-              <a:rPr lang="en-US" sz="1400" b="1" i="0" dirty="0">
-                <a:solidFill>
-                  <a:srgbClr val="333333"/>
-                </a:solidFill>
-                <a:latin typeface="Segoe UI"/>
-              </a:rPr>
-              <a:t>1. </a:t>
-            </a:r>
-            <a:r>
               <a:rPr lang="ja-JP" sz="1400" b="1" i="0" dirty="0">
                 <a:solidFill>
                   <a:srgbClr val="333333"/>
                 </a:solidFill>
                 <a:ea typeface="Meiryo"/>
               </a:rPr>
-              <a:t>昇格</a:t>
-            </a:r>
-          </a:p>
-        </p:txBody>
-      </p:sp>
-      <p:sp>
-        <p:nvSpPr>
-          <p:cNvPr id="7" name="Step7"/>
+              <a:t>検証順を決める</a:t>
+            </a:r>
+          </a:p>
+        </p:txBody>
+      </p:sp>
+      <p:sp>
+        <p:nvSpPr>
+          <p:cNvPr id="13" name="Rectangle 12"/>
           <p:cNvSpPr/>
           <p:nvPr/>
         </p:nvSpPr>
         <p:spPr>
           <a:xfrm>
-            <a:off x="3127248" y="941832"/>
-            <a:ext cx="2889504" cy="959205"/>
-          </a:xfrm>
-          <a:custGeom>
-            <a:avLst/>
-            <a:gdLst/>
-            <a:ahLst/>
-            <a:cxnLst/>
-            <a:rect l="0" t="0" r="r" b="b"/>
-            <a:pathLst>
-              <a:path w="100000" h="100000">
-                <a:moveTo>
-                  <a:pt x="0" y="0"/>
-                </a:moveTo>
-                <a:lnTo>
-                  <a:pt x="88000" y="0"/>
-                </a:lnTo>
-                <a:lnTo>
-                  <a:pt x="100000" y="50000"/>
-                </a:lnTo>
-                <a:lnTo>
-                  <a:pt x="88000" y="100000"/>
-                </a:lnTo>
-                <a:lnTo>
-                  <a:pt x="0" y="100000"/>
-                </a:lnTo>
-                <a:close/>
-              </a:path>
-            </a:pathLst>
-          </a:custGeom>
-          <a:solidFill>
-            <a:srgbClr val="D0D0D0"/>
-          </a:solidFill>
-          <a:ln w="9525">
-            <a:solidFill>
-              <a:srgbClr val="CCCCCC"/>
-            </a:solidFill>
-          </a:ln>
-          <a:effectLst/>
-        </p:spPr>
-        <p:txBody>
-          <a:bodyPr/>
-          <a:lstStyle/>
-          <a:p/>
-        </p:txBody>
-      </p:sp>
-      <p:sp>
-        <p:nvSpPr>
-          <p:cNvPr id="8" name="TextBox 7"/>
-          <p:cNvSpPr txBox="1"/>
-          <p:nvPr/>
-        </p:nvSpPr>
-        <p:spPr>
-          <a:xfrm>
-            <a:off x="3264408" y="941832"/>
-            <a:ext cx="2456078" cy="959205"/>
-          </a:xfrm>
-          <a:prstGeom prst="rect">
-            <a:avLst/>
-          </a:prstGeom>
-          <a:noFill/>
-          <a:effectLst/>
-        </p:spPr>
-        <p:txBody>
-          <a:bodyPr wrap="square" lIns="0" rIns="0" tIns="0" bIns="0" anchor="ctr">
-            <a:noAutofit/>
-          </a:bodyPr>
-          <a:lstStyle/>
-          <a:p>
-            <a:r>
-              <a:rPr lang="en-US" sz="1400" b="1" i="0" dirty="0">
-                <a:solidFill>
-                  <a:srgbClr val="333333"/>
-                </a:solidFill>
-                <a:latin typeface="Segoe UI"/>
-              </a:rPr>
-              <a:t>2. </a:t>
-            </a:r>
-            <a:r>
-              <a:rPr lang="ja-JP" sz="1400" b="1" i="0" dirty="0">
-                <a:solidFill>
-                  <a:srgbClr val="333333"/>
-                </a:solidFill>
-                <a:ea typeface="Meiryo"/>
-              </a:rPr>
-              <a:t>削除</a:t>
-            </a:r>
-          </a:p>
-        </p:txBody>
-      </p:sp>
-      <p:sp>
-        <p:nvSpPr>
-          <p:cNvPr id="9" name="Step9"/>
-          <p:cNvSpPr/>
-          <p:nvPr/>
-        </p:nvSpPr>
-        <p:spPr>
-          <a:xfrm>
-            <a:off x="6089904" y="941832"/>
-            <a:ext cx="2889504" cy="959205"/>
-          </a:xfrm>
-          <a:custGeom>
-            <a:avLst/>
-            <a:gdLst/>
-            <a:ahLst/>
-            <a:cxnLst/>
-            <a:rect l="0" t="0" r="r" b="b"/>
-            <a:pathLst>
-              <a:path w="100000" h="100000">
-                <a:moveTo>
-                  <a:pt x="0" y="0"/>
-                </a:moveTo>
-                <a:lnTo>
-                  <a:pt x="88000" y="0"/>
-                </a:lnTo>
-                <a:lnTo>
-                  <a:pt x="100000" y="50000"/>
-                </a:lnTo>
-                <a:lnTo>
-                  <a:pt x="88000" y="100000"/>
-                </a:lnTo>
-                <a:lnTo>
-                  <a:pt x="0" y="100000"/>
-                </a:lnTo>
-                <a:close/>
-              </a:path>
-            </a:pathLst>
-          </a:custGeom>
-          <a:solidFill>
-            <a:srgbClr val="D0D0D0"/>
-          </a:solidFill>
-          <a:ln w="9525">
-            <a:solidFill>
-              <a:srgbClr val="CCCCCC"/>
-            </a:solidFill>
-          </a:ln>
-          <a:effectLst/>
-        </p:spPr>
-        <p:txBody>
-          <a:bodyPr/>
-          <a:lstStyle/>
-          <a:p/>
-        </p:txBody>
-      </p:sp>
-      <p:sp>
-        <p:nvSpPr>
-          <p:cNvPr id="10" name="TextBox 9"/>
-          <p:cNvSpPr txBox="1"/>
-          <p:nvPr/>
-        </p:nvSpPr>
-        <p:spPr>
-          <a:xfrm>
-            <a:off x="6227064" y="941832"/>
-            <a:ext cx="2456078" cy="959205"/>
-          </a:xfrm>
-          <a:prstGeom prst="rect">
-            <a:avLst/>
-          </a:prstGeom>
-          <a:noFill/>
-          <a:effectLst/>
-        </p:spPr>
-        <p:txBody>
-          <a:bodyPr wrap="square" lIns="0" rIns="0" tIns="0" bIns="0" anchor="ctr">
-            <a:noAutofit/>
-          </a:bodyPr>
-          <a:lstStyle/>
-          <a:p>
-            <a:r>
-              <a:rPr lang="en-US" sz="1400" b="1" i="0" dirty="0">
-                <a:solidFill>
-                  <a:srgbClr val="333333"/>
-                </a:solidFill>
-                <a:latin typeface="Segoe UI"/>
-              </a:rPr>
-              <a:t>3. </a:t>
-            </a:r>
-            <a:r>
-              <a:rPr lang="ja-JP" sz="1400" b="1" i="0" dirty="0">
-                <a:solidFill>
-                  <a:srgbClr val="333333"/>
-                </a:solidFill>
-                <a:ea typeface="Meiryo"/>
-              </a:rPr>
-              <a:t>確認</a:t>
-            </a:r>
-          </a:p>
-        </p:txBody>
-      </p:sp>
-      <p:sp>
-        <p:nvSpPr>
-          <p:cNvPr id="11" name="Rectangle 10"/>
-          <p:cNvSpPr/>
-          <p:nvPr/>
-        </p:nvSpPr>
-        <p:spPr>
-          <a:xfrm>
             <a:off x="164592" y="1974189"/>
-            <a:ext cx="2889504" cy="2638958"/>
+            <a:ext cx="2148840" cy="2638958"/>
           </a:xfrm>
           <a:prstGeom prst="rect">
             <a:avLst/>
@@ -13432,14 +12129,14 @@
       </p:sp>
       <p:sp>
         <p:nvSpPr>
-          <p:cNvPr id="12" name="TextBox 11"/>
+          <p:cNvPr id="14" name="TextBox 13"/>
           <p:cNvSpPr txBox="1"/>
           <p:nvPr/>
         </p:nvSpPr>
         <p:spPr>
           <a:xfrm>
             <a:off x="301751" y="2083917"/>
-            <a:ext cx="2615184" cy="2419502"/>
+            <a:ext cx="1874520" cy="2419502"/>
           </a:xfrm>
           <a:prstGeom prst="rect">
             <a:avLst/>
@@ -13466,22 +12163,427 @@
               </a:lnSpc>
             </a:pPr>
             <a:r>
+              <a:rPr lang="en-US" sz="1100" b="0" i="0" dirty="0">
+                <a:solidFill>
+                  <a:srgbClr val="333333"/>
+                </a:solidFill>
+                <a:latin typeface="Consolas"/>
+              </a:rPr>
+              <a:t>pnpm dev</a:t>
+            </a:r>
+            <a:r>
               <a:rPr lang="ja-JP" sz="1100" b="0" i="0" dirty="0">
                 <a:solidFill>
                   <a:srgbClr val="333333"/>
                 </a:solidFill>
                 <a:ea typeface="Meiryo"/>
               </a:rPr>
-              <a:t>同じ注意を</a:t>
+              <a:t>、</a:t>
             </a:r>
             <a:r>
               <a:rPr lang="en-US" sz="1100" b="0" i="0" dirty="0">
                 <a:solidFill>
                   <a:srgbClr val="333333"/>
                 </a:solidFill>
+                <a:latin typeface="Consolas"/>
+              </a:rPr>
+              <a:t>pnpm test</a:t>
+            </a:r>
+            <a:r>
+              <a:rPr lang="ja-JP" sz="1100" b="0" i="0" dirty="0">
+                <a:solidFill>
+                  <a:srgbClr val="333333"/>
+                </a:solidFill>
+                <a:ea typeface="Meiryo"/>
+              </a:rPr>
+              <a:t>、</a:t>
+            </a:r>
+            <a:r>
+              <a:rPr lang="en-US" sz="1100" b="0" i="0" dirty="0">
+                <a:solidFill>
+                  <a:srgbClr val="333333"/>
+                </a:solidFill>
+                <a:latin typeface="Consolas"/>
+              </a:rPr>
+              <a:t>pnpm typecheck</a:t>
+            </a:r>
+            <a:r>
+              <a:rPr lang="ja-JP" sz="1100" b="0" i="0" dirty="0">
+                <a:solidFill>
+                  <a:srgbClr val="333333"/>
+                </a:solidFill>
+                <a:ea typeface="Meiryo"/>
+              </a:rPr>
+              <a:t>、</a:t>
+            </a:r>
+            <a:r>
+              <a:rPr lang="en-US" sz="1100" b="0" i="0" dirty="0">
+                <a:solidFill>
+                  <a:srgbClr val="333333"/>
+                </a:solidFill>
+                <a:latin typeface="Consolas"/>
+              </a:rPr>
+              <a:t>pnpm lint</a:t>
+            </a:r>
+            <a:r>
+              <a:rPr lang="ja-JP" sz="1100" b="0" i="0" dirty="0">
+                <a:solidFill>
+                  <a:srgbClr val="333333"/>
+                </a:solidFill>
+                <a:ea typeface="Meiryo"/>
+              </a:rPr>
+              <a:t>のように、実行文字列をそのまま書く。</a:t>
+            </a:r>
+          </a:p>
+        </p:txBody>
+      </p:sp>
+      <p:sp>
+        <p:nvSpPr>
+          <p:cNvPr id="15" name="Rectangle 14"/>
+          <p:cNvSpPr/>
+          <p:nvPr/>
+        </p:nvSpPr>
+        <p:spPr>
+          <a:xfrm>
+            <a:off x="2386584" y="1974189"/>
+            <a:ext cx="2148840" cy="2638958"/>
+          </a:xfrm>
+          <a:prstGeom prst="rect">
+            <a:avLst/>
+          </a:prstGeom>
+          <a:solidFill>
+            <a:srgbClr val="F5F5F5"/>
+          </a:solidFill>
+          <a:ln w="9525">
+            <a:solidFill>
+              <a:srgbClr val="E0E0E0"/>
+            </a:solidFill>
+          </a:ln>
+          <a:effectLst/>
+        </p:spPr>
+        <p:style>
+          <a:lnRef idx="1">
+            <a:schemeClr val="accent1"/>
+          </a:lnRef>
+          <a:fillRef idx="3">
+            <a:schemeClr val="accent1"/>
+          </a:fillRef>
+          <a:effectRef idx="2">
+            <a:schemeClr val="accent1"/>
+          </a:effectRef>
+          <a:fontRef idx="minor">
+            <a:schemeClr val="lt1"/>
+          </a:fontRef>
+        </p:style>
+        <p:txBody>
+          <a:bodyPr rtlCol="0" anchor="ctr"/>
+          <a:lstStyle/>
+          <a:p>
+            <a:pPr algn="ctr"/>
+          </a:p>
+        </p:txBody>
+      </p:sp>
+      <p:sp>
+        <p:nvSpPr>
+          <p:cNvPr id="16" name="TextBox 15"/>
+          <p:cNvSpPr txBox="1"/>
+          <p:nvPr/>
+        </p:nvSpPr>
+        <p:spPr>
+          <a:xfrm>
+            <a:off x="2523744" y="2083917"/>
+            <a:ext cx="1874520" cy="2419502"/>
+          </a:xfrm>
+          <a:prstGeom prst="rect">
+            <a:avLst/>
+          </a:prstGeom>
+          <a:noFill/>
+          <a:effectLst/>
+        </p:spPr>
+        <p:txBody>
+          <a:bodyPr wrap="square" lIns="0" rIns="0" tIns="0" bIns="0">
+            <a:noAutofit/>
+          </a:bodyPr>
+          <a:lstStyle/>
+          <a:p>
+            <a:pPr>
+              <a:spcBef>
+                <a:spcPts val="0"/>
+              </a:spcBef>
+              <a:spcAft>
+                <a:spcPts val="400"/>
+              </a:spcAft>
+              <a:buNone/>
+              <a:lnSpc>
+                <a:spcPts val="1980"/>
+              </a:lnSpc>
+            </a:pPr>
+            <a:r>
+              <a:rPr lang="en-US" sz="1100" b="0" i="0" dirty="0">
+                <a:solidFill>
+                  <a:srgbClr val="333333"/>
+                </a:solidFill>
+                <a:latin typeface="Consolas"/>
+              </a:rPr>
+              <a:t>src/app</a:t>
+            </a:r>
+            <a:r>
+              <a:rPr lang="ja-JP" sz="1100" b="0" i="0" dirty="0">
+                <a:solidFill>
+                  <a:srgbClr val="333333"/>
+                </a:solidFill>
+                <a:ea typeface="Meiryo"/>
+              </a:rPr>
+              <a:t>、</a:t>
+            </a:r>
+            <a:r>
+              <a:rPr lang="en-US" sz="1100" b="0" i="0" dirty="0">
+                <a:solidFill>
+                  <a:srgbClr val="333333"/>
+                </a:solidFill>
+                <a:latin typeface="Consolas"/>
+              </a:rPr>
+              <a:t>src/features</a:t>
+            </a:r>
+            <a:r>
+              <a:rPr lang="ja-JP" sz="1100" b="0" i="0" dirty="0">
+                <a:solidFill>
+                  <a:srgbClr val="333333"/>
+                </a:solidFill>
+                <a:ea typeface="Meiryo"/>
+              </a:rPr>
+              <a:t>、</a:t>
+            </a:r>
+            <a:r>
+              <a:rPr lang="en-US" sz="1100" b="0" i="0" dirty="0">
+                <a:solidFill>
+                  <a:srgbClr val="333333"/>
+                </a:solidFill>
+                <a:latin typeface="Consolas"/>
+              </a:rPr>
+              <a:t>src/domain</a:t>
+            </a:r>
+            <a:r>
+              <a:rPr lang="ja-JP" sz="1100" b="0" i="0" dirty="0">
+                <a:solidFill>
+                  <a:srgbClr val="333333"/>
+                </a:solidFill>
+                <a:ea typeface="Meiryo"/>
+              </a:rPr>
+              <a:t>など、責務の境界を具体的に置く。</a:t>
+            </a:r>
+          </a:p>
+        </p:txBody>
+      </p:sp>
+      <p:sp>
+        <p:nvSpPr>
+          <p:cNvPr id="17" name="Rectangle 16"/>
+          <p:cNvSpPr/>
+          <p:nvPr/>
+        </p:nvSpPr>
+        <p:spPr>
+          <a:xfrm>
+            <a:off x="4608576" y="1974189"/>
+            <a:ext cx="2148840" cy="2638958"/>
+          </a:xfrm>
+          <a:prstGeom prst="rect">
+            <a:avLst/>
+          </a:prstGeom>
+          <a:solidFill>
+            <a:srgbClr val="F5F5F5"/>
+          </a:solidFill>
+          <a:ln w="9525">
+            <a:solidFill>
+              <a:srgbClr val="E0E0E0"/>
+            </a:solidFill>
+          </a:ln>
+          <a:effectLst/>
+        </p:spPr>
+        <p:style>
+          <a:lnRef idx="1">
+            <a:schemeClr val="accent1"/>
+          </a:lnRef>
+          <a:fillRef idx="3">
+            <a:schemeClr val="accent1"/>
+          </a:fillRef>
+          <a:effectRef idx="2">
+            <a:schemeClr val="accent1"/>
+          </a:effectRef>
+          <a:fontRef idx="minor">
+            <a:schemeClr val="lt1"/>
+          </a:fontRef>
+        </p:style>
+        <p:txBody>
+          <a:bodyPr rtlCol="0" anchor="ctr"/>
+          <a:lstStyle/>
+          <a:p>
+            <a:pPr algn="ctr"/>
+          </a:p>
+        </p:txBody>
+      </p:sp>
+      <p:sp>
+        <p:nvSpPr>
+          <p:cNvPr id="18" name="TextBox 17"/>
+          <p:cNvSpPr txBox="1"/>
+          <p:nvPr/>
+        </p:nvSpPr>
+        <p:spPr>
+          <a:xfrm>
+            <a:off x="4745736" y="2083917"/>
+            <a:ext cx="1874520" cy="2419502"/>
+          </a:xfrm>
+          <a:prstGeom prst="rect">
+            <a:avLst/>
+          </a:prstGeom>
+          <a:noFill/>
+          <a:effectLst/>
+        </p:spPr>
+        <p:txBody>
+          <a:bodyPr wrap="square" lIns="0" rIns="0" tIns="0" bIns="0">
+            <a:noAutofit/>
+          </a:bodyPr>
+          <a:lstStyle/>
+          <a:p>
+            <a:pPr>
+              <a:spcBef>
+                <a:spcPts val="0"/>
+              </a:spcBef>
+              <a:spcAft>
+                <a:spcPts val="400"/>
+              </a:spcAft>
+              <a:buNone/>
+              <a:lnSpc>
+                <a:spcPts val="1980"/>
+              </a:lnSpc>
+            </a:pPr>
+            <a:r>
+              <a:rPr lang="ja-JP" sz="1100" b="0" i="0" dirty="0">
+                <a:solidFill>
+                  <a:srgbClr val="333333"/>
+                </a:solidFill>
+                <a:ea typeface="Meiryo"/>
+              </a:rPr>
+              <a:t>本番の</a:t>
+            </a:r>
+            <a:r>
+              <a:rPr lang="en-US" sz="1100" b="0" i="0" dirty="0">
+                <a:solidFill>
+                  <a:srgbClr val="333333"/>
+                </a:solidFill>
+                <a:latin typeface="Consolas"/>
+              </a:rPr>
+              <a:t>DATABASE_URL</a:t>
+            </a:r>
+            <a:r>
+              <a:rPr lang="ja-JP" sz="1100" b="0" i="0" dirty="0">
+                <a:solidFill>
+                  <a:srgbClr val="333333"/>
+                </a:solidFill>
+                <a:ea typeface="Meiryo"/>
+              </a:rPr>
+              <a:t>や個人情報ログなど、事故になりやすい対象を先に縛る。</a:t>
+            </a:r>
+          </a:p>
+        </p:txBody>
+      </p:sp>
+      <p:sp>
+        <p:nvSpPr>
+          <p:cNvPr id="19" name="Rectangle 18"/>
+          <p:cNvSpPr/>
+          <p:nvPr/>
+        </p:nvSpPr>
+        <p:spPr>
+          <a:xfrm>
+            <a:off x="6830568" y="1974189"/>
+            <a:ext cx="2148840" cy="2638958"/>
+          </a:xfrm>
+          <a:prstGeom prst="rect">
+            <a:avLst/>
+          </a:prstGeom>
+          <a:solidFill>
+            <a:srgbClr val="F5F5F5"/>
+          </a:solidFill>
+          <a:ln w="9525">
+            <a:solidFill>
+              <a:srgbClr val="E0E0E0"/>
+            </a:solidFill>
+          </a:ln>
+          <a:effectLst/>
+        </p:spPr>
+        <p:style>
+          <a:lnRef idx="1">
+            <a:schemeClr val="accent1"/>
+          </a:lnRef>
+          <a:fillRef idx="3">
+            <a:schemeClr val="accent1"/>
+          </a:fillRef>
+          <a:effectRef idx="2">
+            <a:schemeClr val="accent1"/>
+          </a:effectRef>
+          <a:fontRef idx="minor">
+            <a:schemeClr val="lt1"/>
+          </a:fontRef>
+        </p:style>
+        <p:txBody>
+          <a:bodyPr rtlCol="0" anchor="ctr"/>
+          <a:lstStyle/>
+          <a:p>
+            <a:pPr algn="ctr"/>
+          </a:p>
+        </p:txBody>
+      </p:sp>
+      <p:sp>
+        <p:nvSpPr>
+          <p:cNvPr id="20" name="TextBox 19"/>
+          <p:cNvSpPr txBox="1"/>
+          <p:nvPr/>
+        </p:nvSpPr>
+        <p:spPr>
+          <a:xfrm>
+            <a:off x="6967728" y="2083917"/>
+            <a:ext cx="1874520" cy="2419502"/>
+          </a:xfrm>
+          <a:prstGeom prst="rect">
+            <a:avLst/>
+          </a:prstGeom>
+          <a:noFill/>
+          <a:effectLst/>
+        </p:spPr>
+        <p:txBody>
+          <a:bodyPr wrap="square" lIns="0" rIns="0" tIns="0" bIns="0">
+            <a:noAutofit/>
+          </a:bodyPr>
+          <a:lstStyle/>
+          <a:p>
+            <a:pPr>
+              <a:spcBef>
+                <a:spcPts val="0"/>
+              </a:spcBef>
+              <a:spcAft>
+                <a:spcPts val="400"/>
+              </a:spcAft>
+              <a:buNone/>
+              <a:lnSpc>
+                <a:spcPts val="1980"/>
+              </a:lnSpc>
+            </a:pPr>
+            <a:r>
+              <a:rPr lang="ja-JP" sz="1100" b="0" i="0" dirty="0">
+                <a:solidFill>
+                  <a:srgbClr val="333333"/>
+                </a:solidFill>
+                <a:ea typeface="Meiryo"/>
+              </a:rPr>
+              <a:t>関連テスト、</a:t>
+            </a:r>
+            <a:r>
+              <a:rPr lang="en-US" sz="1100" b="0" i="0" dirty="0">
+                <a:solidFill>
+                  <a:srgbClr val="333333"/>
+                </a:solidFill>
                 <a:latin typeface="Segoe UI"/>
               </a:rPr>
-              <a:t>2</a:t>
+              <a:t>lint</a:t>
             </a:r>
             <a:r>
               <a:rPr lang="ja-JP" sz="1100" b="0" i="0" dirty="0">
@@ -13490,7 +12592,575 @@
                 </a:solidFill>
                 <a:ea typeface="Meiryo"/>
               </a:rPr>
-              <a:t>回言ったらルール化する。</a:t>
+              <a:t>、</a:t>
+            </a:r>
+            <a:r>
+              <a:rPr lang="en-US" sz="1100" b="0" i="0" dirty="0">
+                <a:solidFill>
+                  <a:srgbClr val="333333"/>
+                </a:solidFill>
+                <a:latin typeface="Segoe UI"/>
+              </a:rPr>
+              <a:t>typecheck</a:t>
+            </a:r>
+            <a:r>
+              <a:rPr lang="ja-JP" sz="1100" b="0" i="0" dirty="0">
+                <a:solidFill>
+                  <a:srgbClr val="333333"/>
+                </a:solidFill>
+                <a:ea typeface="Meiryo"/>
+              </a:rPr>
+              <a:t>の順に確認し、失敗時は修正して再実行する。</a:t>
+            </a:r>
+          </a:p>
+        </p:txBody>
+      </p:sp>
+      <p:sp>
+        <p:nvSpPr>
+          <p:cNvPr id="21" name="Rectangle 20"/>
+          <p:cNvSpPr/>
+          <p:nvPr/>
+        </p:nvSpPr>
+        <p:spPr>
+          <a:xfrm>
+            <a:off x="0" y="4777740"/>
+            <a:ext cx="9144000" cy="9525"/>
+          </a:xfrm>
+          <a:prstGeom prst="rect">
+            <a:avLst/>
+          </a:prstGeom>
+          <a:solidFill>
+            <a:srgbClr val="E0E0E0"/>
+          </a:solidFill>
+          <a:ln>
+            <a:noFill/>
+          </a:ln>
+          <a:effectLst/>
+        </p:spPr>
+        <p:style>
+          <a:lnRef idx="1">
+            <a:schemeClr val="accent1"/>
+          </a:lnRef>
+          <a:fillRef idx="3">
+            <a:schemeClr val="accent1"/>
+          </a:fillRef>
+          <a:effectRef idx="2">
+            <a:schemeClr val="accent1"/>
+          </a:effectRef>
+          <a:fontRef idx="minor">
+            <a:schemeClr val="lt1"/>
+          </a:fontRef>
+        </p:style>
+        <p:txBody>
+          <a:bodyPr rtlCol="0" anchor="ctr"/>
+          <a:lstStyle/>
+          <a:p>
+            <a:pPr algn="ctr"/>
+          </a:p>
+        </p:txBody>
+      </p:sp>
+      <p:sp>
+        <p:nvSpPr>
+          <p:cNvPr id="22" name="TextBox 21"/>
+          <p:cNvSpPr txBox="1"/>
+          <p:nvPr/>
+        </p:nvSpPr>
+        <p:spPr>
+          <a:xfrm>
+            <a:off x="228600" y="4823459"/>
+            <a:ext cx="1828800" cy="274320"/>
+          </a:xfrm>
+          <a:prstGeom prst="rect">
+            <a:avLst/>
+          </a:prstGeom>
+          <a:noFill/>
+        </p:spPr>
+        <p:txBody>
+          <a:bodyPr wrap="none" anchor="ctr" lIns="0" rIns="0" tIns="0" bIns="0">
+            <a:spAutoFit/>
+          </a:bodyPr>
+          <a:lstStyle/>
+          <a:p>
+            <a:fld id="{91371E8C-3D71-465B-8ACC-F46B16D5EAB9}" type="slidenum">
+              <a:rPr lang="ja-JP" smtClean="0" sz="1000">
+                <a:solidFill>
+                  <a:srgbClr val="888888"/>
+                </a:solidFill>
+              </a:rPr>
+              <a:t>&lt;#&gt;</a:t>
+            </a:fld>
+            <a:r>
+              <a:rPr lang="ja-JP" smtClean="0" sz="1000">
+                <a:solidFill>
+                  <a:srgbClr val="888888"/>
+                </a:solidFill>
+              </a:rPr>
+              <a:t>/</a:t>
+            </a:r>
+            <a:fld id="{2CF2DA0B-97A7-4F5E-8C28-D1E1D15E9D04}" type="slidecount">
+              <a:rPr lang="ja-JP" smtClean="0" sz="1000">
+                <a:solidFill>
+                  <a:srgbClr val="888888"/>
+                </a:solidFill>
+              </a:rPr>
+              <a:t>11</a:t>
+            </a:fld>
+          </a:p>
+        </p:txBody>
+      </p:sp>
+      <p:pic>
+        <p:nvPicPr>
+          <p:cNvPr id="23" name="Picture 22" descr="logo.png"/>
+          <p:cNvPicPr>
+            <a:picLocks noChangeAspect="1"/>
+          </p:cNvPicPr>
+          <p:nvPr/>
+        </p:nvPicPr>
+        <p:blipFill>
+          <a:blip r:embed="rId2"/>
+          <a:stretch>
+            <a:fillRect/>
+          </a:stretch>
+        </p:blipFill>
+        <p:spPr>
+          <a:xfrm>
+            <a:off x="8001000" y="4846320"/>
+            <a:ext cx="762000" cy="228600"/>
+          </a:xfrm>
+          <a:prstGeom prst="rect">
+            <a:avLst/>
+          </a:prstGeom>
+          <a:effectLst/>
+        </p:spPr>
+      </p:pic>
+    </p:spTree>
+  </p:cSld>
+  <p:clrMapOvr>
+    <a:masterClrMapping/>
+  </p:clrMapOvr>
+</p:sld>
+</file>
+
+<file path=ppt/slides/slide8.xml><?xml version="1.0" encoding="utf-8"?>
+<p:sld xmlns:a="http://schemas.openxmlformats.org/drawingml/2006/main" xmlns:p="http://schemas.openxmlformats.org/presentationml/2006/main" xmlns:r="http://schemas.openxmlformats.org/officeDocument/2006/relationships">
+  <p:cSld>
+    <p:bg>
+      <p:bgPr>
+        <a:solidFill>
+          <a:srgbClr val="FFFFFF"/>
+        </a:solidFill>
+        <a:effectLst/>
+      </p:bgPr>
+    </p:bg>
+    <p:spTree>
+      <p:nvGrpSpPr>
+        <p:cNvPr id="1" name=""/>
+        <p:cNvGrpSpPr/>
+        <p:nvPr/>
+      </p:nvGrpSpPr>
+      <p:grpSpPr/>
+      <p:sp>
+        <p:nvSpPr>
+          <p:cNvPr id="2" name="Rectangle 1"/>
+          <p:cNvSpPr/>
+          <p:nvPr/>
+        </p:nvSpPr>
+        <p:spPr>
+          <a:xfrm>
+            <a:off x="0" y="0"/>
+            <a:ext cx="9144000" cy="777240"/>
+          </a:xfrm>
+          <a:prstGeom prst="rect">
+            <a:avLst/>
+          </a:prstGeom>
+          <a:solidFill>
+            <a:srgbClr val="4A4A4A"/>
+          </a:solidFill>
+          <a:ln>
+            <a:noFill/>
+          </a:ln>
+          <a:effectLst/>
+        </p:spPr>
+        <p:style>
+          <a:lnRef idx="1">
+            <a:schemeClr val="accent1"/>
+          </a:lnRef>
+          <a:fillRef idx="3">
+            <a:schemeClr val="accent1"/>
+          </a:fillRef>
+          <a:effectRef idx="2">
+            <a:schemeClr val="accent1"/>
+          </a:effectRef>
+          <a:fontRef idx="minor">
+            <a:schemeClr val="lt1"/>
+          </a:fontRef>
+        </p:style>
+        <p:txBody>
+          <a:bodyPr rtlCol="0" anchor="ctr"/>
+          <a:lstStyle/>
+          <a:p>
+            <a:pPr algn="ctr"/>
+          </a:p>
+        </p:txBody>
+      </p:sp>
+      <p:sp>
+        <p:nvSpPr>
+          <p:cNvPr id="3" name="TextBox 2"/>
+          <p:cNvSpPr txBox="1"/>
+          <p:nvPr/>
+        </p:nvSpPr>
+        <p:spPr>
+          <a:xfrm>
+            <a:off x="228600" y="85039"/>
+            <a:ext cx="8686800" cy="411480"/>
+          </a:xfrm>
+          <a:prstGeom prst="rect">
+            <a:avLst/>
+          </a:prstGeom>
+          <a:noFill/>
+          <a:effectLst/>
+        </p:spPr>
+        <p:txBody>
+          <a:bodyPr wrap="square" lIns="0" rIns="0" tIns="0" bIns="0" anchor="ctr">
+            <a:noAutofit/>
+          </a:bodyPr>
+          <a:lstStyle/>
+          <a:p>
+            <a:r>
+              <a:rPr lang="ja-JP" sz="2400" b="1" i="0" dirty="0">
+                <a:solidFill>
+                  <a:srgbClr val="FFFFFF"/>
+                </a:solidFill>
+                <a:ea typeface="Meiryo"/>
+              </a:rPr>
+              <a:t>スコープ分離でノイズを減らす</a:t>
+            </a:r>
+          </a:p>
+        </p:txBody>
+      </p:sp>
+      <p:sp>
+        <p:nvSpPr>
+          <p:cNvPr id="4" name="TextBox 3"/>
+          <p:cNvSpPr txBox="1"/>
+          <p:nvPr/>
+        </p:nvSpPr>
+        <p:spPr>
+          <a:xfrm>
+            <a:off x="228600" y="523036"/>
+            <a:ext cx="8686800" cy="274320"/>
+          </a:xfrm>
+          <a:prstGeom prst="rect">
+            <a:avLst/>
+          </a:prstGeom>
+          <a:noFill/>
+          <a:effectLst/>
+        </p:spPr>
+        <p:txBody>
+          <a:bodyPr wrap="square" lIns="0" rIns="0" tIns="0" bIns="0" anchor="ctr">
+            <a:noAutofit/>
+          </a:bodyPr>
+          <a:lstStyle/>
+          <a:p>
+            <a:r>
+              <a:rPr lang="ja-JP" sz="1200" b="0" i="0" dirty="0">
+                <a:solidFill>
+                  <a:srgbClr val="FFFFFF"/>
+                </a:solidFill>
+                <a:ea typeface="Meiryo"/>
+              </a:rPr>
+              <a:t>ルートと領域別ルールを使い分ける</a:t>
+            </a:r>
+          </a:p>
+        </p:txBody>
+      </p:sp>
+      <p:sp>
+        <p:nvSpPr>
+          <p:cNvPr id="5" name="Rectangle 4"/>
+          <p:cNvSpPr/>
+          <p:nvPr/>
+        </p:nvSpPr>
+        <p:spPr>
+          <a:xfrm>
+            <a:off x="164592" y="941832"/>
+            <a:ext cx="8814816" cy="844677"/>
+          </a:xfrm>
+          <a:prstGeom prst="rect">
+            <a:avLst/>
+          </a:prstGeom>
+          <a:solidFill>
+            <a:srgbClr val="E8EDF2"/>
+          </a:solidFill>
+          <a:ln w="9525">
+            <a:solidFill>
+              <a:srgbClr val="E0E0E0"/>
+            </a:solidFill>
+          </a:ln>
+          <a:effectLst/>
+        </p:spPr>
+        <p:style>
+          <a:lnRef idx="1">
+            <a:schemeClr val="accent1"/>
+          </a:lnRef>
+          <a:fillRef idx="3">
+            <a:schemeClr val="accent1"/>
+          </a:fillRef>
+          <a:effectRef idx="2">
+            <a:schemeClr val="accent1"/>
+          </a:effectRef>
+          <a:fontRef idx="minor">
+            <a:schemeClr val="lt1"/>
+          </a:fontRef>
+        </p:style>
+        <p:txBody>
+          <a:bodyPr rtlCol="0" anchor="ctr"/>
+          <a:lstStyle/>
+          <a:p>
+            <a:pPr algn="ctr"/>
+          </a:p>
+        </p:txBody>
+      </p:sp>
+      <p:sp>
+        <p:nvSpPr>
+          <p:cNvPr id="6" name="TextBox 5"/>
+          <p:cNvSpPr txBox="1"/>
+          <p:nvPr/>
+        </p:nvSpPr>
+        <p:spPr>
+          <a:xfrm>
+            <a:off x="301751" y="1051560"/>
+            <a:ext cx="8540496" cy="625221"/>
+          </a:xfrm>
+          <a:prstGeom prst="rect">
+            <a:avLst/>
+          </a:prstGeom>
+          <a:noFill/>
+          <a:effectLst/>
+        </p:spPr>
+        <p:txBody>
+          <a:bodyPr wrap="square" lIns="0" rIns="0" tIns="0" bIns="0">
+            <a:noAutofit/>
+          </a:bodyPr>
+          <a:lstStyle/>
+          <a:p>
+            <a:pPr>
+              <a:spcBef>
+                <a:spcPts val="0"/>
+              </a:spcBef>
+              <a:spcAft>
+                <a:spcPts val="400"/>
+              </a:spcAft>
+              <a:buNone/>
+              <a:lnSpc>
+                <a:spcPts val="2160"/>
+              </a:lnSpc>
+            </a:pPr>
+            <a:r>
+              <a:rPr lang="ja-JP" sz="1200" b="0" i="0" dirty="0">
+                <a:solidFill>
+                  <a:srgbClr val="333333"/>
+                </a:solidFill>
+                <a:ea typeface="Meiryo"/>
+              </a:rPr>
+              <a:t>共通ルールと局所ルールを分けると、</a:t>
+            </a:r>
+            <a:r>
+              <a:rPr lang="en-US" sz="1200" b="0" i="0" dirty="0">
+                <a:solidFill>
+                  <a:srgbClr val="333333"/>
+                </a:solidFill>
+                <a:latin typeface="Segoe UI"/>
+              </a:rPr>
+              <a:t>AI</a:t>
+            </a:r>
+            <a:r>
+              <a:rPr lang="ja-JP" sz="1200" b="0" i="0" dirty="0">
+                <a:solidFill>
+                  <a:srgbClr val="333333"/>
+                </a:solidFill>
+                <a:ea typeface="Meiryo"/>
+              </a:rPr>
+              <a:t>は今の作業に関係する制約を優先しやすくなる。</a:t>
+            </a:r>
+          </a:p>
+        </p:txBody>
+      </p:sp>
+      <p:sp>
+        <p:nvSpPr>
+          <p:cNvPr id="7" name="Rectangle 6"/>
+          <p:cNvSpPr/>
+          <p:nvPr/>
+        </p:nvSpPr>
+        <p:spPr>
+          <a:xfrm>
+            <a:off x="164592" y="1859661"/>
+            <a:ext cx="2889504" cy="2753486"/>
+          </a:xfrm>
+          <a:prstGeom prst="rect">
+            <a:avLst/>
+          </a:prstGeom>
+          <a:solidFill>
+            <a:srgbClr val="F5F5F5"/>
+          </a:solidFill>
+          <a:ln w="9525">
+            <a:solidFill>
+              <a:srgbClr val="E0E0E0"/>
+            </a:solidFill>
+          </a:ln>
+          <a:effectLst/>
+        </p:spPr>
+        <p:style>
+          <a:lnRef idx="1">
+            <a:schemeClr val="accent1"/>
+          </a:lnRef>
+          <a:fillRef idx="3">
+            <a:schemeClr val="accent1"/>
+          </a:fillRef>
+          <a:effectRef idx="2">
+            <a:schemeClr val="accent1"/>
+          </a:effectRef>
+          <a:fontRef idx="minor">
+            <a:schemeClr val="lt1"/>
+          </a:fontRef>
+        </p:style>
+        <p:txBody>
+          <a:bodyPr rtlCol="0" anchor="ctr"/>
+          <a:lstStyle/>
+          <a:p>
+            <a:pPr algn="ctr"/>
+          </a:p>
+        </p:txBody>
+      </p:sp>
+      <p:sp>
+        <p:nvSpPr>
+          <p:cNvPr id="8" name="TextBox 7"/>
+          <p:cNvSpPr txBox="1"/>
+          <p:nvPr/>
+        </p:nvSpPr>
+        <p:spPr>
+          <a:xfrm>
+            <a:off x="301751" y="1969389"/>
+            <a:ext cx="2615184" cy="320040"/>
+          </a:xfrm>
+          <a:prstGeom prst="rect">
+            <a:avLst/>
+          </a:prstGeom>
+          <a:noFill/>
+          <a:effectLst/>
+        </p:spPr>
+        <p:txBody>
+          <a:bodyPr wrap="square" lIns="0" rIns="0" tIns="0" bIns="0" anchor="t">
+            <a:noAutofit/>
+          </a:bodyPr>
+          <a:lstStyle/>
+          <a:p>
+            <a:r>
+              <a:rPr lang="ja-JP" sz="1400" b="1" i="0" dirty="0">
+                <a:solidFill>
+                  <a:srgbClr val="333333"/>
+                </a:solidFill>
+                <a:ea typeface="Meiryo"/>
+              </a:rPr>
+              <a:t>ルート</a:t>
+            </a:r>
+            <a:r>
+              <a:rPr lang="en-US" sz="1400" b="1" i="0" dirty="0">
+                <a:solidFill>
+                  <a:srgbClr val="333333"/>
+                </a:solidFill>
+                <a:latin typeface="Segoe UI"/>
+              </a:rPr>
+              <a:t>CLAUDE.md</a:t>
+            </a:r>
+          </a:p>
+        </p:txBody>
+      </p:sp>
+      <p:sp>
+        <p:nvSpPr>
+          <p:cNvPr id="9" name="Rectangle 8"/>
+          <p:cNvSpPr/>
+          <p:nvPr/>
+        </p:nvSpPr>
+        <p:spPr>
+          <a:xfrm>
+            <a:off x="301751" y="2225421"/>
+            <a:ext cx="2615184" cy="12700"/>
+          </a:xfrm>
+          <a:prstGeom prst="rect">
+            <a:avLst/>
+          </a:prstGeom>
+          <a:solidFill>
+            <a:srgbClr val="E0E0E0"/>
+          </a:solidFill>
+          <a:ln>
+            <a:noFill/>
+          </a:ln>
+          <a:effectLst/>
+        </p:spPr>
+        <p:style>
+          <a:lnRef idx="1">
+            <a:schemeClr val="accent1"/>
+          </a:lnRef>
+          <a:fillRef idx="3">
+            <a:schemeClr val="accent1"/>
+          </a:fillRef>
+          <a:effectRef idx="2">
+            <a:schemeClr val="accent1"/>
+          </a:effectRef>
+          <a:fontRef idx="minor">
+            <a:schemeClr val="lt1"/>
+          </a:fontRef>
+        </p:style>
+        <p:txBody>
+          <a:bodyPr rtlCol="0" anchor="ctr"/>
+          <a:lstStyle/>
+          <a:p>
+            <a:pPr algn="ctr"/>
+          </a:p>
+        </p:txBody>
+      </p:sp>
+      <p:sp>
+        <p:nvSpPr>
+          <p:cNvPr id="10" name="TextBox 9"/>
+          <p:cNvSpPr txBox="1"/>
+          <p:nvPr/>
+        </p:nvSpPr>
+        <p:spPr>
+          <a:xfrm>
+            <a:off x="301751" y="2298573"/>
+            <a:ext cx="2615184" cy="2204847"/>
+          </a:xfrm>
+          <a:prstGeom prst="rect">
+            <a:avLst/>
+          </a:prstGeom>
+          <a:noFill/>
+          <a:effectLst/>
+        </p:spPr>
+        <p:txBody>
+          <a:bodyPr wrap="square" lIns="0" rIns="0" tIns="0" bIns="0">
+            <a:noAutofit/>
+          </a:bodyPr>
+          <a:lstStyle/>
+          <a:p>
+            <a:pPr>
+              <a:spcBef>
+                <a:spcPts val="0"/>
+              </a:spcBef>
+              <a:spcAft>
+                <a:spcPts val="400"/>
+              </a:spcAft>
+              <a:buNone/>
+              <a:lnSpc>
+                <a:spcPts val="1980"/>
+              </a:lnSpc>
+            </a:pPr>
+            <a:r>
+              <a:rPr lang="ja-JP" sz="1100" b="0" i="0" dirty="0">
+                <a:solidFill>
+                  <a:srgbClr val="333333"/>
+                </a:solidFill>
+                <a:ea typeface="Meiryo"/>
+              </a:rPr>
+              <a:t>プロジェクト全体で常に守る基準を置く。</a:t>
             </a:r>
           </a:p>
           <a:p>
@@ -13513,7 +13183,7 @@
                 </a:solidFill>
                 <a:ea typeface="Meiryo"/>
               </a:rPr>
-              <a:t>会話で繰り返す負担を減らす</a:t>
+              <a:t>目的、技術スタック、共通コマンドを集約する。</a:t>
             </a:r>
           </a:p>
           <a:p>
@@ -13536,21 +13206,21 @@
                 </a:solidFill>
                 <a:ea typeface="Meiryo"/>
               </a:rPr>
-              <a:t>属人的な注意を標準へ変える</a:t>
-            </a:r>
-          </a:p>
-        </p:txBody>
-      </p:sp>
-      <p:sp>
-        <p:nvSpPr>
-          <p:cNvPr id="13" name="Rectangle 12"/>
+              <a:t>破壊的操作やセキュリティ制約を明示する。</a:t>
+            </a:r>
+          </a:p>
+        </p:txBody>
+      </p:sp>
+      <p:sp>
+        <p:nvSpPr>
+          <p:cNvPr id="11" name="Rectangle 10"/>
           <p:cNvSpPr/>
           <p:nvPr/>
         </p:nvSpPr>
         <p:spPr>
           <a:xfrm>
-            <a:off x="3127248" y="1974189"/>
-            <a:ext cx="2889504" cy="2638958"/>
+            <a:off x="3127248" y="1859661"/>
+            <a:ext cx="2889504" cy="2753486"/>
           </a:xfrm>
           <a:prstGeom prst="rect">
             <a:avLst/>
@@ -13589,14 +13259,93 @@
       </p:sp>
       <p:sp>
         <p:nvSpPr>
+          <p:cNvPr id="12" name="TextBox 11"/>
+          <p:cNvSpPr txBox="1"/>
+          <p:nvPr/>
+        </p:nvSpPr>
+        <p:spPr>
+          <a:xfrm>
+            <a:off x="3264408" y="1969389"/>
+            <a:ext cx="2615184" cy="320040"/>
+          </a:xfrm>
+          <a:prstGeom prst="rect">
+            <a:avLst/>
+          </a:prstGeom>
+          <a:noFill/>
+          <a:effectLst/>
+        </p:spPr>
+        <p:txBody>
+          <a:bodyPr wrap="square" lIns="0" rIns="0" tIns="0" bIns="0" anchor="t">
+            <a:noAutofit/>
+          </a:bodyPr>
+          <a:lstStyle/>
+          <a:p>
+            <a:r>
+              <a:rPr lang="en-US" sz="1400" b="1" i="0" dirty="0">
+                <a:solidFill>
+                  <a:srgbClr val="333333"/>
+                </a:solidFill>
+                <a:latin typeface="Segoe UI"/>
+              </a:rPr>
+              <a:t>frontend.md</a:t>
+            </a:r>
+          </a:p>
+        </p:txBody>
+      </p:sp>
+      <p:sp>
+        <p:nvSpPr>
+          <p:cNvPr id="13" name="Rectangle 12"/>
+          <p:cNvSpPr/>
+          <p:nvPr/>
+        </p:nvSpPr>
+        <p:spPr>
+          <a:xfrm>
+            <a:off x="3264408" y="2225421"/>
+            <a:ext cx="2615184" cy="12700"/>
+          </a:xfrm>
+          <a:prstGeom prst="rect">
+            <a:avLst/>
+          </a:prstGeom>
+          <a:solidFill>
+            <a:srgbClr val="E0E0E0"/>
+          </a:solidFill>
+          <a:ln>
+            <a:noFill/>
+          </a:ln>
+          <a:effectLst/>
+        </p:spPr>
+        <p:style>
+          <a:lnRef idx="1">
+            <a:schemeClr val="accent1"/>
+          </a:lnRef>
+          <a:fillRef idx="3">
+            <a:schemeClr val="accent1"/>
+          </a:fillRef>
+          <a:effectRef idx="2">
+            <a:schemeClr val="accent1"/>
+          </a:effectRef>
+          <a:fontRef idx="minor">
+            <a:schemeClr val="lt1"/>
+          </a:fontRef>
+        </p:style>
+        <p:txBody>
+          <a:bodyPr rtlCol="0" anchor="ctr"/>
+          <a:lstStyle/>
+          <a:p>
+            <a:pPr algn="ctr"/>
+          </a:p>
+        </p:txBody>
+      </p:sp>
+      <p:sp>
+        <p:nvSpPr>
           <p:cNvPr id="14" name="TextBox 13"/>
           <p:cNvSpPr txBox="1"/>
           <p:nvPr/>
         </p:nvSpPr>
         <p:spPr>
           <a:xfrm>
-            <a:off x="3264408" y="2083917"/>
-            <a:ext cx="2615184" cy="2419502"/>
+            <a:off x="3264408" y="2298573"/>
+            <a:ext cx="2615184" cy="2204847"/>
           </a:xfrm>
           <a:prstGeom prst="rect">
             <a:avLst/>
@@ -13623,13 +13372,22 @@
               </a:lnSpc>
             </a:pPr>
             <a:r>
+              <a:rPr lang="en-US" sz="1100" b="0" i="0" dirty="0">
+                <a:solidFill>
+                  <a:srgbClr val="333333"/>
+                </a:solidFill>
+                <a:latin typeface="Segoe UI"/>
+              </a:rPr>
+              <a:t>UI</a:t>
+            </a:r>
+            <a:r>
               <a:rPr lang="ja-JP" sz="1100" b="0" i="0" dirty="0">
                 <a:solidFill>
                   <a:srgbClr val="333333"/>
                 </a:solidFill>
                 <a:ea typeface="Meiryo"/>
               </a:rPr>
-              <a:t>古い前提や重複を定期的に消す。</a:t>
+              <a:t>領域にだけ効く判断軸を置く。</a:t>
             </a:r>
           </a:p>
           <a:p>
@@ -13652,7 +13410,25 @@
                 </a:solidFill>
                 <a:ea typeface="Meiryo"/>
               </a:rPr>
-              <a:t>使わない技術スタックを残さない</a:t>
+              <a:t>コンポーネント設計、状態管理、</a:t>
+            </a:r>
+            <a:r>
+              <a:rPr lang="en-US" sz="1100" b="0" i="0" dirty="0">
+                <a:solidFill>
+                  <a:srgbClr val="333333"/>
+                </a:solidFill>
+                <a:latin typeface="Segoe UI"/>
+              </a:rPr>
+              <a:t>CSS</a:t>
+            </a:r>
+            <a:r>
+              <a:rPr lang="ja-JP" sz="1100" b="0" i="0" dirty="0">
+                <a:solidFill>
+                  <a:srgbClr val="333333"/>
+                </a:solidFill>
+                <a:ea typeface="Meiryo"/>
+              </a:rPr>
+              <a:t>方針を整理する。</a:t>
             </a:r>
           </a:p>
           <a:p>
@@ -13675,7 +13451,7 @@
                 </a:solidFill>
                 <a:ea typeface="Meiryo"/>
               </a:rPr>
-              <a:t>重要ルールが埋もれる状態を避ける</a:t>
+              <a:t>見た目とアクセシビリティの基準を入れる。</a:t>
             </a:r>
           </a:p>
         </p:txBody>
@@ -13688,8 +13464,8 @@
         </p:nvSpPr>
         <p:spPr>
           <a:xfrm>
-            <a:off x="6089904" y="1974189"/>
-            <a:ext cx="2889504" cy="2638958"/>
+            <a:off x="6089904" y="1859661"/>
+            <a:ext cx="2889504" cy="2753486"/>
           </a:xfrm>
           <a:prstGeom prst="rect">
             <a:avLst/>
@@ -13734,8 +13510,87 @@
         </p:nvSpPr>
         <p:spPr>
           <a:xfrm>
-            <a:off x="6227064" y="2083917"/>
-            <a:ext cx="2615184" cy="2419502"/>
+            <a:off x="6227064" y="1969389"/>
+            <a:ext cx="2615184" cy="320040"/>
+          </a:xfrm>
+          <a:prstGeom prst="rect">
+            <a:avLst/>
+          </a:prstGeom>
+          <a:noFill/>
+          <a:effectLst/>
+        </p:spPr>
+        <p:txBody>
+          <a:bodyPr wrap="square" lIns="0" rIns="0" tIns="0" bIns="0" anchor="t">
+            <a:noAutofit/>
+          </a:bodyPr>
+          <a:lstStyle/>
+          <a:p>
+            <a:r>
+              <a:rPr lang="en-US" sz="1400" b="1" i="0" dirty="0">
+                <a:solidFill>
+                  <a:srgbClr val="333333"/>
+                </a:solidFill>
+                <a:latin typeface="Segoe UI"/>
+              </a:rPr>
+              <a:t>infra.md</a:t>
+            </a:r>
+          </a:p>
+        </p:txBody>
+      </p:sp>
+      <p:sp>
+        <p:nvSpPr>
+          <p:cNvPr id="17" name="Rectangle 16"/>
+          <p:cNvSpPr/>
+          <p:nvPr/>
+        </p:nvSpPr>
+        <p:spPr>
+          <a:xfrm>
+            <a:off x="6227064" y="2225421"/>
+            <a:ext cx="2615184" cy="12700"/>
+          </a:xfrm>
+          <a:prstGeom prst="rect">
+            <a:avLst/>
+          </a:prstGeom>
+          <a:solidFill>
+            <a:srgbClr val="E0E0E0"/>
+          </a:solidFill>
+          <a:ln>
+            <a:noFill/>
+          </a:ln>
+          <a:effectLst/>
+        </p:spPr>
+        <p:style>
+          <a:lnRef idx="1">
+            <a:schemeClr val="accent1"/>
+          </a:lnRef>
+          <a:fillRef idx="3">
+            <a:schemeClr val="accent1"/>
+          </a:fillRef>
+          <a:effectRef idx="2">
+            <a:schemeClr val="accent1"/>
+          </a:effectRef>
+          <a:fontRef idx="minor">
+            <a:schemeClr val="lt1"/>
+          </a:fontRef>
+        </p:style>
+        <p:txBody>
+          <a:bodyPr rtlCol="0" anchor="ctr"/>
+          <a:lstStyle/>
+          <a:p>
+            <a:pPr algn="ctr"/>
+          </a:p>
+        </p:txBody>
+      </p:sp>
+      <p:sp>
+        <p:nvSpPr>
+          <p:cNvPr id="18" name="TextBox 17"/>
+          <p:cNvSpPr txBox="1"/>
+          <p:nvPr/>
+        </p:nvSpPr>
+        <p:spPr>
+          <a:xfrm>
+            <a:off x="6227064" y="2298573"/>
+            <a:ext cx="2615184" cy="2204847"/>
           </a:xfrm>
           <a:prstGeom prst="rect">
             <a:avLst/>
@@ -13768,7 +13623,7 @@
                 </a:solidFill>
                 <a:ea typeface="Meiryo"/>
               </a:rPr>
-              <a:t>小さなタスクで振る舞いを試す。</a:t>
+              <a:t>スクリプトや環境操作の安全策を置く。</a:t>
             </a:r>
           </a:p>
           <a:p>
@@ -13785,13 +13640,40 @@
               </a:lnSpc>
             </a:pPr>
             <a:r>
+              <a:rPr lang="en-US" sz="1100" b="0" i="0" dirty="0">
+                <a:solidFill>
+                  <a:srgbClr val="333333"/>
+                </a:solidFill>
+                <a:latin typeface="Segoe UI"/>
+              </a:rPr>
+              <a:t>OS</a:t>
+            </a:r>
+            <a:r>
               <a:rPr lang="ja-JP" sz="1100" b="0" i="0" dirty="0">
                 <a:solidFill>
                   <a:srgbClr val="333333"/>
                 </a:solidFill>
                 <a:ea typeface="Meiryo"/>
               </a:rPr>
-              <a:t>ルールが効いているか観察する</a:t>
+              <a:t>、シェル、ログ、</a:t>
+            </a:r>
+            <a:r>
+              <a:rPr lang="en-US" sz="1100" b="0" i="0" dirty="0">
+                <a:solidFill>
+                  <a:srgbClr val="333333"/>
+                </a:solidFill>
+                <a:latin typeface="Segoe UI"/>
+              </a:rPr>
+              <a:t>dry-run</a:t>
+            </a:r>
+            <a:r>
+              <a:rPr lang="ja-JP" sz="1100" b="0" i="0" dirty="0">
+                <a:solidFill>
+                  <a:srgbClr val="333333"/>
+                </a:solidFill>
+                <a:ea typeface="Meiryo"/>
+              </a:rPr>
+              <a:t>の前提を固定する。</a:t>
             </a:r>
           </a:p>
           <a:p>
@@ -13814,14 +13696,14 @@
                 </a:solidFill>
                 <a:ea typeface="Meiryo"/>
               </a:rPr>
-              <a:t>期待と違う出力を次の改善材料にする</a:t>
-            </a:r>
-          </a:p>
-        </p:txBody>
-      </p:sp>
-      <p:sp>
-        <p:nvSpPr>
-          <p:cNvPr id="17" name="Rectangle 16"/>
+              <a:t>本番環境への影響を避ける手順を明記する。</a:t>
+            </a:r>
+          </a:p>
+        </p:txBody>
+      </p:sp>
+      <p:sp>
+        <p:nvSpPr>
+          <p:cNvPr id="19" name="Rectangle 18"/>
           <p:cNvSpPr/>
           <p:nvPr/>
         </p:nvSpPr>
@@ -13865,7 +13747,7 @@
       </p:sp>
       <p:sp>
         <p:nvSpPr>
-          <p:cNvPr id="18" name="TextBox 17"/>
+          <p:cNvPr id="20" name="TextBox 19"/>
           <p:cNvSpPr txBox="1"/>
           <p:nvPr/>
         </p:nvSpPr>
@@ -13885,7 +13767,7 @@
           </a:bodyPr>
           <a:lstStyle/>
           <a:p>
-            <a:fld id="{E19523F7-04D2-4D3A-A46B-606C3E2FECBA}" type="slidenum">
+            <a:fld id="{8955E3D1-43F0-4A3E-8836-B1EC139EA5C2}" type="slidenum">
               <a:rPr lang="ja-JP" smtClean="0" sz="1000">
                 <a:solidFill>
                   <a:srgbClr val="888888"/>
@@ -13901,13 +13783,1210 @@
               </a:rPr>
               <a:t>/</a:t>
             </a:r>
-            <a:fld id="{77EE441F-D6B9-437E-AE47-3F588910BAA5}" type="slidecount">
+            <a:fld id="{6101A070-B745-4646-8DCC-17663DFA490C}" type="slidecount">
               <a:rPr lang="ja-JP" smtClean="0" sz="1000">
                 <a:solidFill>
                   <a:srgbClr val="888888"/>
                 </a:solidFill>
               </a:rPr>
-              <a:t>10</a:t>
+              <a:t>11</a:t>
+            </a:fld>
+          </a:p>
+        </p:txBody>
+      </p:sp>
+      <p:pic>
+        <p:nvPicPr>
+          <p:cNvPr id="21" name="Picture 20" descr="logo.png"/>
+          <p:cNvPicPr>
+            <a:picLocks noChangeAspect="1"/>
+          </p:cNvPicPr>
+          <p:nvPr/>
+        </p:nvPicPr>
+        <p:blipFill>
+          <a:blip r:embed="rId2"/>
+          <a:stretch>
+            <a:fillRect/>
+          </a:stretch>
+        </p:blipFill>
+        <p:spPr>
+          <a:xfrm>
+            <a:off x="8001000" y="4846320"/>
+            <a:ext cx="762000" cy="228600"/>
+          </a:xfrm>
+          <a:prstGeom prst="rect">
+            <a:avLst/>
+          </a:prstGeom>
+          <a:effectLst/>
+        </p:spPr>
+      </p:pic>
+    </p:spTree>
+  </p:cSld>
+  <p:clrMapOvr>
+    <a:masterClrMapping/>
+  </p:clrMapOvr>
+</p:sld>
+</file>
+
+<file path=ppt/slides/slide9.xml><?xml version="1.0" encoding="utf-8"?>
+<p:sld xmlns:a="http://schemas.openxmlformats.org/drawingml/2006/main" xmlns:p="http://schemas.openxmlformats.org/presentationml/2006/main" xmlns:r="http://schemas.openxmlformats.org/officeDocument/2006/relationships">
+  <p:cSld>
+    <p:bg>
+      <p:bgPr>
+        <a:solidFill>
+          <a:srgbClr val="FFFFFF"/>
+        </a:solidFill>
+        <a:effectLst/>
+      </p:bgPr>
+    </p:bg>
+    <p:spTree>
+      <p:nvGrpSpPr>
+        <p:cNvPr id="1" name=""/>
+        <p:cNvGrpSpPr/>
+        <p:nvPr/>
+      </p:nvGrpSpPr>
+      <p:grpSpPr/>
+      <p:sp>
+        <p:nvSpPr>
+          <p:cNvPr id="2" name="Rectangle 1"/>
+          <p:cNvSpPr/>
+          <p:nvPr/>
+        </p:nvSpPr>
+        <p:spPr>
+          <a:xfrm>
+            <a:off x="0" y="0"/>
+            <a:ext cx="9144000" cy="777240"/>
+          </a:xfrm>
+          <a:prstGeom prst="rect">
+            <a:avLst/>
+          </a:prstGeom>
+          <a:solidFill>
+            <a:srgbClr val="4A4A4A"/>
+          </a:solidFill>
+          <a:ln>
+            <a:noFill/>
+          </a:ln>
+          <a:effectLst/>
+        </p:spPr>
+        <p:style>
+          <a:lnRef idx="1">
+            <a:schemeClr val="accent1"/>
+          </a:lnRef>
+          <a:fillRef idx="3">
+            <a:schemeClr val="accent1"/>
+          </a:fillRef>
+          <a:effectRef idx="2">
+            <a:schemeClr val="accent1"/>
+          </a:effectRef>
+          <a:fontRef idx="minor">
+            <a:schemeClr val="lt1"/>
+          </a:fontRef>
+        </p:style>
+        <p:txBody>
+          <a:bodyPr rtlCol="0" anchor="ctr"/>
+          <a:lstStyle/>
+          <a:p>
+            <a:pPr algn="ctr"/>
+          </a:p>
+        </p:txBody>
+      </p:sp>
+      <p:sp>
+        <p:nvSpPr>
+          <p:cNvPr id="3" name="TextBox 2"/>
+          <p:cNvSpPr txBox="1"/>
+          <p:nvPr/>
+        </p:nvSpPr>
+        <p:spPr>
+          <a:xfrm>
+            <a:off x="228600" y="85039"/>
+            <a:ext cx="8686800" cy="411480"/>
+          </a:xfrm>
+          <a:prstGeom prst="rect">
+            <a:avLst/>
+          </a:prstGeom>
+          <a:noFill/>
+          <a:effectLst/>
+        </p:spPr>
+        <p:txBody>
+          <a:bodyPr wrap="square" lIns="0" rIns="0" tIns="0" bIns="0" anchor="ctr">
+            <a:noAutofit/>
+          </a:bodyPr>
+          <a:lstStyle/>
+          <a:p>
+            <a:r>
+              <a:rPr lang="ja-JP" sz="2400" b="1" i="0" dirty="0">
+                <a:solidFill>
+                  <a:srgbClr val="FFFFFF"/>
+                </a:solidFill>
+                <a:ea typeface="Meiryo"/>
+              </a:rPr>
+              <a:t>用途別テンプレートは判断軸を変える</a:t>
+            </a:r>
+          </a:p>
+        </p:txBody>
+      </p:sp>
+      <p:sp>
+        <p:nvSpPr>
+          <p:cNvPr id="4" name="TextBox 3"/>
+          <p:cNvSpPr txBox="1"/>
+          <p:nvPr/>
+        </p:nvSpPr>
+        <p:spPr>
+          <a:xfrm>
+            <a:off x="228600" y="523036"/>
+            <a:ext cx="8686800" cy="274320"/>
+          </a:xfrm>
+          <a:prstGeom prst="rect">
+            <a:avLst/>
+          </a:prstGeom>
+          <a:noFill/>
+          <a:effectLst/>
+        </p:spPr>
+        <p:txBody>
+          <a:bodyPr wrap="square" lIns="0" rIns="0" tIns="0" bIns="0" anchor="ctr">
+            <a:noAutofit/>
+          </a:bodyPr>
+          <a:lstStyle/>
+          <a:p>
+            <a:r>
+              <a:rPr lang="en-US" sz="1200" b="0" i="0" dirty="0">
+                <a:solidFill>
+                  <a:srgbClr val="FFFFFF"/>
+                </a:solidFill>
+                <a:latin typeface="Segoe UI"/>
+              </a:rPr>
+              <a:t>Web</a:t>
+            </a:r>
+            <a:r>
+              <a:rPr lang="ja-JP" sz="1200" b="0" i="0" dirty="0">
+                <a:solidFill>
+                  <a:srgbClr val="FFFFFF"/>
+                </a:solidFill>
+                <a:ea typeface="Meiryo"/>
+              </a:rPr>
+              <a:t>、分析、自動化で重視点が異なる</a:t>
+            </a:r>
+          </a:p>
+        </p:txBody>
+      </p:sp>
+      <p:sp>
+        <p:nvSpPr>
+          <p:cNvPr id="5" name="Rectangle 4"/>
+          <p:cNvSpPr/>
+          <p:nvPr/>
+        </p:nvSpPr>
+        <p:spPr>
+          <a:xfrm>
+            <a:off x="164592" y="941832"/>
+            <a:ext cx="2889504" cy="3671315"/>
+          </a:xfrm>
+          <a:prstGeom prst="rect">
+            <a:avLst/>
+          </a:prstGeom>
+          <a:solidFill>
+            <a:srgbClr val="F5F5F5"/>
+          </a:solidFill>
+          <a:ln w="9525">
+            <a:solidFill>
+              <a:srgbClr val="E0E0E0"/>
+            </a:solidFill>
+          </a:ln>
+          <a:effectLst/>
+        </p:spPr>
+        <p:style>
+          <a:lnRef idx="1">
+            <a:schemeClr val="accent1"/>
+          </a:lnRef>
+          <a:fillRef idx="3">
+            <a:schemeClr val="accent1"/>
+          </a:fillRef>
+          <a:effectRef idx="2">
+            <a:schemeClr val="accent1"/>
+          </a:effectRef>
+          <a:fontRef idx="minor">
+            <a:schemeClr val="lt1"/>
+          </a:fontRef>
+        </p:style>
+        <p:txBody>
+          <a:bodyPr rtlCol="0" anchor="ctr"/>
+          <a:lstStyle/>
+          <a:p>
+            <a:pPr algn="ctr"/>
+          </a:p>
+        </p:txBody>
+      </p:sp>
+      <p:sp>
+        <p:nvSpPr>
+          <p:cNvPr id="6" name="TextBox 5"/>
+          <p:cNvSpPr txBox="1"/>
+          <p:nvPr/>
+        </p:nvSpPr>
+        <p:spPr>
+          <a:xfrm>
+            <a:off x="301751" y="1051560"/>
+            <a:ext cx="2615184" cy="320040"/>
+          </a:xfrm>
+          <a:prstGeom prst="rect">
+            <a:avLst/>
+          </a:prstGeom>
+          <a:noFill/>
+          <a:effectLst/>
+        </p:spPr>
+        <p:txBody>
+          <a:bodyPr wrap="square" lIns="0" rIns="0" tIns="0" bIns="0" anchor="t">
+            <a:noAutofit/>
+          </a:bodyPr>
+          <a:lstStyle/>
+          <a:p>
+            <a:r>
+              <a:rPr lang="en-US" sz="1400" b="1" i="0" dirty="0">
+                <a:solidFill>
+                  <a:srgbClr val="333333"/>
+                </a:solidFill>
+                <a:latin typeface="Segoe UI"/>
+              </a:rPr>
+              <a:t>Web</a:t>
+            </a:r>
+            <a:r>
+              <a:rPr lang="ja-JP" sz="1400" b="1" i="0" dirty="0">
+                <a:solidFill>
+                  <a:srgbClr val="333333"/>
+                </a:solidFill>
+                <a:ea typeface="Meiryo"/>
+              </a:rPr>
+              <a:t>アプリ</a:t>
+            </a:r>
+          </a:p>
+        </p:txBody>
+      </p:sp>
+      <p:sp>
+        <p:nvSpPr>
+          <p:cNvPr id="7" name="Rectangle 6"/>
+          <p:cNvSpPr/>
+          <p:nvPr/>
+        </p:nvSpPr>
+        <p:spPr>
+          <a:xfrm>
+            <a:off x="301751" y="1307592"/>
+            <a:ext cx="2615184" cy="12700"/>
+          </a:xfrm>
+          <a:prstGeom prst="rect">
+            <a:avLst/>
+          </a:prstGeom>
+          <a:solidFill>
+            <a:srgbClr val="E0E0E0"/>
+          </a:solidFill>
+          <a:ln>
+            <a:noFill/>
+          </a:ln>
+          <a:effectLst/>
+        </p:spPr>
+        <p:style>
+          <a:lnRef idx="1">
+            <a:schemeClr val="accent1"/>
+          </a:lnRef>
+          <a:fillRef idx="3">
+            <a:schemeClr val="accent1"/>
+          </a:fillRef>
+          <a:effectRef idx="2">
+            <a:schemeClr val="accent1"/>
+          </a:effectRef>
+          <a:fontRef idx="minor">
+            <a:schemeClr val="lt1"/>
+          </a:fontRef>
+        </p:style>
+        <p:txBody>
+          <a:bodyPr rtlCol="0" anchor="ctr"/>
+          <a:lstStyle/>
+          <a:p>
+            <a:pPr algn="ctr"/>
+          </a:p>
+        </p:txBody>
+      </p:sp>
+      <p:sp>
+        <p:nvSpPr>
+          <p:cNvPr id="8" name="TextBox 7"/>
+          <p:cNvSpPr txBox="1"/>
+          <p:nvPr/>
+        </p:nvSpPr>
+        <p:spPr>
+          <a:xfrm>
+            <a:off x="301751" y="1380744"/>
+            <a:ext cx="2615184" cy="3122675"/>
+          </a:xfrm>
+          <a:prstGeom prst="rect">
+            <a:avLst/>
+          </a:prstGeom>
+          <a:noFill/>
+          <a:effectLst/>
+        </p:spPr>
+        <p:txBody>
+          <a:bodyPr wrap="square" lIns="0" rIns="0" tIns="0" bIns="0">
+            <a:noAutofit/>
+          </a:bodyPr>
+          <a:lstStyle/>
+          <a:p>
+            <a:pPr>
+              <a:spcBef>
+                <a:spcPts val="0"/>
+              </a:spcBef>
+              <a:spcAft>
+                <a:spcPts val="400"/>
+              </a:spcAft>
+              <a:buNone/>
+              <a:lnSpc>
+                <a:spcPts val="1980"/>
+              </a:lnSpc>
+            </a:pPr>
+            <a:r>
+              <a:rPr lang="en-US" sz="1100" b="0" i="0" dirty="0">
+                <a:solidFill>
+                  <a:srgbClr val="333333"/>
+                </a:solidFill>
+                <a:latin typeface="Segoe UI"/>
+              </a:rPr>
+              <a:t>UI</a:t>
+            </a:r>
+            <a:r>
+              <a:rPr lang="ja-JP" sz="1100" b="0" i="0" dirty="0">
+                <a:solidFill>
+                  <a:srgbClr val="333333"/>
+                </a:solidFill>
+                <a:ea typeface="Meiryo"/>
+              </a:rPr>
+              <a:t>と</a:t>
+            </a:r>
+            <a:r>
+              <a:rPr lang="en-US" sz="1100" b="0" i="0" dirty="0">
+                <a:solidFill>
+                  <a:srgbClr val="333333"/>
+                </a:solidFill>
+                <a:latin typeface="Segoe UI"/>
+              </a:rPr>
+              <a:t>API</a:t>
+            </a:r>
+            <a:r>
+              <a:rPr lang="ja-JP" sz="1100" b="0" i="0" dirty="0">
+                <a:solidFill>
+                  <a:srgbClr val="333333"/>
+                </a:solidFill>
+                <a:ea typeface="Meiryo"/>
+              </a:rPr>
+              <a:t>の境界を明確にする。</a:t>
+            </a:r>
+          </a:p>
+          <a:p>
+            <a:pPr marL="228600" indent="-228600">
+              <a:spcBef>
+                <a:spcPts val="0"/>
+              </a:spcBef>
+              <a:spcAft>
+                <a:spcPts val="400"/>
+              </a:spcAft>
+              <a:buChar char="•"/>
+              <a:lnSpc>
+                <a:spcPts val="1980"/>
+              </a:lnSpc>
+            </a:pPr>
+            <a:r>
+              <a:rPr lang="en-US" sz="1100" b="0" i="0" dirty="0">
+                <a:solidFill>
+                  <a:srgbClr val="333333"/>
+                </a:solidFill>
+                <a:latin typeface="Segoe UI"/>
+              </a:rPr>
+              <a:t>CSS</a:t>
+            </a:r>
+            <a:r>
+              <a:rPr lang="ja-JP" sz="1100" b="0" i="0" dirty="0">
+                <a:solidFill>
+                  <a:srgbClr val="333333"/>
+                </a:solidFill>
+                <a:ea typeface="Meiryo"/>
+              </a:rPr>
+              <a:t>フレームワークと</a:t>
+            </a:r>
+            <a:r>
+              <a:rPr lang="en-US" sz="1100" b="0" i="0" dirty="0">
+                <a:solidFill>
+                  <a:srgbClr val="333333"/>
+                </a:solidFill>
+                <a:latin typeface="Segoe UI"/>
+              </a:rPr>
+              <a:t>UI</a:t>
+            </a:r>
+            <a:r>
+              <a:rPr lang="ja-JP" sz="1100" b="0" i="0" dirty="0">
+                <a:solidFill>
+                  <a:srgbClr val="333333"/>
+                </a:solidFill>
+                <a:ea typeface="Meiryo"/>
+              </a:rPr>
+              <a:t>ライブラリを指定する。</a:t>
+            </a:r>
+          </a:p>
+          <a:p>
+            <a:pPr marL="228600" indent="-228600">
+              <a:spcBef>
+                <a:spcPts val="0"/>
+              </a:spcBef>
+              <a:spcAft>
+                <a:spcPts val="400"/>
+              </a:spcAft>
+              <a:buChar char="•"/>
+              <a:lnSpc>
+                <a:spcPts val="1980"/>
+              </a:lnSpc>
+            </a:pPr>
+            <a:r>
+              <a:rPr lang="ja-JP" sz="1100" b="0" i="0" dirty="0">
+                <a:solidFill>
+                  <a:srgbClr val="333333"/>
+                </a:solidFill>
+                <a:ea typeface="Meiryo"/>
+              </a:rPr>
+              <a:t>状態管理と</a:t>
+            </a:r>
+            <a:r>
+              <a:rPr lang="en-US" sz="1100" b="0" i="0" dirty="0">
+                <a:solidFill>
+                  <a:srgbClr val="333333"/>
+                </a:solidFill>
+                <a:latin typeface="Segoe UI"/>
+              </a:rPr>
+              <a:t>API</a:t>
+            </a:r>
+            <a:r>
+              <a:rPr lang="ja-JP" sz="1100" b="0" i="0" dirty="0">
+                <a:solidFill>
+                  <a:srgbClr val="333333"/>
+                </a:solidFill>
+                <a:ea typeface="Meiryo"/>
+              </a:rPr>
+              <a:t>呼び出しの配置を決める。</a:t>
+            </a:r>
+          </a:p>
+          <a:p>
+            <a:pPr marL="228600" indent="-228600">
+              <a:spcBef>
+                <a:spcPts val="0"/>
+              </a:spcBef>
+              <a:spcAft>
+                <a:spcPts val="400"/>
+              </a:spcAft>
+              <a:buChar char="•"/>
+              <a:lnSpc>
+                <a:spcPts val="1980"/>
+              </a:lnSpc>
+            </a:pPr>
+            <a:r>
+              <a:rPr lang="ja-JP" sz="1100" b="0" i="0" dirty="0">
+                <a:solidFill>
+                  <a:srgbClr val="333333"/>
+                </a:solidFill>
+                <a:ea typeface="Meiryo"/>
+              </a:rPr>
+              <a:t>表示品質と繰り返し作業の効率を両立させる。</a:t>
+            </a:r>
+          </a:p>
+        </p:txBody>
+      </p:sp>
+      <p:sp>
+        <p:nvSpPr>
+          <p:cNvPr id="9" name="Rectangle 8"/>
+          <p:cNvSpPr/>
+          <p:nvPr/>
+        </p:nvSpPr>
+        <p:spPr>
+          <a:xfrm>
+            <a:off x="3127248" y="941832"/>
+            <a:ext cx="2889504" cy="3671315"/>
+          </a:xfrm>
+          <a:prstGeom prst="rect">
+            <a:avLst/>
+          </a:prstGeom>
+          <a:solidFill>
+            <a:srgbClr val="F5F5F5"/>
+          </a:solidFill>
+          <a:ln w="9525">
+            <a:solidFill>
+              <a:srgbClr val="E0E0E0"/>
+            </a:solidFill>
+          </a:ln>
+          <a:effectLst/>
+        </p:spPr>
+        <p:style>
+          <a:lnRef idx="1">
+            <a:schemeClr val="accent1"/>
+          </a:lnRef>
+          <a:fillRef idx="3">
+            <a:schemeClr val="accent1"/>
+          </a:fillRef>
+          <a:effectRef idx="2">
+            <a:schemeClr val="accent1"/>
+          </a:effectRef>
+          <a:fontRef idx="minor">
+            <a:schemeClr val="lt1"/>
+          </a:fontRef>
+        </p:style>
+        <p:txBody>
+          <a:bodyPr rtlCol="0" anchor="ctr"/>
+          <a:lstStyle/>
+          <a:p>
+            <a:pPr algn="ctr"/>
+          </a:p>
+        </p:txBody>
+      </p:sp>
+      <p:sp>
+        <p:nvSpPr>
+          <p:cNvPr id="10" name="TextBox 9"/>
+          <p:cNvSpPr txBox="1"/>
+          <p:nvPr/>
+        </p:nvSpPr>
+        <p:spPr>
+          <a:xfrm>
+            <a:off x="3264408" y="1051560"/>
+            <a:ext cx="2615184" cy="320040"/>
+          </a:xfrm>
+          <a:prstGeom prst="rect">
+            <a:avLst/>
+          </a:prstGeom>
+          <a:noFill/>
+          <a:effectLst/>
+        </p:spPr>
+        <p:txBody>
+          <a:bodyPr wrap="square" lIns="0" rIns="0" tIns="0" bIns="0" anchor="t">
+            <a:noAutofit/>
+          </a:bodyPr>
+          <a:lstStyle/>
+          <a:p>
+            <a:r>
+              <a:rPr lang="ja-JP" sz="1400" b="1" i="0" dirty="0">
+                <a:solidFill>
+                  <a:srgbClr val="333333"/>
+                </a:solidFill>
+                <a:ea typeface="Meiryo"/>
+              </a:rPr>
+              <a:t>データ分析</a:t>
+            </a:r>
+          </a:p>
+        </p:txBody>
+      </p:sp>
+      <p:sp>
+        <p:nvSpPr>
+          <p:cNvPr id="11" name="Rectangle 10"/>
+          <p:cNvSpPr/>
+          <p:nvPr/>
+        </p:nvSpPr>
+        <p:spPr>
+          <a:xfrm>
+            <a:off x="3264408" y="1307592"/>
+            <a:ext cx="2615184" cy="12700"/>
+          </a:xfrm>
+          <a:prstGeom prst="rect">
+            <a:avLst/>
+          </a:prstGeom>
+          <a:solidFill>
+            <a:srgbClr val="E0E0E0"/>
+          </a:solidFill>
+          <a:ln>
+            <a:noFill/>
+          </a:ln>
+          <a:effectLst/>
+        </p:spPr>
+        <p:style>
+          <a:lnRef idx="1">
+            <a:schemeClr val="accent1"/>
+          </a:lnRef>
+          <a:fillRef idx="3">
+            <a:schemeClr val="accent1"/>
+          </a:fillRef>
+          <a:effectRef idx="2">
+            <a:schemeClr val="accent1"/>
+          </a:effectRef>
+          <a:fontRef idx="minor">
+            <a:schemeClr val="lt1"/>
+          </a:fontRef>
+        </p:style>
+        <p:txBody>
+          <a:bodyPr rtlCol="0" anchor="ctr"/>
+          <a:lstStyle/>
+          <a:p>
+            <a:pPr algn="ctr"/>
+          </a:p>
+        </p:txBody>
+      </p:sp>
+      <p:sp>
+        <p:nvSpPr>
+          <p:cNvPr id="12" name="TextBox 11"/>
+          <p:cNvSpPr txBox="1"/>
+          <p:nvPr/>
+        </p:nvSpPr>
+        <p:spPr>
+          <a:xfrm>
+            <a:off x="3264408" y="1380744"/>
+            <a:ext cx="2615184" cy="3122675"/>
+          </a:xfrm>
+          <a:prstGeom prst="rect">
+            <a:avLst/>
+          </a:prstGeom>
+          <a:noFill/>
+          <a:effectLst/>
+        </p:spPr>
+        <p:txBody>
+          <a:bodyPr wrap="square" lIns="0" rIns="0" tIns="0" bIns="0">
+            <a:noAutofit/>
+          </a:bodyPr>
+          <a:lstStyle/>
+          <a:p>
+            <a:pPr>
+              <a:spcBef>
+                <a:spcPts val="0"/>
+              </a:spcBef>
+              <a:spcAft>
+                <a:spcPts val="400"/>
+              </a:spcAft>
+              <a:buNone/>
+              <a:lnSpc>
+                <a:spcPts val="1980"/>
+              </a:lnSpc>
+            </a:pPr>
+            <a:r>
+              <a:rPr lang="ja-JP" sz="1100" b="0" i="0" dirty="0">
+                <a:solidFill>
+                  <a:srgbClr val="333333"/>
+                </a:solidFill>
+                <a:ea typeface="Meiryo"/>
+              </a:rPr>
+              <a:t>再現性とデータ管理を優先する。</a:t>
+            </a:r>
+          </a:p>
+          <a:p>
+            <a:pPr marL="228600" indent="-228600">
+              <a:spcBef>
+                <a:spcPts val="0"/>
+              </a:spcBef>
+              <a:spcAft>
+                <a:spcPts val="400"/>
+              </a:spcAft>
+              <a:buChar char="•"/>
+              <a:lnSpc>
+                <a:spcPts val="1980"/>
+              </a:lnSpc>
+            </a:pPr>
+            <a:r>
+              <a:rPr lang="en-US" sz="1100" b="0" i="0" dirty="0">
+                <a:solidFill>
+                  <a:srgbClr val="333333"/>
+                </a:solidFill>
+                <a:latin typeface="Segoe UI"/>
+              </a:rPr>
+              <a:t>pandas</a:t>
+            </a:r>
+            <a:r>
+              <a:rPr lang="ja-JP" sz="1100" b="0" i="0" dirty="0">
+                <a:solidFill>
+                  <a:srgbClr val="333333"/>
+                </a:solidFill>
+                <a:ea typeface="Meiryo"/>
+              </a:rPr>
+              <a:t>や</a:t>
+            </a:r>
+            <a:r>
+              <a:rPr lang="en-US" sz="1100" b="0" i="0" dirty="0">
+                <a:solidFill>
+                  <a:srgbClr val="333333"/>
+                </a:solidFill>
+                <a:latin typeface="Segoe UI"/>
+              </a:rPr>
+              <a:t>scikit-learn</a:t>
+            </a:r>
+            <a:r>
+              <a:rPr lang="ja-JP" sz="1100" b="0" i="0" dirty="0">
+                <a:solidFill>
+                  <a:srgbClr val="333333"/>
+                </a:solidFill>
+                <a:ea typeface="Meiryo"/>
+              </a:rPr>
+              <a:t>などの標準を固定する。</a:t>
+            </a:r>
+          </a:p>
+          <a:p>
+            <a:pPr marL="228600" indent="-228600">
+              <a:spcBef>
+                <a:spcPts val="0"/>
+              </a:spcBef>
+              <a:spcAft>
+                <a:spcPts val="400"/>
+              </a:spcAft>
+              <a:buChar char="•"/>
+              <a:lnSpc>
+                <a:spcPts val="1980"/>
+              </a:lnSpc>
+            </a:pPr>
+            <a:r>
+              <a:rPr lang="en-US" sz="1100" b="0" i="0" dirty="0">
+                <a:solidFill>
+                  <a:srgbClr val="333333"/>
+                </a:solidFill>
+                <a:latin typeface="Consolas"/>
+              </a:rPr>
+              <a:t>data/raw</a:t>
+            </a:r>
+            <a:r>
+              <a:rPr lang="ja-JP" sz="1100" b="0" i="0" dirty="0">
+                <a:solidFill>
+                  <a:srgbClr val="333333"/>
+                </a:solidFill>
+                <a:ea typeface="Meiryo"/>
+              </a:rPr>
+              <a:t>と</a:t>
+            </a:r>
+            <a:r>
+              <a:rPr lang="en-US" sz="1100" b="0" i="0" dirty="0">
+                <a:solidFill>
+                  <a:srgbClr val="333333"/>
+                </a:solidFill>
+                <a:latin typeface="Consolas"/>
+              </a:rPr>
+              <a:t>data/processed</a:t>
+            </a:r>
+            <a:r>
+              <a:rPr lang="ja-JP" sz="1100" b="0" i="0" dirty="0">
+                <a:solidFill>
+                  <a:srgbClr val="333333"/>
+                </a:solidFill>
+                <a:ea typeface="Meiryo"/>
+              </a:rPr>
+              <a:t>を分ける。</a:t>
+            </a:r>
+          </a:p>
+          <a:p>
+            <a:pPr marL="228600" indent="-228600">
+              <a:spcBef>
+                <a:spcPts val="0"/>
+              </a:spcBef>
+              <a:spcAft>
+                <a:spcPts val="400"/>
+              </a:spcAft>
+              <a:buChar char="•"/>
+              <a:lnSpc>
+                <a:spcPts val="1980"/>
+              </a:lnSpc>
+            </a:pPr>
+            <a:r>
+              <a:rPr lang="ja-JP" sz="1100" b="0" i="0" dirty="0">
+                <a:solidFill>
+                  <a:srgbClr val="333333"/>
+                </a:solidFill>
+                <a:ea typeface="Meiryo"/>
+              </a:rPr>
+              <a:t>ランダムシードや処理手順を残す。</a:t>
+            </a:r>
+          </a:p>
+        </p:txBody>
+      </p:sp>
+      <p:sp>
+        <p:nvSpPr>
+          <p:cNvPr id="13" name="Rectangle 12"/>
+          <p:cNvSpPr/>
+          <p:nvPr/>
+        </p:nvSpPr>
+        <p:spPr>
+          <a:xfrm>
+            <a:off x="6089904" y="941832"/>
+            <a:ext cx="2889504" cy="3671315"/>
+          </a:xfrm>
+          <a:prstGeom prst="rect">
+            <a:avLst/>
+          </a:prstGeom>
+          <a:solidFill>
+            <a:srgbClr val="F5F5F5"/>
+          </a:solidFill>
+          <a:ln w="9525">
+            <a:solidFill>
+              <a:srgbClr val="E0E0E0"/>
+            </a:solidFill>
+          </a:ln>
+          <a:effectLst/>
+        </p:spPr>
+        <p:style>
+          <a:lnRef idx="1">
+            <a:schemeClr val="accent1"/>
+          </a:lnRef>
+          <a:fillRef idx="3">
+            <a:schemeClr val="accent1"/>
+          </a:fillRef>
+          <a:effectRef idx="2">
+            <a:schemeClr val="accent1"/>
+          </a:effectRef>
+          <a:fontRef idx="minor">
+            <a:schemeClr val="lt1"/>
+          </a:fontRef>
+        </p:style>
+        <p:txBody>
+          <a:bodyPr rtlCol="0" anchor="ctr"/>
+          <a:lstStyle/>
+          <a:p>
+            <a:pPr algn="ctr"/>
+          </a:p>
+        </p:txBody>
+      </p:sp>
+      <p:sp>
+        <p:nvSpPr>
+          <p:cNvPr id="14" name="TextBox 13"/>
+          <p:cNvSpPr txBox="1"/>
+          <p:nvPr/>
+        </p:nvSpPr>
+        <p:spPr>
+          <a:xfrm>
+            <a:off x="6227064" y="1051560"/>
+            <a:ext cx="2615184" cy="320040"/>
+          </a:xfrm>
+          <a:prstGeom prst="rect">
+            <a:avLst/>
+          </a:prstGeom>
+          <a:noFill/>
+          <a:effectLst/>
+        </p:spPr>
+        <p:txBody>
+          <a:bodyPr wrap="square" lIns="0" rIns="0" tIns="0" bIns="0" anchor="t">
+            <a:noAutofit/>
+          </a:bodyPr>
+          <a:lstStyle/>
+          <a:p>
+            <a:r>
+              <a:rPr lang="ja-JP" sz="1400" b="1" i="0" dirty="0">
+                <a:solidFill>
+                  <a:srgbClr val="333333"/>
+                </a:solidFill>
+                <a:ea typeface="Meiryo"/>
+              </a:rPr>
+              <a:t>自動化</a:t>
+            </a:r>
+          </a:p>
+        </p:txBody>
+      </p:sp>
+      <p:sp>
+        <p:nvSpPr>
+          <p:cNvPr id="15" name="Rectangle 14"/>
+          <p:cNvSpPr/>
+          <p:nvPr/>
+        </p:nvSpPr>
+        <p:spPr>
+          <a:xfrm>
+            <a:off x="6227064" y="1307592"/>
+            <a:ext cx="2615184" cy="12700"/>
+          </a:xfrm>
+          <a:prstGeom prst="rect">
+            <a:avLst/>
+          </a:prstGeom>
+          <a:solidFill>
+            <a:srgbClr val="E0E0E0"/>
+          </a:solidFill>
+          <a:ln>
+            <a:noFill/>
+          </a:ln>
+          <a:effectLst/>
+        </p:spPr>
+        <p:style>
+          <a:lnRef idx="1">
+            <a:schemeClr val="accent1"/>
+          </a:lnRef>
+          <a:fillRef idx="3">
+            <a:schemeClr val="accent1"/>
+          </a:fillRef>
+          <a:effectRef idx="2">
+            <a:schemeClr val="accent1"/>
+          </a:effectRef>
+          <a:fontRef idx="minor">
+            <a:schemeClr val="lt1"/>
+          </a:fontRef>
+        </p:style>
+        <p:txBody>
+          <a:bodyPr rtlCol="0" anchor="ctr"/>
+          <a:lstStyle/>
+          <a:p>
+            <a:pPr algn="ctr"/>
+          </a:p>
+        </p:txBody>
+      </p:sp>
+      <p:sp>
+        <p:nvSpPr>
+          <p:cNvPr id="16" name="TextBox 15"/>
+          <p:cNvSpPr txBox="1"/>
+          <p:nvPr/>
+        </p:nvSpPr>
+        <p:spPr>
+          <a:xfrm>
+            <a:off x="6227064" y="1380744"/>
+            <a:ext cx="2615184" cy="3122675"/>
+          </a:xfrm>
+          <a:prstGeom prst="rect">
+            <a:avLst/>
+          </a:prstGeom>
+          <a:noFill/>
+          <a:effectLst/>
+        </p:spPr>
+        <p:txBody>
+          <a:bodyPr wrap="square" lIns="0" rIns="0" tIns="0" bIns="0">
+            <a:noAutofit/>
+          </a:bodyPr>
+          <a:lstStyle/>
+          <a:p>
+            <a:pPr>
+              <a:spcBef>
+                <a:spcPts val="0"/>
+              </a:spcBef>
+              <a:spcAft>
+                <a:spcPts val="400"/>
+              </a:spcAft>
+              <a:buNone/>
+              <a:lnSpc>
+                <a:spcPts val="1980"/>
+              </a:lnSpc>
+            </a:pPr>
+            <a:r>
+              <a:rPr lang="ja-JP" sz="1100" b="0" i="0" dirty="0">
+                <a:solidFill>
+                  <a:srgbClr val="333333"/>
+                </a:solidFill>
+                <a:ea typeface="Meiryo"/>
+              </a:rPr>
+              <a:t>操作対象と安全策を最初に縛る。</a:t>
+            </a:r>
+          </a:p>
+          <a:p>
+            <a:pPr marL="228600" indent="-228600">
+              <a:spcBef>
+                <a:spcPts val="0"/>
+              </a:spcBef>
+              <a:spcAft>
+                <a:spcPts val="400"/>
+              </a:spcAft>
+              <a:buChar char="•"/>
+              <a:lnSpc>
+                <a:spcPts val="1980"/>
+              </a:lnSpc>
+            </a:pPr>
+            <a:r>
+              <a:rPr lang="en-US" sz="1100" b="0" i="0" dirty="0">
+                <a:solidFill>
+                  <a:srgbClr val="333333"/>
+                </a:solidFill>
+                <a:latin typeface="Segoe UI"/>
+              </a:rPr>
+              <a:t>Windows</a:t>
+            </a:r>
+            <a:r>
+              <a:rPr lang="ja-JP" sz="1100" b="0" i="0" dirty="0">
+                <a:solidFill>
+                  <a:srgbClr val="333333"/>
+                </a:solidFill>
+                <a:ea typeface="Meiryo"/>
+              </a:rPr>
+              <a:t>、</a:t>
+            </a:r>
+            <a:r>
+              <a:rPr lang="en-US" sz="1100" b="0" i="0" dirty="0">
+                <a:solidFill>
+                  <a:srgbClr val="333333"/>
+                </a:solidFill>
+                <a:latin typeface="Segoe UI"/>
+              </a:rPr>
+              <a:t>PowerShell</a:t>
+            </a:r>
+            <a:r>
+              <a:rPr lang="ja-JP" sz="1100" b="0" i="0" dirty="0">
+                <a:solidFill>
+                  <a:srgbClr val="333333"/>
+                </a:solidFill>
+                <a:ea typeface="Meiryo"/>
+              </a:rPr>
+              <a:t>、</a:t>
+            </a:r>
+            <a:r>
+              <a:rPr lang="en-US" sz="1100" b="0" i="0" dirty="0">
+                <a:solidFill>
+                  <a:srgbClr val="333333"/>
+                </a:solidFill>
+                <a:latin typeface="Segoe UI"/>
+              </a:rPr>
+              <a:t>WSL</a:t>
+            </a:r>
+            <a:r>
+              <a:rPr lang="ja-JP" sz="1100" b="0" i="0" dirty="0">
+                <a:solidFill>
+                  <a:srgbClr val="333333"/>
+                </a:solidFill>
+                <a:ea typeface="Meiryo"/>
+              </a:rPr>
+              <a:t>などの前提を書く。</a:t>
+            </a:r>
+          </a:p>
+          <a:p>
+            <a:pPr marL="228600" indent="-228600">
+              <a:spcBef>
+                <a:spcPts val="0"/>
+              </a:spcBef>
+              <a:spcAft>
+                <a:spcPts val="400"/>
+              </a:spcAft>
+              <a:buChar char="•"/>
+              <a:lnSpc>
+                <a:spcPts val="1980"/>
+              </a:lnSpc>
+            </a:pPr>
+            <a:r>
+              <a:rPr lang="en-US" sz="1100" b="0" i="0" dirty="0">
+                <a:solidFill>
+                  <a:srgbClr val="333333"/>
+                </a:solidFill>
+                <a:latin typeface="Consolas"/>
+              </a:rPr>
+              <a:t>dry-run</a:t>
+            </a:r>
+            <a:r>
+              <a:rPr lang="ja-JP" sz="1100" b="0" i="0" dirty="0">
+                <a:solidFill>
+                  <a:srgbClr val="333333"/>
+                </a:solidFill>
+                <a:ea typeface="Meiryo"/>
+              </a:rPr>
+              <a:t>や</a:t>
+            </a:r>
+            <a:r>
+              <a:rPr lang="en-US" sz="1100" b="0" i="0" dirty="0">
+                <a:solidFill>
+                  <a:srgbClr val="333333"/>
+                </a:solidFill>
+                <a:latin typeface="Consolas"/>
+              </a:rPr>
+              <a:t>-WhatIf</a:t>
+            </a:r>
+            <a:r>
+              <a:rPr lang="ja-JP" sz="1100" b="0" i="0" dirty="0">
+                <a:solidFill>
+                  <a:srgbClr val="333333"/>
+                </a:solidFill>
+                <a:ea typeface="Meiryo"/>
+              </a:rPr>
+              <a:t>で破壊的操作を防ぐ。</a:t>
+            </a:r>
+          </a:p>
+          <a:p>
+            <a:pPr marL="228600" indent="-228600">
+              <a:spcBef>
+                <a:spcPts val="0"/>
+              </a:spcBef>
+              <a:spcAft>
+                <a:spcPts val="400"/>
+              </a:spcAft>
+              <a:buChar char="•"/>
+              <a:lnSpc>
+                <a:spcPts val="1980"/>
+              </a:lnSpc>
+            </a:pPr>
+            <a:r>
+              <a:rPr lang="ja-JP" sz="1100" b="0" i="0" dirty="0">
+                <a:solidFill>
+                  <a:srgbClr val="333333"/>
+                </a:solidFill>
+                <a:ea typeface="Meiryo"/>
+              </a:rPr>
+              <a:t>ログ保存とエラー処理の方針を決める。</a:t>
+            </a:r>
+          </a:p>
+        </p:txBody>
+      </p:sp>
+      <p:sp>
+        <p:nvSpPr>
+          <p:cNvPr id="17" name="Rectangle 16"/>
+          <p:cNvSpPr/>
+          <p:nvPr/>
+        </p:nvSpPr>
+        <p:spPr>
+          <a:xfrm>
+            <a:off x="0" y="4777740"/>
+            <a:ext cx="9144000" cy="9525"/>
+          </a:xfrm>
+          <a:prstGeom prst="rect">
+            <a:avLst/>
+          </a:prstGeom>
+          <a:solidFill>
+            <a:srgbClr val="E0E0E0"/>
+          </a:solidFill>
+          <a:ln>
+            <a:noFill/>
+          </a:ln>
+          <a:effectLst/>
+        </p:spPr>
+        <p:style>
+          <a:lnRef idx="1">
+            <a:schemeClr val="accent1"/>
+          </a:lnRef>
+          <a:fillRef idx="3">
+            <a:schemeClr val="accent1"/>
+          </a:fillRef>
+          <a:effectRef idx="2">
+            <a:schemeClr val="accent1"/>
+          </a:effectRef>
+          <a:fontRef idx="minor">
+            <a:schemeClr val="lt1"/>
+          </a:fontRef>
+        </p:style>
+        <p:txBody>
+          <a:bodyPr rtlCol="0" anchor="ctr"/>
+          <a:lstStyle/>
+          <a:p>
+            <a:pPr algn="ctr"/>
+          </a:p>
+        </p:txBody>
+      </p:sp>
+      <p:sp>
+        <p:nvSpPr>
+          <p:cNvPr id="18" name="TextBox 17"/>
+          <p:cNvSpPr txBox="1"/>
+          <p:nvPr/>
+        </p:nvSpPr>
+        <p:spPr>
+          <a:xfrm>
+            <a:off x="228600" y="4823459"/>
+            <a:ext cx="1828800" cy="274320"/>
+          </a:xfrm>
+          <a:prstGeom prst="rect">
+            <a:avLst/>
+          </a:prstGeom>
+          <a:noFill/>
+        </p:spPr>
+        <p:txBody>
+          <a:bodyPr wrap="none" anchor="ctr" lIns="0" rIns="0" tIns="0" bIns="0">
+            <a:spAutoFit/>
+          </a:bodyPr>
+          <a:lstStyle/>
+          <a:p>
+            <a:fld id="{A2DD28E6-8D32-46BE-B1E5-1AE75BACB93B}" type="slidenum">
+              <a:rPr lang="ja-JP" smtClean="0" sz="1000">
+                <a:solidFill>
+                  <a:srgbClr val="888888"/>
+                </a:solidFill>
+              </a:rPr>
+              <a:t>&lt;#&gt;</a:t>
+            </a:fld>
+            <a:r>
+              <a:rPr lang="ja-JP" smtClean="0" sz="1000">
+                <a:solidFill>
+                  <a:srgbClr val="888888"/>
+                </a:solidFill>
+              </a:rPr>
+              <a:t>/</a:t>
+            </a:r>
+            <a:fld id="{A27C5AE5-F57A-4A01-8CE5-AAF342FF0C98}" type="slidecount">
+              <a:rPr lang="ja-JP" smtClean="0" sz="1000">
+                <a:solidFill>
+                  <a:srgbClr val="888888"/>
+                </a:solidFill>
+              </a:rPr>
+              <a:t>11</a:t>
             </a:fld>
           </a:p>
         </p:txBody>
